--- a/competition/EraSeMap_RKNP_ISEF_RU_MIXED.pptx
+++ b/competition/EraSeMap_RKNP_ISEF_RU_MIXED.pptx
@@ -2,25 +2,25 @@
 <file path=ppt/presentation.xml><?xml version="1.0" encoding="utf-8"?>
 <p:presentation xmlns:p="http://schemas.openxmlformats.org/presentationml/2006/main">
   <p:sldMasterIdLst>
-    <p:sldMasterId xmlns:r="http://schemas.openxmlformats.org/officeDocument/2006/relationships" id="2147483648" r:id="R9efe4963d3d74aac"/>
+    <p:sldMasterId xmlns:r="http://schemas.openxmlformats.org/officeDocument/2006/relationships" id="2147483648" r:id="R212bfafe825c41d8"/>
   </p:sldMasterIdLst>
   <p:notesMasterIdLst>
-    <p:notesMasterId xmlns:r="http://schemas.openxmlformats.org/officeDocument/2006/relationships" r:id="Rd4b8fba1edd44586"/>
+    <p:notesMasterId xmlns:r="http://schemas.openxmlformats.org/officeDocument/2006/relationships" r:id="R3c35da0c616c4e58"/>
   </p:notesMasterIdLst>
   <p:sldIdLst>
-    <p:sldId xmlns:r="http://schemas.openxmlformats.org/officeDocument/2006/relationships" id="256" r:id="Reaa7675c994d4a2e"/>
-    <p:sldId xmlns:r="http://schemas.openxmlformats.org/officeDocument/2006/relationships" id="257" r:id="R57533149af2c4a09"/>
-    <p:sldId xmlns:r="http://schemas.openxmlformats.org/officeDocument/2006/relationships" id="258" r:id="Rce297e63f08e4dd1"/>
-    <p:sldId xmlns:r="http://schemas.openxmlformats.org/officeDocument/2006/relationships" id="259" r:id="R7446eea5dd7e495f"/>
-    <p:sldId xmlns:r="http://schemas.openxmlformats.org/officeDocument/2006/relationships" id="260" r:id="R01f76af4f76e4cab"/>
-    <p:sldId xmlns:r="http://schemas.openxmlformats.org/officeDocument/2006/relationships" id="261" r:id="Rb73bceef41d245b0"/>
-    <p:sldId xmlns:r="http://schemas.openxmlformats.org/officeDocument/2006/relationships" id="262" r:id="Rc96e76cb6dd646d2"/>
-    <p:sldId xmlns:r="http://schemas.openxmlformats.org/officeDocument/2006/relationships" id="263" r:id="R606f4c5477d34a43"/>
-    <p:sldId xmlns:r="http://schemas.openxmlformats.org/officeDocument/2006/relationships" id="264" r:id="R8dc088a1b1414e1f"/>
-    <p:sldId xmlns:r="http://schemas.openxmlformats.org/officeDocument/2006/relationships" id="265" r:id="Rb4edc2de6e0c4eb7"/>
-    <p:sldId xmlns:r="http://schemas.openxmlformats.org/officeDocument/2006/relationships" id="266" r:id="Rfd6b3040fe764f59"/>
-    <p:sldId xmlns:r="http://schemas.openxmlformats.org/officeDocument/2006/relationships" id="267" r:id="Rb0440168f0ee4755"/>
-    <p:sldId xmlns:r="http://schemas.openxmlformats.org/officeDocument/2006/relationships" id="268" r:id="R15af4ffebfb6482b"/>
+    <p:sldId xmlns:r="http://schemas.openxmlformats.org/officeDocument/2006/relationships" id="256" r:id="R8acd291a56f140c0"/>
+    <p:sldId xmlns:r="http://schemas.openxmlformats.org/officeDocument/2006/relationships" id="257" r:id="R5992104fadfe41fc"/>
+    <p:sldId xmlns:r="http://schemas.openxmlformats.org/officeDocument/2006/relationships" id="258" r:id="R3baea67b876c4881"/>
+    <p:sldId xmlns:r="http://schemas.openxmlformats.org/officeDocument/2006/relationships" id="259" r:id="R5261537177374eb8"/>
+    <p:sldId xmlns:r="http://schemas.openxmlformats.org/officeDocument/2006/relationships" id="260" r:id="R1e0a568f1c844e44"/>
+    <p:sldId xmlns:r="http://schemas.openxmlformats.org/officeDocument/2006/relationships" id="261" r:id="Rbb2e217040054a47"/>
+    <p:sldId xmlns:r="http://schemas.openxmlformats.org/officeDocument/2006/relationships" id="262" r:id="R6bedd7df493243b1"/>
+    <p:sldId xmlns:r="http://schemas.openxmlformats.org/officeDocument/2006/relationships" id="263" r:id="R4596e5eab2e94583"/>
+    <p:sldId xmlns:r="http://schemas.openxmlformats.org/officeDocument/2006/relationships" id="264" r:id="R06a13e6591714bd5"/>
+    <p:sldId xmlns:r="http://schemas.openxmlformats.org/officeDocument/2006/relationships" id="265" r:id="Rdafe33efc3364bce"/>
+    <p:sldId xmlns:r="http://schemas.openxmlformats.org/officeDocument/2006/relationships" id="266" r:id="Rbdd65f6fd4ea45d9"/>
+    <p:sldId xmlns:r="http://schemas.openxmlformats.org/officeDocument/2006/relationships" id="267" r:id="Rcd9b5d4265d24861"/>
+    <p:sldId xmlns:r="http://schemas.openxmlformats.org/officeDocument/2006/relationships" id="268" r:id="R4718bfc6603a4e9f"/>
   </p:sldIdLst>
   <p:sldSz cx="9144000" cy="5143500"/>
   <p:notesSz cx="6858000" cy="9144000"/>
@@ -1387,7 +1387,7 @@
   </p:cSld>
   <p:clrMap bg1="lt1" tx1="dk1" bg2="lt2" tx2="dk2" accent1="accent1" accent2="accent2" accent3="accent3" accent4="accent4" accent5="accent5" accent6="accent6" hlink="hlink" folHlink="folHlink"/>
   <p:sldLayoutIdLst>
-    <p:sldLayoutId xmlns:r="http://schemas.openxmlformats.org/officeDocument/2006/relationships" id="2147483649" r:id="R350106a8a18148a1"/>
+    <p:sldLayoutId xmlns:r="http://schemas.openxmlformats.org/officeDocument/2006/relationships" id="2147483649" r:id="Rd2b49cb69a4d4eb8"/>
   </p:sldLayoutIdLst>
   <p:txStyles>
     <p:titleStyle>
@@ -1919,20 +1919,9 @@
   <p:cSld>
     <p:bg>
       <p:bgPr>
-        <a:gradFill xmlns:a="http://schemas.openxmlformats.org/drawingml/2006/main">
-          <a:gsLst>
-            <a:gs pos="0">
-              <a:srgbClr val="06131F"/>
-            </a:gs>
-            <a:gs pos="55000">
-              <a:srgbClr val="0E293C"/>
-            </a:gs>
-            <a:gs pos="100000">
-              <a:srgbClr val="1B4A5D"/>
-            </a:gs>
-          </a:gsLst>
-          <a:lin ang="8100000"/>
-        </a:gradFill>
+        <a:solidFill xmlns:a="http://schemas.openxmlformats.org/drawingml/2006/main">
+          <a:srgbClr val="F3F1EB"/>
+        </a:solidFill>
       </p:bgPr>
     </p:bg>
     <p:spTree>
@@ -1949,7 +1938,7 @@
           <p:cNvPr id="38" name="">
             <a:extLst xmlns:a="http://schemas.openxmlformats.org/drawingml/2006/main">
               <a:ext uri="{FF2B5EF4-FFF2-40B4-BE49-F238E27FC236}">
-                <a16:creationId xmlns:a16="http://schemas.microsoft.com/office/drawing/2014/main" id="{A7AA483F-A998-4DD9-9C3A-23276303A837}"/>
+                <a16:creationId xmlns:a16="http://schemas.microsoft.com/office/drawing/2014/main" id="{99F178C2-88B2-4DA7-BDB9-80461BC26B86}"/>
               </a:ext>
             </a:extLst>
           </p:cNvPr>
@@ -2006,7 +1995,7 @@
           <p:cNvPr id="2" name="">
             <a:extLst xmlns:a="http://schemas.openxmlformats.org/drawingml/2006/main">
               <a:ext uri="{FF2B5EF4-FFF2-40B4-BE49-F238E27FC236}">
-                <a16:creationId xmlns:a16="http://schemas.microsoft.com/office/drawing/2014/main" id="{6ACA52F5-968E-4C87-B820-C5E7320FF2C7}"/>
+                <a16:creationId xmlns:a16="http://schemas.microsoft.com/office/drawing/2014/main" id="{307564CD-6A92-4EFE-B331-7E816157E2F5}"/>
               </a:ext>
             </a:extLst>
           </p:cNvPr>
@@ -2063,7 +2052,7 @@
           <p:cNvPr id="3" name="">
             <a:extLst xmlns:a="http://schemas.openxmlformats.org/drawingml/2006/main">
               <a:ext uri="{FF2B5EF4-FFF2-40B4-BE49-F238E27FC236}">
-                <a16:creationId xmlns:a16="http://schemas.microsoft.com/office/drawing/2014/main" id="{2E649574-E530-479A-9652-416559B22AB6}"/>
+                <a16:creationId xmlns:a16="http://schemas.microsoft.com/office/drawing/2014/main" id="{74DBC465-94F6-40ED-89E3-E8844C009C23}"/>
               </a:ext>
             </a:extLst>
           </p:cNvPr>
@@ -2120,7 +2109,7 @@
           <p:cNvPr id="4" name="">
             <a:extLst xmlns:a="http://schemas.openxmlformats.org/drawingml/2006/main">
               <a:ext uri="{FF2B5EF4-FFF2-40B4-BE49-F238E27FC236}">
-                <a16:creationId xmlns:a16="http://schemas.microsoft.com/office/drawing/2014/main" id="{22ED4979-1048-4CD3-A501-98D9357A96AB}"/>
+                <a16:creationId xmlns:a16="http://schemas.microsoft.com/office/drawing/2014/main" id="{3BECFA6B-2F04-4671-A09B-CA4E20952B10}"/>
               </a:ext>
             </a:extLst>
           </p:cNvPr>
@@ -2151,7 +2140,7 @@
           <p:cNvPr id="5" name="">
             <a:extLst xmlns:a="http://schemas.openxmlformats.org/drawingml/2006/main">
               <a:ext uri="{FF2B5EF4-FFF2-40B4-BE49-F238E27FC236}">
-                <a16:creationId xmlns:a16="http://schemas.microsoft.com/office/drawing/2014/main" id="{C245184A-3E97-4C96-A74B-8F014DB99530}"/>
+                <a16:creationId xmlns:a16="http://schemas.microsoft.com/office/drawing/2014/main" id="{24399E37-FF99-454B-AE8C-8139A9B35BCB}"/>
               </a:ext>
             </a:extLst>
           </p:cNvPr>
@@ -2171,7 +2160,7 @@
           <a:noFill xmlns:a="http://schemas.openxmlformats.org/drawingml/2006/main"/>
           <a:ln xmlns:a="http://schemas.openxmlformats.org/drawingml/2006/main" w="9525">
             <a:solidFill>
-              <a:srgbClr val="2A4D65"/>
+              <a:srgbClr val="C5D4DC"/>
             </a:solidFill>
             <a:prstDash val="solid"/>
           </a:ln>
@@ -2182,7 +2171,7 @@
           <p:cNvPr id="6" name="">
             <a:extLst xmlns:a="http://schemas.openxmlformats.org/drawingml/2006/main">
               <a:ext uri="{FF2B5EF4-FFF2-40B4-BE49-F238E27FC236}">
-                <a16:creationId xmlns:a16="http://schemas.microsoft.com/office/drawing/2014/main" id="{1C80D197-4F0F-40D1-A6FA-E9C8121B495C}"/>
+                <a16:creationId xmlns:a16="http://schemas.microsoft.com/office/drawing/2014/main" id="{BE5B9EFE-8A60-467E-97A7-1FB2D3604BAD}"/>
               </a:ext>
             </a:extLst>
           </p:cNvPr>
@@ -2239,7 +2228,7 @@
           <p:cNvPr id="7" name="">
             <a:extLst xmlns:a="http://schemas.openxmlformats.org/drawingml/2006/main">
               <a:ext uri="{FF2B5EF4-FFF2-40B4-BE49-F238E27FC236}">
-                <a16:creationId xmlns:a16="http://schemas.microsoft.com/office/drawing/2014/main" id="{70CCCF23-5A71-4D40-A629-A578E488620B}"/>
+                <a16:creationId xmlns:a16="http://schemas.microsoft.com/office/drawing/2014/main" id="{0563FCCD-466B-4A79-8463-4F0F40D6A867}"/>
               </a:ext>
             </a:extLst>
           </p:cNvPr>
@@ -2296,7 +2285,7 @@
           <p:cNvPr id="8" name="">
             <a:extLst xmlns:a="http://schemas.openxmlformats.org/drawingml/2006/main">
               <a:ext uri="{FF2B5EF4-FFF2-40B4-BE49-F238E27FC236}">
-                <a16:creationId xmlns:a16="http://schemas.microsoft.com/office/drawing/2014/main" id="{72C06691-B973-418E-B4B6-B5DD7BE8375B}"/>
+                <a16:creationId xmlns:a16="http://schemas.microsoft.com/office/drawing/2014/main" id="{7A198857-245C-424A-8D31-CDDDAE727490}"/>
               </a:ext>
             </a:extLst>
           </p:cNvPr>
@@ -2353,7 +2342,7 @@
           <p:cNvPr id="9" name="">
             <a:extLst xmlns:a="http://schemas.openxmlformats.org/drawingml/2006/main">
               <a:ext uri="{FF2B5EF4-FFF2-40B4-BE49-F238E27FC236}">
-                <a16:creationId xmlns:a16="http://schemas.microsoft.com/office/drawing/2014/main" id="{7F3D5F9E-B12A-4EB8-8DC5-1C1B67F1149E}"/>
+                <a16:creationId xmlns:a16="http://schemas.microsoft.com/office/drawing/2014/main" id="{700391B0-734A-4725-A5FE-4D57BF0DF752}"/>
               </a:ext>
             </a:extLst>
           </p:cNvPr>
@@ -2384,7 +2373,7 @@
           <p:cNvPr id="10" name="">
             <a:extLst xmlns:a="http://schemas.openxmlformats.org/drawingml/2006/main">
               <a:ext uri="{FF2B5EF4-FFF2-40B4-BE49-F238E27FC236}">
-                <a16:creationId xmlns:a16="http://schemas.microsoft.com/office/drawing/2014/main" id="{1030B229-0D16-4C9F-8E1B-A4972346628A}"/>
+                <a16:creationId xmlns:a16="http://schemas.microsoft.com/office/drawing/2014/main" id="{1B9A4CA6-C869-4A65-B07D-C16ED0E1A200}"/>
               </a:ext>
             </a:extLst>
           </p:cNvPr>
@@ -2404,7 +2393,7 @@
           <a:noFill xmlns:a="http://schemas.openxmlformats.org/drawingml/2006/main"/>
           <a:ln xmlns:a="http://schemas.openxmlformats.org/drawingml/2006/main" w="9525">
             <a:solidFill>
-              <a:srgbClr val="2A4D65"/>
+              <a:srgbClr val="C5D4DC"/>
             </a:solidFill>
             <a:prstDash val="solid"/>
           </a:ln>
@@ -2415,7 +2404,7 @@
           <p:cNvPr id="11" name="">
             <a:extLst xmlns:a="http://schemas.openxmlformats.org/drawingml/2006/main">
               <a:ext uri="{FF2B5EF4-FFF2-40B4-BE49-F238E27FC236}">
-                <a16:creationId xmlns:a16="http://schemas.microsoft.com/office/drawing/2014/main" id="{99EF2C0B-0FB3-40D2-8662-D18C5BFB10E6}"/>
+                <a16:creationId xmlns:a16="http://schemas.microsoft.com/office/drawing/2014/main" id="{0A5FC105-1026-402E-8C88-015B4F0FAA13}"/>
               </a:ext>
             </a:extLst>
           </p:cNvPr>
@@ -2473,7 +2462,7 @@
           <p:cNvPr id="12" name="">
             <a:extLst xmlns:a="http://schemas.openxmlformats.org/drawingml/2006/main">
               <a:ext uri="{FF2B5EF4-FFF2-40B4-BE49-F238E27FC236}">
-                <a16:creationId xmlns:a16="http://schemas.microsoft.com/office/drawing/2014/main" id="{0F94F89E-ABDB-45EE-BF8E-B7B9F5776475}"/>
+                <a16:creationId xmlns:a16="http://schemas.microsoft.com/office/drawing/2014/main" id="{BC8BA8C8-EB14-4C77-A59C-7FA9FC2CAAA6}"/>
               </a:ext>
             </a:extLst>
           </p:cNvPr>
@@ -2493,7 +2482,7 @@
             </a:avLst>
           </a:prstGeom>
           <a:solidFill xmlns:a="http://schemas.openxmlformats.org/drawingml/2006/main">
-            <a:srgbClr val="102F46"/>
+            <a:srgbClr val="FFFFFF"/>
           </a:solidFill>
           <a:ln xmlns:a="http://schemas.openxmlformats.org/drawingml/2006/main" w="9525">
             <a:solidFill>
@@ -2508,7 +2497,7 @@
           <p:cNvPr id="13" name="">
             <a:extLst xmlns:a="http://schemas.openxmlformats.org/drawingml/2006/main">
               <a:ext uri="{FF2B5EF4-FFF2-40B4-BE49-F238E27FC236}">
-                <a16:creationId xmlns:a16="http://schemas.microsoft.com/office/drawing/2014/main" id="{FCCAB114-E190-4056-A6D4-C4586BD03192}"/>
+                <a16:creationId xmlns:a16="http://schemas.microsoft.com/office/drawing/2014/main" id="{BDADFC30-CE31-4B4A-90BA-307D2BC6D058}"/>
               </a:ext>
             </a:extLst>
           </p:cNvPr>
@@ -2566,7 +2555,7 @@
           <p:cNvPr id="14" name="">
             <a:extLst xmlns:a="http://schemas.openxmlformats.org/drawingml/2006/main">
               <a:ext uri="{FF2B5EF4-FFF2-40B4-BE49-F238E27FC236}">
-                <a16:creationId xmlns:a16="http://schemas.microsoft.com/office/drawing/2014/main" id="{273C4695-4BE7-47F2-9A4E-414FAD3894A8}"/>
+                <a16:creationId xmlns:a16="http://schemas.microsoft.com/office/drawing/2014/main" id="{EB44BE91-2BB1-401B-BA71-BCE92FC30BE6}"/>
               </a:ext>
             </a:extLst>
           </p:cNvPr>
@@ -2598,7 +2587,7 @@
             <a:pPr algn="l">
               <a:defRPr sz="3000" b="0">
                 <a:solidFill>
-                  <a:srgbClr val="F3F8FA"/>
+                  <a:srgbClr val="132E41"/>
                 </a:solidFill>
                 <a:latin typeface="Georgia"/>
                 <a:ea typeface="Georgia"/>
@@ -2608,7 +2597,7 @@
             <a:r>
               <a:rPr sz="3000" b="0">
                 <a:solidFill>
-                  <a:srgbClr val="F3F8FA"/>
+                  <a:srgbClr val="132E41"/>
                 </a:solidFill>
                 <a:latin typeface="Georgia"/>
                 <a:ea typeface="Georgia"/>
@@ -2624,7 +2613,7 @@
           <p:cNvPr id="15" name="">
             <a:extLst xmlns:a="http://schemas.openxmlformats.org/drawingml/2006/main">
               <a:ext uri="{FF2B5EF4-FFF2-40B4-BE49-F238E27FC236}">
-                <a16:creationId xmlns:a16="http://schemas.microsoft.com/office/drawing/2014/main" id="{89D6BC39-AAFB-4D35-96AD-55FCA25D2D54}"/>
+                <a16:creationId xmlns:a16="http://schemas.microsoft.com/office/drawing/2014/main" id="{88E1C52C-D1B6-4DA8-AFB7-CA917FFCE115}"/>
               </a:ext>
             </a:extLst>
           </p:cNvPr>
@@ -2682,7 +2671,7 @@
           <p:cNvPr id="16" name="">
             <a:extLst xmlns:a="http://schemas.openxmlformats.org/drawingml/2006/main">
               <a:ext uri="{FF2B5EF4-FFF2-40B4-BE49-F238E27FC236}">
-                <a16:creationId xmlns:a16="http://schemas.microsoft.com/office/drawing/2014/main" id="{9BC68675-7524-4F37-82E3-D42431109BD3}"/>
+                <a16:creationId xmlns:a16="http://schemas.microsoft.com/office/drawing/2014/main" id="{399AF69E-9B18-467B-8114-794F0832E405}"/>
               </a:ext>
             </a:extLst>
           </p:cNvPr>
@@ -2714,7 +2703,7 @@
             <a:pPr algn="l">
               <a:defRPr sz="1350" b="0">
                 <a:solidFill>
-                  <a:srgbClr val="B8C9D3"/>
+                  <a:srgbClr val="587080"/>
                 </a:solidFill>
                 <a:latin typeface="Arial"/>
                 <a:ea typeface="Arial"/>
@@ -2724,7 +2713,7 @@
             <a:r>
               <a:rPr sz="1350" b="0">
                 <a:solidFill>
-                  <a:srgbClr val="B8C9D3"/>
+                  <a:srgbClr val="587080"/>
                 </a:solidFill>
                 <a:latin typeface="Arial"/>
                 <a:ea typeface="Arial"/>
@@ -2737,7 +2726,7 @@
             <a:pPr algn="l">
               <a:defRPr sz="1350" b="0">
                 <a:solidFill>
-                  <a:srgbClr val="B8C9D3"/>
+                  <a:srgbClr val="587080"/>
                 </a:solidFill>
                 <a:latin typeface="Arial"/>
                 <a:ea typeface="Arial"/>
@@ -2747,7 +2736,7 @@
             <a:r>
               <a:rPr sz="1350" b="0">
                 <a:solidFill>
-                  <a:srgbClr val="B8C9D3"/>
+                  <a:srgbClr val="587080"/>
                 </a:solidFill>
                 <a:latin typeface="Arial"/>
                 <a:ea typeface="Arial"/>
@@ -2763,7 +2752,7 @@
           <p:cNvPr id="17" name="">
             <a:extLst xmlns:a="http://schemas.openxmlformats.org/drawingml/2006/main">
               <a:ext uri="{FF2B5EF4-FFF2-40B4-BE49-F238E27FC236}">
-                <a16:creationId xmlns:a16="http://schemas.microsoft.com/office/drawing/2014/main" id="{53352270-5374-478B-8E23-8D197C84A543}"/>
+                <a16:creationId xmlns:a16="http://schemas.microsoft.com/office/drawing/2014/main" id="{E5A1C2F6-B0F2-4296-BB41-2B7622EEC471}"/>
               </a:ext>
             </a:extLst>
           </p:cNvPr>
@@ -2821,7 +2810,7 @@
           <p:cNvPr id="18" name="">
             <a:extLst xmlns:a="http://schemas.openxmlformats.org/drawingml/2006/main">
               <a:ext uri="{FF2B5EF4-FFF2-40B4-BE49-F238E27FC236}">
-                <a16:creationId xmlns:a16="http://schemas.microsoft.com/office/drawing/2014/main" id="{E79E5F1D-349A-4489-AEA9-7AF1D622BAD9}"/>
+                <a16:creationId xmlns:a16="http://schemas.microsoft.com/office/drawing/2014/main" id="{FBF2C624-83C1-4B87-9DDF-339E4006A3B5}"/>
               </a:ext>
             </a:extLst>
           </p:cNvPr>
@@ -2878,7 +2867,7 @@
           <p:cNvPr id="19" name="">
             <a:extLst xmlns:a="http://schemas.openxmlformats.org/drawingml/2006/main">
               <a:ext uri="{FF2B5EF4-FFF2-40B4-BE49-F238E27FC236}">
-                <a16:creationId xmlns:a16="http://schemas.microsoft.com/office/drawing/2014/main" id="{EFAB6ABB-4BB5-4586-BD0D-F938AED172BF}"/>
+                <a16:creationId xmlns:a16="http://schemas.microsoft.com/office/drawing/2014/main" id="{31B6068E-4DC0-4DB7-936C-6AE5D8C4A4CE}"/>
               </a:ext>
             </a:extLst>
           </p:cNvPr>
@@ -2909,7 +2898,7 @@
           <p:cNvPr id="20" name="">
             <a:extLst xmlns:a="http://schemas.openxmlformats.org/drawingml/2006/main">
               <a:ext uri="{FF2B5EF4-FFF2-40B4-BE49-F238E27FC236}">
-                <a16:creationId xmlns:a16="http://schemas.microsoft.com/office/drawing/2014/main" id="{18A56B6A-6C53-4A65-A606-4FC63002F912}"/>
+                <a16:creationId xmlns:a16="http://schemas.microsoft.com/office/drawing/2014/main" id="{4BFF503E-6617-4A70-A33D-DA8C0DC7FB26}"/>
               </a:ext>
             </a:extLst>
           </p:cNvPr>
@@ -2941,7 +2930,7 @@
             <a:pPr algn="ctr">
               <a:defRPr sz="750" b="1">
                 <a:solidFill>
-                  <a:srgbClr val="B8C9D3"/>
+                  <a:srgbClr val="587080"/>
                 </a:solidFill>
                 <a:latin typeface="Arial"/>
                 <a:ea typeface="Arial"/>
@@ -2951,7 +2940,7 @@
             <a:r>
               <a:rPr sz="750" b="1">
                 <a:solidFill>
-                  <a:srgbClr val="B8C9D3"/>
+                  <a:srgbClr val="587080"/>
                 </a:solidFill>
                 <a:latin typeface="Arial"/>
                 <a:ea typeface="Arial"/>
@@ -2967,7 +2956,7 @@
           <p:cNvPr id="21" name="">
             <a:extLst xmlns:a="http://schemas.openxmlformats.org/drawingml/2006/main">
               <a:ext uri="{FF2B5EF4-FFF2-40B4-BE49-F238E27FC236}">
-                <a16:creationId xmlns:a16="http://schemas.microsoft.com/office/drawing/2014/main" id="{9FF7EA48-8579-4AA3-AD6A-F8435B69CC6F}"/>
+                <a16:creationId xmlns:a16="http://schemas.microsoft.com/office/drawing/2014/main" id="{938D8B42-4116-46EB-B6A5-6582D11EEB40}"/>
               </a:ext>
             </a:extLst>
           </p:cNvPr>
@@ -3024,7 +3013,7 @@
           <p:cNvPr id="22" name="">
             <a:extLst xmlns:a="http://schemas.openxmlformats.org/drawingml/2006/main">
               <a:ext uri="{FF2B5EF4-FFF2-40B4-BE49-F238E27FC236}">
-                <a16:creationId xmlns:a16="http://schemas.microsoft.com/office/drawing/2014/main" id="{38FB05F3-46E2-4115-850E-04B98F4ACA4A}"/>
+                <a16:creationId xmlns:a16="http://schemas.microsoft.com/office/drawing/2014/main" id="{A0E72602-D6A0-4DDE-84F3-13C679EC3340}"/>
               </a:ext>
             </a:extLst>
           </p:cNvPr>
@@ -3055,7 +3044,7 @@
           <p:cNvPr id="23" name="">
             <a:extLst xmlns:a="http://schemas.openxmlformats.org/drawingml/2006/main">
               <a:ext uri="{FF2B5EF4-FFF2-40B4-BE49-F238E27FC236}">
-                <a16:creationId xmlns:a16="http://schemas.microsoft.com/office/drawing/2014/main" id="{2D3909B7-C714-41EE-B38F-58F038B404EF}"/>
+                <a16:creationId xmlns:a16="http://schemas.microsoft.com/office/drawing/2014/main" id="{9C893D50-3F76-4178-A410-23728134D221}"/>
               </a:ext>
             </a:extLst>
           </p:cNvPr>
@@ -3087,7 +3076,7 @@
             <a:pPr algn="ctr">
               <a:defRPr sz="750" b="1">
                 <a:solidFill>
-                  <a:srgbClr val="B8C9D3"/>
+                  <a:srgbClr val="587080"/>
                 </a:solidFill>
                 <a:latin typeface="Arial"/>
                 <a:ea typeface="Arial"/>
@@ -3097,7 +3086,7 @@
             <a:r>
               <a:rPr sz="750" b="1">
                 <a:solidFill>
-                  <a:srgbClr val="B8C9D3"/>
+                  <a:srgbClr val="587080"/>
                 </a:solidFill>
                 <a:latin typeface="Arial"/>
                 <a:ea typeface="Arial"/>
@@ -3113,7 +3102,7 @@
           <p:cNvPr id="24" name="">
             <a:extLst xmlns:a="http://schemas.openxmlformats.org/drawingml/2006/main">
               <a:ext uri="{FF2B5EF4-FFF2-40B4-BE49-F238E27FC236}">
-                <a16:creationId xmlns:a16="http://schemas.microsoft.com/office/drawing/2014/main" id="{81010198-4DBF-4F0D-9A2A-A84F1B86E9FF}"/>
+                <a16:creationId xmlns:a16="http://schemas.microsoft.com/office/drawing/2014/main" id="{6F6A7480-DE09-4D2B-8461-C0B08A2E57DA}"/>
               </a:ext>
             </a:extLst>
           </p:cNvPr>
@@ -3170,7 +3159,7 @@
           <p:cNvPr id="25" name="">
             <a:extLst xmlns:a="http://schemas.openxmlformats.org/drawingml/2006/main">
               <a:ext uri="{FF2B5EF4-FFF2-40B4-BE49-F238E27FC236}">
-                <a16:creationId xmlns:a16="http://schemas.microsoft.com/office/drawing/2014/main" id="{23523E68-7733-4343-AD49-52F2E6A6B402}"/>
+                <a16:creationId xmlns:a16="http://schemas.microsoft.com/office/drawing/2014/main" id="{3A9FAC64-8946-4653-BAF1-539F24C2B3BC}"/>
               </a:ext>
             </a:extLst>
           </p:cNvPr>
@@ -3201,7 +3190,7 @@
           <p:cNvPr id="26" name="">
             <a:extLst xmlns:a="http://schemas.openxmlformats.org/drawingml/2006/main">
               <a:ext uri="{FF2B5EF4-FFF2-40B4-BE49-F238E27FC236}">
-                <a16:creationId xmlns:a16="http://schemas.microsoft.com/office/drawing/2014/main" id="{1337E63B-0011-479E-BD8A-997647FAA632}"/>
+                <a16:creationId xmlns:a16="http://schemas.microsoft.com/office/drawing/2014/main" id="{2FAF6B22-8EE3-451A-9214-84F688DDC03B}"/>
               </a:ext>
             </a:extLst>
           </p:cNvPr>
@@ -3233,7 +3222,7 @@
             <a:pPr algn="ctr">
               <a:defRPr sz="750" b="1">
                 <a:solidFill>
-                  <a:srgbClr val="B8C9D3"/>
+                  <a:srgbClr val="587080"/>
                 </a:solidFill>
                 <a:latin typeface="Arial"/>
                 <a:ea typeface="Arial"/>
@@ -3243,7 +3232,7 @@
             <a:r>
               <a:rPr sz="750" b="1">
                 <a:solidFill>
-                  <a:srgbClr val="B8C9D3"/>
+                  <a:srgbClr val="587080"/>
                 </a:solidFill>
                 <a:latin typeface="Arial"/>
                 <a:ea typeface="Arial"/>
@@ -3259,7 +3248,7 @@
           <p:cNvPr id="27" name="">
             <a:extLst xmlns:a="http://schemas.openxmlformats.org/drawingml/2006/main">
               <a:ext uri="{FF2B5EF4-FFF2-40B4-BE49-F238E27FC236}">
-                <a16:creationId xmlns:a16="http://schemas.microsoft.com/office/drawing/2014/main" id="{634D6503-6C67-4357-8A54-C886BFD1A9A4}"/>
+                <a16:creationId xmlns:a16="http://schemas.microsoft.com/office/drawing/2014/main" id="{15B4E1D9-85B4-4A05-802D-C7751D802F0B}"/>
               </a:ext>
             </a:extLst>
           </p:cNvPr>
@@ -3316,7 +3305,7 @@
           <p:cNvPr id="28" name="">
             <a:extLst xmlns:a="http://schemas.openxmlformats.org/drawingml/2006/main">
               <a:ext uri="{FF2B5EF4-FFF2-40B4-BE49-F238E27FC236}">
-                <a16:creationId xmlns:a16="http://schemas.microsoft.com/office/drawing/2014/main" id="{FB2F45DE-0CC2-4530-99BC-DCF9F9CBD831}"/>
+                <a16:creationId xmlns:a16="http://schemas.microsoft.com/office/drawing/2014/main" id="{99249210-6266-4C4E-A34C-A2E8087A1B79}"/>
               </a:ext>
             </a:extLst>
           </p:cNvPr>
@@ -3347,7 +3336,7 @@
           <p:cNvPr id="29" name="">
             <a:extLst xmlns:a="http://schemas.openxmlformats.org/drawingml/2006/main">
               <a:ext uri="{FF2B5EF4-FFF2-40B4-BE49-F238E27FC236}">
-                <a16:creationId xmlns:a16="http://schemas.microsoft.com/office/drawing/2014/main" id="{33B05E93-AC29-4108-BB6C-433189CB5C17}"/>
+                <a16:creationId xmlns:a16="http://schemas.microsoft.com/office/drawing/2014/main" id="{82E69894-B416-46F6-81DD-62F142DB35A0}"/>
               </a:ext>
             </a:extLst>
           </p:cNvPr>
@@ -3379,7 +3368,7 @@
             <a:pPr algn="ctr">
               <a:defRPr sz="750" b="1">
                 <a:solidFill>
-                  <a:srgbClr val="B8C9D3"/>
+                  <a:srgbClr val="587080"/>
                 </a:solidFill>
                 <a:latin typeface="Arial"/>
                 <a:ea typeface="Arial"/>
@@ -3389,7 +3378,7 @@
             <a:r>
               <a:rPr sz="750" b="1">
                 <a:solidFill>
-                  <a:srgbClr val="B8C9D3"/>
+                  <a:srgbClr val="587080"/>
                 </a:solidFill>
                 <a:latin typeface="Arial"/>
                 <a:ea typeface="Arial"/>
@@ -3405,7 +3394,7 @@
           <p:cNvPr id="30" name="">
             <a:extLst xmlns:a="http://schemas.openxmlformats.org/drawingml/2006/main">
               <a:ext uri="{FF2B5EF4-FFF2-40B4-BE49-F238E27FC236}">
-                <a16:creationId xmlns:a16="http://schemas.microsoft.com/office/drawing/2014/main" id="{81C00856-51C5-4B2E-97C5-F99B99B95395}"/>
+                <a16:creationId xmlns:a16="http://schemas.microsoft.com/office/drawing/2014/main" id="{37A398B0-548A-4395-9251-65CD961FD106}"/>
               </a:ext>
             </a:extLst>
           </p:cNvPr>
@@ -3425,7 +3414,7 @@
           <a:noFill xmlns:a="http://schemas.openxmlformats.org/drawingml/2006/main"/>
           <a:ln xmlns:a="http://schemas.openxmlformats.org/drawingml/2006/main" w="19050">
             <a:solidFill>
-              <a:srgbClr val="2A4D65"/>
+              <a:srgbClr val="C5D4DC"/>
             </a:solidFill>
             <a:prstDash val="solid"/>
           </a:ln>
@@ -3436,7 +3425,7 @@
           <p:cNvPr id="31" name="">
             <a:extLst xmlns:a="http://schemas.openxmlformats.org/drawingml/2006/main">
               <a:ext uri="{FF2B5EF4-FFF2-40B4-BE49-F238E27FC236}">
-                <a16:creationId xmlns:a16="http://schemas.microsoft.com/office/drawing/2014/main" id="{5A9F5385-9C53-4F54-81D6-1172DB7A5D22}"/>
+                <a16:creationId xmlns:a16="http://schemas.microsoft.com/office/drawing/2014/main" id="{D0D4A92D-4468-40F6-A7D8-0CCF9CD21F5B}"/>
               </a:ext>
             </a:extLst>
           </p:cNvPr>
@@ -3456,7 +3445,7 @@
           <a:noFill xmlns:a="http://schemas.openxmlformats.org/drawingml/2006/main"/>
           <a:ln xmlns:a="http://schemas.openxmlformats.org/drawingml/2006/main" w="19050">
             <a:solidFill>
-              <a:srgbClr val="2A4D65"/>
+              <a:srgbClr val="C5D4DC"/>
             </a:solidFill>
             <a:prstDash val="solid"/>
           </a:ln>
@@ -3467,7 +3456,7 @@
           <p:cNvPr id="32" name="">
             <a:extLst xmlns:a="http://schemas.openxmlformats.org/drawingml/2006/main">
               <a:ext uri="{FF2B5EF4-FFF2-40B4-BE49-F238E27FC236}">
-                <a16:creationId xmlns:a16="http://schemas.microsoft.com/office/drawing/2014/main" id="{C4CDB806-116A-443D-B014-B143B82E0263}"/>
+                <a16:creationId xmlns:a16="http://schemas.microsoft.com/office/drawing/2014/main" id="{9FAF37DC-69B9-47FE-AF47-27D9C641A1DE}"/>
               </a:ext>
             </a:extLst>
           </p:cNvPr>
@@ -3487,7 +3476,7 @@
           <a:noFill xmlns:a="http://schemas.openxmlformats.org/drawingml/2006/main"/>
           <a:ln xmlns:a="http://schemas.openxmlformats.org/drawingml/2006/main" w="19050">
             <a:solidFill>
-              <a:srgbClr val="2A4D65"/>
+              <a:srgbClr val="C5D4DC"/>
             </a:solidFill>
             <a:prstDash val="solid"/>
           </a:ln>
@@ -3498,7 +3487,7 @@
           <p:cNvPr id="33" name="">
             <a:extLst xmlns:a="http://schemas.openxmlformats.org/drawingml/2006/main">
               <a:ext uri="{FF2B5EF4-FFF2-40B4-BE49-F238E27FC236}">
-                <a16:creationId xmlns:a16="http://schemas.microsoft.com/office/drawing/2014/main" id="{1718ABCB-D6DD-4AA0-BCD3-0C1A2EFD8507}"/>
+                <a16:creationId xmlns:a16="http://schemas.microsoft.com/office/drawing/2014/main" id="{C95C4534-BD2F-47E8-A5DC-D243CDFC28DC}"/>
               </a:ext>
             </a:extLst>
           </p:cNvPr>
@@ -3518,7 +3507,7 @@
           <a:noFill xmlns:a="http://schemas.openxmlformats.org/drawingml/2006/main"/>
           <a:ln xmlns:a="http://schemas.openxmlformats.org/drawingml/2006/main" w="19050">
             <a:solidFill>
-              <a:srgbClr val="2A4D65"/>
+              <a:srgbClr val="C5D4DC"/>
             </a:solidFill>
             <a:prstDash val="solid"/>
           </a:ln>
@@ -3529,7 +3518,7 @@
           <p:cNvPr id="34" name="">
             <a:extLst xmlns:a="http://schemas.openxmlformats.org/drawingml/2006/main">
               <a:ext uri="{FF2B5EF4-FFF2-40B4-BE49-F238E27FC236}">
-                <a16:creationId xmlns:a16="http://schemas.microsoft.com/office/drawing/2014/main" id="{DC2E4E32-4B5E-4F1C-B977-5DB879B4A7B4}"/>
+                <a16:creationId xmlns:a16="http://schemas.microsoft.com/office/drawing/2014/main" id="{7E503BF8-EF75-4F48-BB3C-F00EEE865A35}"/>
               </a:ext>
             </a:extLst>
           </p:cNvPr>
@@ -3586,7 +3575,7 @@
           <p:cNvPr id="35" name="">
             <a:extLst xmlns:a="http://schemas.openxmlformats.org/drawingml/2006/main">
               <a:ext uri="{FF2B5EF4-FFF2-40B4-BE49-F238E27FC236}">
-                <a16:creationId xmlns:a16="http://schemas.microsoft.com/office/drawing/2014/main" id="{7D50A841-0498-459F-BBBE-762DD7E052E2}"/>
+                <a16:creationId xmlns:a16="http://schemas.microsoft.com/office/drawing/2014/main" id="{6515B930-3144-43E7-A8FA-45E2AE4A0B46}"/>
               </a:ext>
             </a:extLst>
           </p:cNvPr>
@@ -3644,7 +3633,7 @@
           <p:cNvPr id="36" name="">
             <a:extLst xmlns:a="http://schemas.openxmlformats.org/drawingml/2006/main">
               <a:ext uri="{FF2B5EF4-FFF2-40B4-BE49-F238E27FC236}">
-                <a16:creationId xmlns:a16="http://schemas.microsoft.com/office/drawing/2014/main" id="{1D7AC2F4-F9F0-41F5-B0AF-09592FA1812A}"/>
+                <a16:creationId xmlns:a16="http://schemas.microsoft.com/office/drawing/2014/main" id="{A9BFB888-9959-4EE8-B73F-1FED2274386D}"/>
               </a:ext>
             </a:extLst>
           </p:cNvPr>
@@ -3676,7 +3665,7 @@
             <a:pPr algn="l">
               <a:defRPr sz="600" b="0">
                 <a:solidFill>
-                  <a:srgbClr val="B8C9D3"/>
+                  <a:srgbClr val="587080"/>
                 </a:solidFill>
                 <a:latin typeface="Arial"/>
                 <a:ea typeface="Arial"/>
@@ -3686,7 +3675,7 @@
             <a:r>
               <a:rPr sz="600" b="0">
                 <a:solidFill>
-                  <a:srgbClr val="B8C9D3"/>
+                  <a:srgbClr val="587080"/>
                 </a:solidFill>
                 <a:latin typeface="Arial"/>
                 <a:ea typeface="Arial"/>
@@ -3702,7 +3691,7 @@
           <p:cNvPr id="37" name="">
             <a:extLst xmlns:a="http://schemas.openxmlformats.org/drawingml/2006/main">
               <a:ext uri="{FF2B5EF4-FFF2-40B4-BE49-F238E27FC236}">
-                <a16:creationId xmlns:a16="http://schemas.microsoft.com/office/drawing/2014/main" id="{C11884A6-11F8-42F7-89DE-8E3F83EBC06D}"/>
+                <a16:creationId xmlns:a16="http://schemas.microsoft.com/office/drawing/2014/main" id="{ACA37F5D-8CE0-49E2-9525-030159E21510}"/>
               </a:ext>
             </a:extLst>
           </p:cNvPr>
@@ -3734,7 +3723,7 @@
             <a:pPr algn="r">
               <a:defRPr sz="750" b="1">
                 <a:solidFill>
-                  <a:srgbClr val="B8C9D3"/>
+                  <a:srgbClr val="587080"/>
                 </a:solidFill>
                 <a:latin typeface="Arial"/>
                 <a:ea typeface="Arial"/>
@@ -3744,7 +3733,7 @@
             <a:r>
               <a:rPr sz="750" b="1">
                 <a:solidFill>
-                  <a:srgbClr val="B8C9D3"/>
+                  <a:srgbClr val="587080"/>
                 </a:solidFill>
                 <a:latin typeface="Arial"/>
                 <a:ea typeface="Arial"/>
@@ -3758,7 +3747,7 @@
     </p:spTree>
     <p:extLst>
       <p:ext uri="{BB962C8B-B14F-4D97-AF65-F5344CB8AC3E}">
-        <p14:creationId xmlns:p14="http://schemas.microsoft.com/office/powerpoint/2010/main" val="1081579576"/>
+        <p14:creationId xmlns:p14="http://schemas.microsoft.com/office/powerpoint/2010/main" val="1161232878"/>
       </p:ext>
     </p:extLst>
   </p:cSld>
@@ -3770,17 +3759,9 @@
   <p:cSld>
     <p:bg>
       <p:bgPr>
-        <a:gradFill xmlns:a="http://schemas.openxmlformats.org/drawingml/2006/main">
-          <a:gsLst>
-            <a:gs pos="0">
-              <a:srgbClr val="F7F9FA"/>
-            </a:gs>
-            <a:gs pos="100000">
-              <a:srgbClr val="E6EEF1"/>
-            </a:gs>
-          </a:gsLst>
-          <a:lin ang="8100000"/>
-        </a:gradFill>
+        <a:solidFill xmlns:a="http://schemas.openxmlformats.org/drawingml/2006/main">
+          <a:srgbClr val="F3F1EB"/>
+        </a:solidFill>
       </p:bgPr>
     </p:bg>
     <p:spTree>
@@ -3797,7 +3778,7 @@
           <p:cNvPr id="32" name="">
             <a:extLst xmlns:a="http://schemas.openxmlformats.org/drawingml/2006/main">
               <a:ext uri="{FF2B5EF4-FFF2-40B4-BE49-F238E27FC236}">
-                <a16:creationId xmlns:a16="http://schemas.microsoft.com/office/drawing/2014/main" id="{72A4885D-C9FC-48B5-820C-0E6B12B5B8CD}"/>
+                <a16:creationId xmlns:a16="http://schemas.microsoft.com/office/drawing/2014/main" id="{C66D79EC-DF3D-4351-9C8C-143C3911D07E}"/>
               </a:ext>
             </a:extLst>
           </p:cNvPr>
@@ -3854,7 +3835,7 @@
           <p:cNvPr id="2" name="">
             <a:extLst xmlns:a="http://schemas.openxmlformats.org/drawingml/2006/main">
               <a:ext uri="{FF2B5EF4-FFF2-40B4-BE49-F238E27FC236}">
-                <a16:creationId xmlns:a16="http://schemas.microsoft.com/office/drawing/2014/main" id="{0FDD043A-314B-4DD7-9FDC-54FF3D5FECBD}"/>
+                <a16:creationId xmlns:a16="http://schemas.microsoft.com/office/drawing/2014/main" id="{FBA4F72F-DA49-4FC7-905F-6010B6551B13}"/>
               </a:ext>
             </a:extLst>
           </p:cNvPr>
@@ -3911,7 +3892,7 @@
           <p:cNvPr id="3" name="">
             <a:extLst xmlns:a="http://schemas.openxmlformats.org/drawingml/2006/main">
               <a:ext uri="{FF2B5EF4-FFF2-40B4-BE49-F238E27FC236}">
-                <a16:creationId xmlns:a16="http://schemas.microsoft.com/office/drawing/2014/main" id="{5E9670AB-8767-4B27-A63F-26D20615CBBA}"/>
+                <a16:creationId xmlns:a16="http://schemas.microsoft.com/office/drawing/2014/main" id="{F715B160-2DBD-45C8-BD40-69A4BE7F5F73}"/>
               </a:ext>
             </a:extLst>
           </p:cNvPr>
@@ -3968,7 +3949,7 @@
           <p:cNvPr id="4" name="">
             <a:extLst xmlns:a="http://schemas.openxmlformats.org/drawingml/2006/main">
               <a:ext uri="{FF2B5EF4-FFF2-40B4-BE49-F238E27FC236}">
-                <a16:creationId xmlns:a16="http://schemas.microsoft.com/office/drawing/2014/main" id="{F507DE45-8BDA-4D9A-8739-F7E054868F7F}"/>
+                <a16:creationId xmlns:a16="http://schemas.microsoft.com/office/drawing/2014/main" id="{EC490613-E303-431B-8F4F-2D390893FC07}"/>
               </a:ext>
             </a:extLst>
           </p:cNvPr>
@@ -3999,7 +3980,7 @@
           <p:cNvPr id="5" name="">
             <a:extLst xmlns:a="http://schemas.openxmlformats.org/drawingml/2006/main">
               <a:ext uri="{FF2B5EF4-FFF2-40B4-BE49-F238E27FC236}">
-                <a16:creationId xmlns:a16="http://schemas.microsoft.com/office/drawing/2014/main" id="{C1AECB33-E413-4E4B-92E2-A011B7549085}"/>
+                <a16:creationId xmlns:a16="http://schemas.microsoft.com/office/drawing/2014/main" id="{C98EEBEC-E5AC-47D3-A809-507732251851}"/>
               </a:ext>
             </a:extLst>
           </p:cNvPr>
@@ -4030,7 +4011,7 @@
           <p:cNvPr id="6" name="">
             <a:extLst xmlns:a="http://schemas.openxmlformats.org/drawingml/2006/main">
               <a:ext uri="{FF2B5EF4-FFF2-40B4-BE49-F238E27FC236}">
-                <a16:creationId xmlns:a16="http://schemas.microsoft.com/office/drawing/2014/main" id="{88EF3926-CE0A-4AE2-A99E-641E865A5BE3}"/>
+                <a16:creationId xmlns:a16="http://schemas.microsoft.com/office/drawing/2014/main" id="{8D660959-576B-4378-9F8B-8F58779264F8}"/>
               </a:ext>
             </a:extLst>
           </p:cNvPr>
@@ -4087,7 +4068,7 @@
           <p:cNvPr id="7" name="">
             <a:extLst xmlns:a="http://schemas.openxmlformats.org/drawingml/2006/main">
               <a:ext uri="{FF2B5EF4-FFF2-40B4-BE49-F238E27FC236}">
-                <a16:creationId xmlns:a16="http://schemas.microsoft.com/office/drawing/2014/main" id="{83A19480-0D94-45CB-813D-24ABAD9E15B6}"/>
+                <a16:creationId xmlns:a16="http://schemas.microsoft.com/office/drawing/2014/main" id="{065F4C60-00A0-4862-8394-011D13272EEC}"/>
               </a:ext>
             </a:extLst>
           </p:cNvPr>
@@ -4144,7 +4125,7 @@
           <p:cNvPr id="8" name="">
             <a:extLst xmlns:a="http://schemas.openxmlformats.org/drawingml/2006/main">
               <a:ext uri="{FF2B5EF4-FFF2-40B4-BE49-F238E27FC236}">
-                <a16:creationId xmlns:a16="http://schemas.microsoft.com/office/drawing/2014/main" id="{7EDC1EC1-E850-450C-813C-816D418BDB5E}"/>
+                <a16:creationId xmlns:a16="http://schemas.microsoft.com/office/drawing/2014/main" id="{A63393BF-3D27-468A-AA1F-37CAB88B7BB9}"/>
               </a:ext>
             </a:extLst>
           </p:cNvPr>
@@ -4201,7 +4182,7 @@
           <p:cNvPr id="9" name="">
             <a:extLst xmlns:a="http://schemas.openxmlformats.org/drawingml/2006/main">
               <a:ext uri="{FF2B5EF4-FFF2-40B4-BE49-F238E27FC236}">
-                <a16:creationId xmlns:a16="http://schemas.microsoft.com/office/drawing/2014/main" id="{34B99982-AFE1-41A1-86A0-9F6F470B449D}"/>
+                <a16:creationId xmlns:a16="http://schemas.microsoft.com/office/drawing/2014/main" id="{1CF1A4B4-3675-4E20-A982-DE5EC351A94A}"/>
               </a:ext>
             </a:extLst>
           </p:cNvPr>
@@ -4232,7 +4213,7 @@
           <p:cNvPr id="10" name="">
             <a:extLst xmlns:a="http://schemas.openxmlformats.org/drawingml/2006/main">
               <a:ext uri="{FF2B5EF4-FFF2-40B4-BE49-F238E27FC236}">
-                <a16:creationId xmlns:a16="http://schemas.microsoft.com/office/drawing/2014/main" id="{4CF1D03E-C74B-4C79-A9C5-1B763B9FD1DD}"/>
+                <a16:creationId xmlns:a16="http://schemas.microsoft.com/office/drawing/2014/main" id="{B2FF55C9-8331-42CC-9478-1AFFBB8598F3}"/>
               </a:ext>
             </a:extLst>
           </p:cNvPr>
@@ -4263,7 +4244,7 @@
           <p:cNvPr id="11" name="">
             <a:extLst xmlns:a="http://schemas.openxmlformats.org/drawingml/2006/main">
               <a:ext uri="{FF2B5EF4-FFF2-40B4-BE49-F238E27FC236}">
-                <a16:creationId xmlns:a16="http://schemas.microsoft.com/office/drawing/2014/main" id="{A09CDBC9-D2A2-43C3-A619-22E6F2E53D4A}"/>
+                <a16:creationId xmlns:a16="http://schemas.microsoft.com/office/drawing/2014/main" id="{D2744AA4-2E32-4AB6-855A-F12A5CEA965F}"/>
               </a:ext>
             </a:extLst>
           </p:cNvPr>
@@ -4321,7 +4302,7 @@
           <p:cNvPr id="12" name="">
             <a:extLst xmlns:a="http://schemas.openxmlformats.org/drawingml/2006/main">
               <a:ext uri="{FF2B5EF4-FFF2-40B4-BE49-F238E27FC236}">
-                <a16:creationId xmlns:a16="http://schemas.microsoft.com/office/drawing/2014/main" id="{3552A39A-C59E-4EC2-8AC1-EF979C8F9FB9}"/>
+                <a16:creationId xmlns:a16="http://schemas.microsoft.com/office/drawing/2014/main" id="{ED73540C-5281-46DE-98A2-ED0EDD0DD2D9}"/>
               </a:ext>
             </a:extLst>
           </p:cNvPr>
@@ -4379,7 +4360,7 @@
           <p:cNvPr id="13" name="">
             <a:extLst xmlns:a="http://schemas.openxmlformats.org/drawingml/2006/main">
               <a:ext uri="{FF2B5EF4-FFF2-40B4-BE49-F238E27FC236}">
-                <a16:creationId xmlns:a16="http://schemas.microsoft.com/office/drawing/2014/main" id="{9974655E-205E-421E-AC6B-EA673474918A}"/>
+                <a16:creationId xmlns:a16="http://schemas.microsoft.com/office/drawing/2014/main" id="{F88911D3-70FC-403B-8DAC-C1B8974560E8}"/>
               </a:ext>
             </a:extLst>
           </p:cNvPr>
@@ -4437,7 +4418,7 @@
           <p:cNvPr id="14" name="">
             <a:extLst xmlns:a="http://schemas.openxmlformats.org/drawingml/2006/main">
               <a:ext uri="{FF2B5EF4-FFF2-40B4-BE49-F238E27FC236}">
-                <a16:creationId xmlns:a16="http://schemas.microsoft.com/office/drawing/2014/main" id="{1CBB4BA5-FCDC-42A3-869A-DD6C4082E3BC}"/>
+                <a16:creationId xmlns:a16="http://schemas.microsoft.com/office/drawing/2014/main" id="{58F7DFBA-42AA-495F-AC10-84000FE16A90}"/>
               </a:ext>
             </a:extLst>
           </p:cNvPr>
@@ -4495,7 +4476,7 @@
           <p:cNvPr id="15" name="">
             <a:extLst xmlns:a="http://schemas.openxmlformats.org/drawingml/2006/main">
               <a:ext uri="{FF2B5EF4-FFF2-40B4-BE49-F238E27FC236}">
-                <a16:creationId xmlns:a16="http://schemas.microsoft.com/office/drawing/2014/main" id="{89611DCC-74A2-4B0D-A57A-894EF600479F}"/>
+                <a16:creationId xmlns:a16="http://schemas.microsoft.com/office/drawing/2014/main" id="{B1B4ECD2-7804-450F-A4DA-1D4201006762}"/>
               </a:ext>
             </a:extLst>
           </p:cNvPr>
@@ -4553,7 +4534,7 @@
           <p:cNvPr id="16" name="">
             <a:extLst xmlns:a="http://schemas.openxmlformats.org/drawingml/2006/main">
               <a:ext uri="{FF2B5EF4-FFF2-40B4-BE49-F238E27FC236}">
-                <a16:creationId xmlns:a16="http://schemas.microsoft.com/office/drawing/2014/main" id="{7247C1AB-69CB-42C5-8213-A59D89BFD62C}"/>
+                <a16:creationId xmlns:a16="http://schemas.microsoft.com/office/drawing/2014/main" id="{69F1C88F-D6EA-4B22-865E-612412FAC668}"/>
               </a:ext>
             </a:extLst>
           </p:cNvPr>
@@ -4611,7 +4592,7 @@
           <p:cNvPr id="17" name="">
             <a:extLst xmlns:a="http://schemas.openxmlformats.org/drawingml/2006/main">
               <a:ext uri="{FF2B5EF4-FFF2-40B4-BE49-F238E27FC236}">
-                <a16:creationId xmlns:a16="http://schemas.microsoft.com/office/drawing/2014/main" id="{997644CE-F06E-4AA7-A25D-F6A88C5416E8}"/>
+                <a16:creationId xmlns:a16="http://schemas.microsoft.com/office/drawing/2014/main" id="{8C3F6B29-5D6C-41CF-B23A-669862488C0F}"/>
               </a:ext>
             </a:extLst>
           </p:cNvPr>
@@ -4646,7 +4627,7 @@
           <p:cNvPr id="18" name="">
             <a:extLst xmlns:a="http://schemas.openxmlformats.org/drawingml/2006/main">
               <a:ext uri="{FF2B5EF4-FFF2-40B4-BE49-F238E27FC236}">
-                <a16:creationId xmlns:a16="http://schemas.microsoft.com/office/drawing/2014/main" id="{690C75AD-DD21-4822-AA82-2E82FA26C0DF}"/>
+                <a16:creationId xmlns:a16="http://schemas.microsoft.com/office/drawing/2014/main" id="{1777926D-C63D-48C0-AAB8-C5CC21AD2B78}"/>
               </a:ext>
             </a:extLst>
           </p:cNvPr>
@@ -4704,7 +4685,7 @@
           <p:cNvPr id="19" name="">
             <a:extLst xmlns:a="http://schemas.openxmlformats.org/drawingml/2006/main">
               <a:ext uri="{FF2B5EF4-FFF2-40B4-BE49-F238E27FC236}">
-                <a16:creationId xmlns:a16="http://schemas.microsoft.com/office/drawing/2014/main" id="{6707D041-6AAB-4B88-9324-EE75D02D7AE3}"/>
+                <a16:creationId xmlns:a16="http://schemas.microsoft.com/office/drawing/2014/main" id="{FAA2BDB1-A870-4442-AD83-A9DDAD4D0BF0}"/>
               </a:ext>
             </a:extLst>
           </p:cNvPr>
@@ -4739,7 +4720,7 @@
           <p:cNvPr id="20" name="">
             <a:extLst xmlns:a="http://schemas.openxmlformats.org/drawingml/2006/main">
               <a:ext uri="{FF2B5EF4-FFF2-40B4-BE49-F238E27FC236}">
-                <a16:creationId xmlns:a16="http://schemas.microsoft.com/office/drawing/2014/main" id="{2F9C3DF8-DE33-4BC9-B527-41C6F11C7444}"/>
+                <a16:creationId xmlns:a16="http://schemas.microsoft.com/office/drawing/2014/main" id="{20BC654D-6928-43A4-88F6-F2796391CA59}"/>
               </a:ext>
             </a:extLst>
           </p:cNvPr>
@@ -4797,7 +4778,7 @@
           <p:cNvPr id="21" name="">
             <a:extLst xmlns:a="http://schemas.openxmlformats.org/drawingml/2006/main">
               <a:ext uri="{FF2B5EF4-FFF2-40B4-BE49-F238E27FC236}">
-                <a16:creationId xmlns:a16="http://schemas.microsoft.com/office/drawing/2014/main" id="{59856B0C-78B6-43A3-AB2B-D3C55DAD194D}"/>
+                <a16:creationId xmlns:a16="http://schemas.microsoft.com/office/drawing/2014/main" id="{C439F998-F8DA-4CD6-AC7D-AA34387D7C6E}"/>
               </a:ext>
             </a:extLst>
           </p:cNvPr>
@@ -4855,7 +4836,7 @@
           <p:cNvPr id="22" name="">
             <a:extLst xmlns:a="http://schemas.openxmlformats.org/drawingml/2006/main">
               <a:ext uri="{FF2B5EF4-FFF2-40B4-BE49-F238E27FC236}">
-                <a16:creationId xmlns:a16="http://schemas.microsoft.com/office/drawing/2014/main" id="{BC59D89B-7BC3-4E1B-89D0-940A77370800}"/>
+                <a16:creationId xmlns:a16="http://schemas.microsoft.com/office/drawing/2014/main" id="{16EA5B43-EA83-4B23-922B-F766FC4E36DC}"/>
               </a:ext>
             </a:extLst>
           </p:cNvPr>
@@ -4913,7 +4894,7 @@
           <p:cNvPr id="23" name="">
             <a:extLst xmlns:a="http://schemas.openxmlformats.org/drawingml/2006/main">
               <a:ext uri="{FF2B5EF4-FFF2-40B4-BE49-F238E27FC236}">
-                <a16:creationId xmlns:a16="http://schemas.microsoft.com/office/drawing/2014/main" id="{F2107256-BFBB-45F5-813A-FFB49F92C049}"/>
+                <a16:creationId xmlns:a16="http://schemas.microsoft.com/office/drawing/2014/main" id="{FDADFB56-5BFB-4F23-B772-941B59F0CB18}"/>
               </a:ext>
             </a:extLst>
           </p:cNvPr>
@@ -4948,7 +4929,7 @@
           <p:cNvPr id="24" name="">
             <a:extLst xmlns:a="http://schemas.openxmlformats.org/drawingml/2006/main">
               <a:ext uri="{FF2B5EF4-FFF2-40B4-BE49-F238E27FC236}">
-                <a16:creationId xmlns:a16="http://schemas.microsoft.com/office/drawing/2014/main" id="{3BA108F3-CB16-4DB8-8EA1-BF3E50BB44F5}"/>
+                <a16:creationId xmlns:a16="http://schemas.microsoft.com/office/drawing/2014/main" id="{BB0FEFCD-9B8D-4EB4-B838-3B2C25278487}"/>
               </a:ext>
             </a:extLst>
           </p:cNvPr>
@@ -5006,7 +4987,7 @@
           <p:cNvPr id="25" name="">
             <a:extLst xmlns:a="http://schemas.openxmlformats.org/drawingml/2006/main">
               <a:ext uri="{FF2B5EF4-FFF2-40B4-BE49-F238E27FC236}">
-                <a16:creationId xmlns:a16="http://schemas.microsoft.com/office/drawing/2014/main" id="{39BA1E4E-8F68-4E27-8AC7-0DFBEAA7AD29}"/>
+                <a16:creationId xmlns:a16="http://schemas.microsoft.com/office/drawing/2014/main" id="{AC35EF1E-7F1F-423D-A79C-332B08DED2EB}"/>
               </a:ext>
             </a:extLst>
           </p:cNvPr>
@@ -5064,7 +5045,7 @@
           <p:cNvPr id="26" name="">
             <a:extLst xmlns:a="http://schemas.openxmlformats.org/drawingml/2006/main">
               <a:ext uri="{FF2B5EF4-FFF2-40B4-BE49-F238E27FC236}">
-                <a16:creationId xmlns:a16="http://schemas.microsoft.com/office/drawing/2014/main" id="{2A81A56A-FD0F-4684-8AE9-008278EF7344}"/>
+                <a16:creationId xmlns:a16="http://schemas.microsoft.com/office/drawing/2014/main" id="{C6906B4E-2E2D-4FD3-B65D-F4C38B9D1336}"/>
               </a:ext>
             </a:extLst>
           </p:cNvPr>
@@ -5122,7 +5103,7 @@
           <p:cNvPr id="27" name="">
             <a:extLst xmlns:a="http://schemas.openxmlformats.org/drawingml/2006/main">
               <a:ext uri="{FF2B5EF4-FFF2-40B4-BE49-F238E27FC236}">
-                <a16:creationId xmlns:a16="http://schemas.microsoft.com/office/drawing/2014/main" id="{3E87F97B-0CC8-4730-84B2-3A47D248C491}"/>
+                <a16:creationId xmlns:a16="http://schemas.microsoft.com/office/drawing/2014/main" id="{E4861082-C3CA-4939-95DA-86E171B39EF6}"/>
               </a:ext>
             </a:extLst>
           </p:cNvPr>
@@ -5157,7 +5138,7 @@
           <p:cNvPr id="28" name="">
             <a:extLst xmlns:a="http://schemas.openxmlformats.org/drawingml/2006/main">
               <a:ext uri="{FF2B5EF4-FFF2-40B4-BE49-F238E27FC236}">
-                <a16:creationId xmlns:a16="http://schemas.microsoft.com/office/drawing/2014/main" id="{6F1CEA22-3C7B-4BB0-819C-3D51DA8F0331}"/>
+                <a16:creationId xmlns:a16="http://schemas.microsoft.com/office/drawing/2014/main" id="{0EDDE5F4-4796-4BA5-B8CB-02896FD6E6A2}"/>
               </a:ext>
             </a:extLst>
           </p:cNvPr>
@@ -5215,7 +5196,7 @@
           <p:cNvPr id="29" name="">
             <a:extLst xmlns:a="http://schemas.openxmlformats.org/drawingml/2006/main">
               <a:ext uri="{FF2B5EF4-FFF2-40B4-BE49-F238E27FC236}">
-                <a16:creationId xmlns:a16="http://schemas.microsoft.com/office/drawing/2014/main" id="{6FFF42D6-A3CB-4688-ADDA-3C5C680CA225}"/>
+                <a16:creationId xmlns:a16="http://schemas.microsoft.com/office/drawing/2014/main" id="{F63F4064-24C0-4B52-9E6D-B3E087116BB5}"/>
               </a:ext>
             </a:extLst>
           </p:cNvPr>
@@ -5273,7 +5254,7 @@
           <p:cNvPr id="30" name="">
             <a:extLst xmlns:a="http://schemas.openxmlformats.org/drawingml/2006/main">
               <a:ext uri="{FF2B5EF4-FFF2-40B4-BE49-F238E27FC236}">
-                <a16:creationId xmlns:a16="http://schemas.microsoft.com/office/drawing/2014/main" id="{2A1A10D8-BE32-4A0E-92CD-B01F83C187D3}"/>
+                <a16:creationId xmlns:a16="http://schemas.microsoft.com/office/drawing/2014/main" id="{3BD31B73-FAE3-4388-96D8-0EC33456B5DC}"/>
               </a:ext>
             </a:extLst>
           </p:cNvPr>
@@ -5331,7 +5312,7 @@
           <p:cNvPr id="31" name="">
             <a:extLst xmlns:a="http://schemas.openxmlformats.org/drawingml/2006/main">
               <a:ext uri="{FF2B5EF4-FFF2-40B4-BE49-F238E27FC236}">
-                <a16:creationId xmlns:a16="http://schemas.microsoft.com/office/drawing/2014/main" id="{B130552F-043C-4202-B39F-2E1AEB66CFEF}"/>
+                <a16:creationId xmlns:a16="http://schemas.microsoft.com/office/drawing/2014/main" id="{07DE6CA9-1BC4-46DE-B83E-8FD49EE65B1C}"/>
               </a:ext>
             </a:extLst>
           </p:cNvPr>
@@ -5387,7 +5368,7 @@
     </p:spTree>
     <p:extLst>
       <p:ext uri="{BB962C8B-B14F-4D97-AF65-F5344CB8AC3E}">
-        <p14:creationId xmlns:p14="http://schemas.microsoft.com/office/powerpoint/2010/main" val="659907721"/>
+        <p14:creationId xmlns:p14="http://schemas.microsoft.com/office/powerpoint/2010/main" val="508251691"/>
       </p:ext>
     </p:extLst>
   </p:cSld>
@@ -5399,17 +5380,9 @@
   <p:cSld>
     <p:bg>
       <p:bgPr>
-        <a:gradFill xmlns:a="http://schemas.openxmlformats.org/drawingml/2006/main">
-          <a:gsLst>
-            <a:gs pos="0">
-              <a:srgbClr val="0A1722"/>
-            </a:gs>
-            <a:gs pos="100000">
-              <a:srgbClr val="183B4D"/>
-            </a:gs>
-          </a:gsLst>
-          <a:lin ang="8100000"/>
-        </a:gradFill>
+        <a:solidFill xmlns:a="http://schemas.openxmlformats.org/drawingml/2006/main">
+          <a:srgbClr val="F3F1EB"/>
+        </a:solidFill>
       </p:bgPr>
     </p:bg>
     <p:spTree>
@@ -5426,7 +5399,7 @@
           <p:cNvPr id="33" name="">
             <a:extLst xmlns:a="http://schemas.openxmlformats.org/drawingml/2006/main">
               <a:ext uri="{FF2B5EF4-FFF2-40B4-BE49-F238E27FC236}">
-                <a16:creationId xmlns:a16="http://schemas.microsoft.com/office/drawing/2014/main" id="{8EED5EEA-A951-4E5C-9676-19F15E49F2FB}"/>
+                <a16:creationId xmlns:a16="http://schemas.microsoft.com/office/drawing/2014/main" id="{46831BF8-C6D3-41D1-974F-5970141BC8C6}"/>
               </a:ext>
             </a:extLst>
           </p:cNvPr>
@@ -5483,7 +5456,7 @@
           <p:cNvPr id="2" name="">
             <a:extLst xmlns:a="http://schemas.openxmlformats.org/drawingml/2006/main">
               <a:ext uri="{FF2B5EF4-FFF2-40B4-BE49-F238E27FC236}">
-                <a16:creationId xmlns:a16="http://schemas.microsoft.com/office/drawing/2014/main" id="{F89F7A83-944F-4C83-9F7B-25EBD5E99844}"/>
+                <a16:creationId xmlns:a16="http://schemas.microsoft.com/office/drawing/2014/main" id="{284EA1CF-2EA8-4943-AC7B-B32F5420ADFA}"/>
               </a:ext>
             </a:extLst>
           </p:cNvPr>
@@ -5540,7 +5513,7 @@
           <p:cNvPr id="3" name="">
             <a:extLst xmlns:a="http://schemas.openxmlformats.org/drawingml/2006/main">
               <a:ext uri="{FF2B5EF4-FFF2-40B4-BE49-F238E27FC236}">
-                <a16:creationId xmlns:a16="http://schemas.microsoft.com/office/drawing/2014/main" id="{EE132276-45F7-4BC6-87B1-27C1441F253F}"/>
+                <a16:creationId xmlns:a16="http://schemas.microsoft.com/office/drawing/2014/main" id="{84010C09-B771-4D43-A0C9-1E10FC8D7A1D}"/>
               </a:ext>
             </a:extLst>
           </p:cNvPr>
@@ -5597,7 +5570,7 @@
           <p:cNvPr id="4" name="">
             <a:extLst xmlns:a="http://schemas.openxmlformats.org/drawingml/2006/main">
               <a:ext uri="{FF2B5EF4-FFF2-40B4-BE49-F238E27FC236}">
-                <a16:creationId xmlns:a16="http://schemas.microsoft.com/office/drawing/2014/main" id="{2A5EA092-8A0E-4E55-AD73-C315D58B5353}"/>
+                <a16:creationId xmlns:a16="http://schemas.microsoft.com/office/drawing/2014/main" id="{71A2AFD6-9E7E-4D70-953F-63A635BB219C}"/>
               </a:ext>
             </a:extLst>
           </p:cNvPr>
@@ -5628,7 +5601,7 @@
           <p:cNvPr id="5" name="">
             <a:extLst xmlns:a="http://schemas.openxmlformats.org/drawingml/2006/main">
               <a:ext uri="{FF2B5EF4-FFF2-40B4-BE49-F238E27FC236}">
-                <a16:creationId xmlns:a16="http://schemas.microsoft.com/office/drawing/2014/main" id="{3BD40A49-1767-4388-A993-5EE245FA9D22}"/>
+                <a16:creationId xmlns:a16="http://schemas.microsoft.com/office/drawing/2014/main" id="{09983583-19F9-4395-97FC-EB0BFD5D67A0}"/>
               </a:ext>
             </a:extLst>
           </p:cNvPr>
@@ -5648,7 +5621,7 @@
           <a:noFill xmlns:a="http://schemas.openxmlformats.org/drawingml/2006/main"/>
           <a:ln xmlns:a="http://schemas.openxmlformats.org/drawingml/2006/main" w="9525">
             <a:solidFill>
-              <a:srgbClr val="2A4D65"/>
+              <a:srgbClr val="C5D4DC"/>
             </a:solidFill>
             <a:prstDash val="solid"/>
           </a:ln>
@@ -5659,7 +5632,7 @@
           <p:cNvPr id="6" name="">
             <a:extLst xmlns:a="http://schemas.openxmlformats.org/drawingml/2006/main">
               <a:ext uri="{FF2B5EF4-FFF2-40B4-BE49-F238E27FC236}">
-                <a16:creationId xmlns:a16="http://schemas.microsoft.com/office/drawing/2014/main" id="{558DFC0E-7CAD-4CA3-8C35-25C03D474A8C}"/>
+                <a16:creationId xmlns:a16="http://schemas.microsoft.com/office/drawing/2014/main" id="{312C31AC-65E6-4EAE-ADC3-6102CF1890B8}"/>
               </a:ext>
             </a:extLst>
           </p:cNvPr>
@@ -5716,7 +5689,7 @@
           <p:cNvPr id="7" name="">
             <a:extLst xmlns:a="http://schemas.openxmlformats.org/drawingml/2006/main">
               <a:ext uri="{FF2B5EF4-FFF2-40B4-BE49-F238E27FC236}">
-                <a16:creationId xmlns:a16="http://schemas.microsoft.com/office/drawing/2014/main" id="{C2A76DDD-5001-415A-BE6A-9A7D09769188}"/>
+                <a16:creationId xmlns:a16="http://schemas.microsoft.com/office/drawing/2014/main" id="{B3B10F98-84A5-42C7-88B0-089BD84C1908}"/>
               </a:ext>
             </a:extLst>
           </p:cNvPr>
@@ -5773,7 +5746,7 @@
           <p:cNvPr id="8" name="">
             <a:extLst xmlns:a="http://schemas.openxmlformats.org/drawingml/2006/main">
               <a:ext uri="{FF2B5EF4-FFF2-40B4-BE49-F238E27FC236}">
-                <a16:creationId xmlns:a16="http://schemas.microsoft.com/office/drawing/2014/main" id="{12033053-9CAB-40D5-9454-50D0B0640280}"/>
+                <a16:creationId xmlns:a16="http://schemas.microsoft.com/office/drawing/2014/main" id="{BA1CFC2D-1581-49D1-A554-C255A520EC82}"/>
               </a:ext>
             </a:extLst>
           </p:cNvPr>
@@ -5830,7 +5803,7 @@
           <p:cNvPr id="9" name="">
             <a:extLst xmlns:a="http://schemas.openxmlformats.org/drawingml/2006/main">
               <a:ext uri="{FF2B5EF4-FFF2-40B4-BE49-F238E27FC236}">
-                <a16:creationId xmlns:a16="http://schemas.microsoft.com/office/drawing/2014/main" id="{E9EFDB8A-8CDB-4260-B969-8B4F50515985}"/>
+                <a16:creationId xmlns:a16="http://schemas.microsoft.com/office/drawing/2014/main" id="{2A550412-E298-4A93-8103-FFF4C8A0D1E5}"/>
               </a:ext>
             </a:extLst>
           </p:cNvPr>
@@ -5861,7 +5834,7 @@
           <p:cNvPr id="10" name="">
             <a:extLst xmlns:a="http://schemas.openxmlformats.org/drawingml/2006/main">
               <a:ext uri="{FF2B5EF4-FFF2-40B4-BE49-F238E27FC236}">
-                <a16:creationId xmlns:a16="http://schemas.microsoft.com/office/drawing/2014/main" id="{4CC45E52-00D1-40F5-89A5-85182ED9CDA3}"/>
+                <a16:creationId xmlns:a16="http://schemas.microsoft.com/office/drawing/2014/main" id="{62D436F0-1066-4407-95ED-EC65EEDE40CE}"/>
               </a:ext>
             </a:extLst>
           </p:cNvPr>
@@ -5881,7 +5854,7 @@
           <a:noFill xmlns:a="http://schemas.openxmlformats.org/drawingml/2006/main"/>
           <a:ln xmlns:a="http://schemas.openxmlformats.org/drawingml/2006/main" w="9525">
             <a:solidFill>
-              <a:srgbClr val="2A4D65"/>
+              <a:srgbClr val="C5D4DC"/>
             </a:solidFill>
             <a:prstDash val="solid"/>
           </a:ln>
@@ -5892,7 +5865,7 @@
           <p:cNvPr id="11" name="">
             <a:extLst xmlns:a="http://schemas.openxmlformats.org/drawingml/2006/main">
               <a:ext uri="{FF2B5EF4-FFF2-40B4-BE49-F238E27FC236}">
-                <a16:creationId xmlns:a16="http://schemas.microsoft.com/office/drawing/2014/main" id="{2563D897-ADD0-4EA3-AAE7-684D7CA8CEA8}"/>
+                <a16:creationId xmlns:a16="http://schemas.microsoft.com/office/drawing/2014/main" id="{08C30976-C6A5-43A7-8EBF-3BDFA2FEA1F3}"/>
               </a:ext>
             </a:extLst>
           </p:cNvPr>
@@ -5950,7 +5923,7 @@
           <p:cNvPr id="12" name="">
             <a:extLst xmlns:a="http://schemas.openxmlformats.org/drawingml/2006/main">
               <a:ext uri="{FF2B5EF4-FFF2-40B4-BE49-F238E27FC236}">
-                <a16:creationId xmlns:a16="http://schemas.microsoft.com/office/drawing/2014/main" id="{0020A442-6FAA-459A-9E36-1221030BBED5}"/>
+                <a16:creationId xmlns:a16="http://schemas.microsoft.com/office/drawing/2014/main" id="{39B6AA7D-093F-4BFD-BD91-A756ECBF97F2}"/>
               </a:ext>
             </a:extLst>
           </p:cNvPr>
@@ -5982,7 +5955,7 @@
             <a:pPr algn="r">
               <a:defRPr sz="750" b="1">
                 <a:solidFill>
-                  <a:srgbClr val="B8C9D3"/>
+                  <a:srgbClr val="587080"/>
                 </a:solidFill>
                 <a:latin typeface="Arial"/>
                 <a:ea typeface="Arial"/>
@@ -5992,7 +5965,7 @@
             <a:r>
               <a:rPr sz="750" b="1">
                 <a:solidFill>
-                  <a:srgbClr val="B8C9D3"/>
+                  <a:srgbClr val="587080"/>
                 </a:solidFill>
                 <a:latin typeface="Arial"/>
                 <a:ea typeface="Arial"/>
@@ -6008,7 +5981,7 @@
           <p:cNvPr id="13" name="">
             <a:extLst xmlns:a="http://schemas.openxmlformats.org/drawingml/2006/main">
               <a:ext uri="{FF2B5EF4-FFF2-40B4-BE49-F238E27FC236}">
-                <a16:creationId xmlns:a16="http://schemas.microsoft.com/office/drawing/2014/main" id="{37D080F7-6721-49E8-AFFF-3A3769804770}"/>
+                <a16:creationId xmlns:a16="http://schemas.microsoft.com/office/drawing/2014/main" id="{66343435-905C-4B46-A9F6-BE7CFCE2C5FA}"/>
               </a:ext>
             </a:extLst>
           </p:cNvPr>
@@ -6040,7 +6013,7 @@
             <a:pPr algn="l">
               <a:defRPr sz="600" b="0">
                 <a:solidFill>
-                  <a:srgbClr val="B8C9D3"/>
+                  <a:srgbClr val="587080"/>
                 </a:solidFill>
                 <a:latin typeface="Arial"/>
                 <a:ea typeface="Arial"/>
@@ -6050,7 +6023,7 @@
             <a:r>
               <a:rPr sz="600" b="0">
                 <a:solidFill>
-                  <a:srgbClr val="B8C9D3"/>
+                  <a:srgbClr val="587080"/>
                 </a:solidFill>
                 <a:latin typeface="Arial"/>
                 <a:ea typeface="Arial"/>
@@ -6066,7 +6039,7 @@
           <p:cNvPr id="14" name="">
             <a:extLst xmlns:a="http://schemas.openxmlformats.org/drawingml/2006/main">
               <a:ext uri="{FF2B5EF4-FFF2-40B4-BE49-F238E27FC236}">
-                <a16:creationId xmlns:a16="http://schemas.microsoft.com/office/drawing/2014/main" id="{49B036E5-AFA8-4557-A19D-D36B7A29D48D}"/>
+                <a16:creationId xmlns:a16="http://schemas.microsoft.com/office/drawing/2014/main" id="{35876216-D126-4842-93CC-B79EA2751E73}"/>
               </a:ext>
             </a:extLst>
           </p:cNvPr>
@@ -6098,7 +6071,7 @@
             <a:pPr algn="r">
               <a:defRPr sz="600" b="1">
                 <a:solidFill>
-                  <a:srgbClr val="B8C9D3"/>
+                  <a:srgbClr val="587080"/>
                 </a:solidFill>
                 <a:latin typeface="Arial"/>
                 <a:ea typeface="Arial"/>
@@ -6108,7 +6081,7 @@
             <a:r>
               <a:rPr sz="600" b="1">
                 <a:solidFill>
-                  <a:srgbClr val="B8C9D3"/>
+                  <a:srgbClr val="587080"/>
                 </a:solidFill>
                 <a:latin typeface="Arial"/>
                 <a:ea typeface="Arial"/>
@@ -6124,7 +6097,7 @@
           <p:cNvPr id="15" name="">
             <a:extLst xmlns:a="http://schemas.openxmlformats.org/drawingml/2006/main">
               <a:ext uri="{FF2B5EF4-FFF2-40B4-BE49-F238E27FC236}">
-                <a16:creationId xmlns:a16="http://schemas.microsoft.com/office/drawing/2014/main" id="{27FCB263-FA2F-492A-AACB-11AF50891B92}"/>
+                <a16:creationId xmlns:a16="http://schemas.microsoft.com/office/drawing/2014/main" id="{F80DC087-DC12-4C3D-B135-8CFE8DD9D6A5}"/>
               </a:ext>
             </a:extLst>
           </p:cNvPr>
@@ -6156,7 +6129,7 @@
             <a:pPr algn="l">
               <a:defRPr sz="2250" b="0">
                 <a:solidFill>
-                  <a:srgbClr val="00E1C6"/>
+                  <a:srgbClr val="132E41"/>
                 </a:solidFill>
                 <a:latin typeface="Georgia"/>
                 <a:ea typeface="Georgia"/>
@@ -6166,7 +6139,7 @@
             <a:r>
               <a:rPr sz="2250" b="0">
                 <a:solidFill>
-                  <a:srgbClr val="00E1C6"/>
+                  <a:srgbClr val="132E41"/>
                 </a:solidFill>
                 <a:latin typeface="Georgia"/>
                 <a:ea typeface="Georgia"/>
@@ -6182,7 +6155,7 @@
           <p:cNvPr id="16" name="">
             <a:extLst xmlns:a="http://schemas.openxmlformats.org/drawingml/2006/main">
               <a:ext uri="{FF2B5EF4-FFF2-40B4-BE49-F238E27FC236}">
-                <a16:creationId xmlns:a16="http://schemas.microsoft.com/office/drawing/2014/main" id="{09D960C7-A084-4FEF-8EA8-B02E65122162}"/>
+                <a16:creationId xmlns:a16="http://schemas.microsoft.com/office/drawing/2014/main" id="{773B569C-8486-49B6-97C5-F906C15EA2C1}"/>
               </a:ext>
             </a:extLst>
           </p:cNvPr>
@@ -6214,7 +6187,7 @@
             <a:pPr algn="l">
               <a:defRPr sz="1125" b="0">
                 <a:solidFill>
-                  <a:srgbClr val="B8C9D3"/>
+                  <a:srgbClr val="587080"/>
                 </a:solidFill>
                 <a:latin typeface="Arial"/>
                 <a:ea typeface="Arial"/>
@@ -6224,7 +6197,7 @@
             <a:r>
               <a:rPr sz="1125" b="0">
                 <a:solidFill>
-                  <a:srgbClr val="B8C9D3"/>
+                  <a:srgbClr val="587080"/>
                 </a:solidFill>
                 <a:latin typeface="Arial"/>
                 <a:ea typeface="Arial"/>
@@ -6240,7 +6213,7 @@
           <p:cNvPr id="17" name="">
             <a:extLst xmlns:a="http://schemas.openxmlformats.org/drawingml/2006/main">
               <a:ext uri="{FF2B5EF4-FFF2-40B4-BE49-F238E27FC236}">
-                <a16:creationId xmlns:a16="http://schemas.microsoft.com/office/drawing/2014/main" id="{ADE78ABC-DDF0-45BD-87B1-B3A152882574}"/>
+                <a16:creationId xmlns:a16="http://schemas.microsoft.com/office/drawing/2014/main" id="{3854EDBF-1123-4C70-9CCE-CA6A14C246DC}"/>
               </a:ext>
             </a:extLst>
           </p:cNvPr>
@@ -6260,11 +6233,11 @@
             </a:avLst>
           </a:prstGeom>
           <a:solidFill xmlns:a="http://schemas.openxmlformats.org/drawingml/2006/main">
-            <a:srgbClr val="102F46"/>
+            <a:srgbClr val="FFFFFF"/>
           </a:solidFill>
           <a:ln xmlns:a="http://schemas.openxmlformats.org/drawingml/2006/main" w="9525">
             <a:solidFill>
-              <a:srgbClr val="2A4D65"/>
+              <a:srgbClr val="C5D4DC"/>
             </a:solidFill>
             <a:prstDash val="solid"/>
           </a:ln>
@@ -6275,7 +6248,7 @@
           <p:cNvPr id="18" name="">
             <a:extLst xmlns:a="http://schemas.openxmlformats.org/drawingml/2006/main">
               <a:ext uri="{FF2B5EF4-FFF2-40B4-BE49-F238E27FC236}">
-                <a16:creationId xmlns:a16="http://schemas.microsoft.com/office/drawing/2014/main" id="{694C4917-D5A7-4AD2-BAB5-1F95B58A4A45}"/>
+                <a16:creationId xmlns:a16="http://schemas.microsoft.com/office/drawing/2014/main" id="{C53E8B9C-5C83-4F91-9D70-A1A92614E226}"/>
               </a:ext>
             </a:extLst>
           </p:cNvPr>
@@ -6333,7 +6306,7 @@
           <p:cNvPr id="19" name="">
             <a:extLst xmlns:a="http://schemas.openxmlformats.org/drawingml/2006/main">
               <a:ext uri="{FF2B5EF4-FFF2-40B4-BE49-F238E27FC236}">
-                <a16:creationId xmlns:a16="http://schemas.microsoft.com/office/drawing/2014/main" id="{AC095091-6E71-4D42-8EA6-479934F64F9B}"/>
+                <a16:creationId xmlns:a16="http://schemas.microsoft.com/office/drawing/2014/main" id="{19E50E14-6C8A-4068-A530-A8D0CEED6912}"/>
               </a:ext>
             </a:extLst>
           </p:cNvPr>
@@ -6391,7 +6364,7 @@
           <p:cNvPr id="20" name="">
             <a:extLst xmlns:a="http://schemas.openxmlformats.org/drawingml/2006/main">
               <a:ext uri="{FF2B5EF4-FFF2-40B4-BE49-F238E27FC236}">
-                <a16:creationId xmlns:a16="http://schemas.microsoft.com/office/drawing/2014/main" id="{62D28EB3-104B-4F28-ABFE-F83B68A10B42}"/>
+                <a16:creationId xmlns:a16="http://schemas.microsoft.com/office/drawing/2014/main" id="{73B6B93D-FE97-43E1-88E6-333419311256}"/>
               </a:ext>
             </a:extLst>
           </p:cNvPr>
@@ -6423,7 +6396,7 @@
             <a:pPr algn="l">
               <a:defRPr sz="975" b="1">
                 <a:solidFill>
-                  <a:srgbClr val="F3F8FA"/>
+                  <a:srgbClr val="132E41"/>
                 </a:solidFill>
                 <a:latin typeface="Arial"/>
                 <a:ea typeface="Arial"/>
@@ -6433,7 +6406,7 @@
             <a:r>
               <a:rPr sz="975" b="1">
                 <a:solidFill>
-                  <a:srgbClr val="F3F8FA"/>
+                  <a:srgbClr val="132E41"/>
                 </a:solidFill>
                 <a:latin typeface="Arial"/>
                 <a:ea typeface="Arial"/>
@@ -6449,7 +6422,7 @@
           <p:cNvPr id="21" name="">
             <a:extLst xmlns:a="http://schemas.openxmlformats.org/drawingml/2006/main">
               <a:ext uri="{FF2B5EF4-FFF2-40B4-BE49-F238E27FC236}">
-                <a16:creationId xmlns:a16="http://schemas.microsoft.com/office/drawing/2014/main" id="{5E0EECB5-6C1F-47CC-937C-1D756E811CC3}"/>
+                <a16:creationId xmlns:a16="http://schemas.microsoft.com/office/drawing/2014/main" id="{C636A582-847A-44E7-9F78-C6C35F9A4D07}"/>
               </a:ext>
             </a:extLst>
           </p:cNvPr>
@@ -6507,7 +6480,7 @@
           <p:cNvPr id="22" name="">
             <a:extLst xmlns:a="http://schemas.openxmlformats.org/drawingml/2006/main">
               <a:ext uri="{FF2B5EF4-FFF2-40B4-BE49-F238E27FC236}">
-                <a16:creationId xmlns:a16="http://schemas.microsoft.com/office/drawing/2014/main" id="{C2587C36-6448-4FCD-A523-3AA221D2C150}"/>
+                <a16:creationId xmlns:a16="http://schemas.microsoft.com/office/drawing/2014/main" id="{4D6D3ADA-CAE1-45D1-A01B-3196ADD60818}"/>
               </a:ext>
             </a:extLst>
           </p:cNvPr>
@@ -6539,7 +6512,7 @@
             <a:pPr algn="l">
               <a:defRPr sz="975" b="1">
                 <a:solidFill>
-                  <a:srgbClr val="F3F8FA"/>
+                  <a:srgbClr val="132E41"/>
                 </a:solidFill>
                 <a:latin typeface="Arial"/>
                 <a:ea typeface="Arial"/>
@@ -6549,7 +6522,7 @@
             <a:r>
               <a:rPr sz="975" b="1">
                 <a:solidFill>
-                  <a:srgbClr val="F3F8FA"/>
+                  <a:srgbClr val="132E41"/>
                 </a:solidFill>
                 <a:latin typeface="Arial"/>
                 <a:ea typeface="Arial"/>
@@ -6565,7 +6538,7 @@
           <p:cNvPr id="23" name="">
             <a:extLst xmlns:a="http://schemas.openxmlformats.org/drawingml/2006/main">
               <a:ext uri="{FF2B5EF4-FFF2-40B4-BE49-F238E27FC236}">
-                <a16:creationId xmlns:a16="http://schemas.microsoft.com/office/drawing/2014/main" id="{C8C66A4F-D027-49DC-94E1-88B847584877}"/>
+                <a16:creationId xmlns:a16="http://schemas.microsoft.com/office/drawing/2014/main" id="{16A68E98-EDB0-46F8-95D9-94C35FAB5AE3}"/>
               </a:ext>
             </a:extLst>
           </p:cNvPr>
@@ -6623,7 +6596,7 @@
           <p:cNvPr id="24" name="">
             <a:extLst xmlns:a="http://schemas.openxmlformats.org/drawingml/2006/main">
               <a:ext uri="{FF2B5EF4-FFF2-40B4-BE49-F238E27FC236}">
-                <a16:creationId xmlns:a16="http://schemas.microsoft.com/office/drawing/2014/main" id="{66068A74-A83C-434C-8AE3-CD004E545B89}"/>
+                <a16:creationId xmlns:a16="http://schemas.microsoft.com/office/drawing/2014/main" id="{15445D07-7990-4B38-A2D3-17AA0AB3AE21}"/>
               </a:ext>
             </a:extLst>
           </p:cNvPr>
@@ -6655,7 +6628,7 @@
             <a:pPr algn="l">
               <a:defRPr sz="975" b="1">
                 <a:solidFill>
-                  <a:srgbClr val="F3F8FA"/>
+                  <a:srgbClr val="132E41"/>
                 </a:solidFill>
                 <a:latin typeface="Arial"/>
                 <a:ea typeface="Arial"/>
@@ -6665,7 +6638,7 @@
             <a:r>
               <a:rPr sz="975" b="1">
                 <a:solidFill>
-                  <a:srgbClr val="F3F8FA"/>
+                  <a:srgbClr val="132E41"/>
                 </a:solidFill>
                 <a:latin typeface="Arial"/>
                 <a:ea typeface="Arial"/>
@@ -6681,7 +6654,7 @@
           <p:cNvPr id="25" name="">
             <a:extLst xmlns:a="http://schemas.openxmlformats.org/drawingml/2006/main">
               <a:ext uri="{FF2B5EF4-FFF2-40B4-BE49-F238E27FC236}">
-                <a16:creationId xmlns:a16="http://schemas.microsoft.com/office/drawing/2014/main" id="{3695BB2C-0E48-4904-906B-184079D7863A}"/>
+                <a16:creationId xmlns:a16="http://schemas.microsoft.com/office/drawing/2014/main" id="{3CD97DEC-3BDE-448C-B5D9-8491C2B54F4E}"/>
               </a:ext>
             </a:extLst>
           </p:cNvPr>
@@ -6701,7 +6674,7 @@
             </a:avLst>
           </a:prstGeom>
           <a:solidFill xmlns:a="http://schemas.openxmlformats.org/drawingml/2006/main">
-            <a:srgbClr val="102F46"/>
+            <a:srgbClr val="FFFFFF"/>
           </a:solidFill>
           <a:ln xmlns:a="http://schemas.openxmlformats.org/drawingml/2006/main" w="11430">
             <a:solidFill>
@@ -6716,7 +6689,7 @@
           <p:cNvPr id="26" name="">
             <a:extLst xmlns:a="http://schemas.openxmlformats.org/drawingml/2006/main">
               <a:ext uri="{FF2B5EF4-FFF2-40B4-BE49-F238E27FC236}">
-                <a16:creationId xmlns:a16="http://schemas.microsoft.com/office/drawing/2014/main" id="{4BE32C04-7A3B-414E-9279-A56C6F7071D2}"/>
+                <a16:creationId xmlns:a16="http://schemas.microsoft.com/office/drawing/2014/main" id="{2939C827-D71B-464E-8B7A-5463F96E1456}"/>
               </a:ext>
             </a:extLst>
           </p:cNvPr>
@@ -6774,7 +6747,7 @@
           <p:cNvPr id="27" name="">
             <a:extLst xmlns:a="http://schemas.openxmlformats.org/drawingml/2006/main">
               <a:ext uri="{FF2B5EF4-FFF2-40B4-BE49-F238E27FC236}">
-                <a16:creationId xmlns:a16="http://schemas.microsoft.com/office/drawing/2014/main" id="{279C51CE-91D6-4079-9805-75CCD57193C1}"/>
+                <a16:creationId xmlns:a16="http://schemas.microsoft.com/office/drawing/2014/main" id="{798043F3-6A87-446B-9F00-CC25419D78B5}"/>
               </a:ext>
             </a:extLst>
           </p:cNvPr>
@@ -6806,7 +6779,7 @@
             <a:pPr algn="l">
               <a:defRPr sz="1425" b="1">
                 <a:solidFill>
-                  <a:srgbClr val="F3F8FA"/>
+                  <a:srgbClr val="132E41"/>
                 </a:solidFill>
                 <a:latin typeface="Arial"/>
                 <a:ea typeface="Arial"/>
@@ -6816,7 +6789,7 @@
             <a:r>
               <a:rPr sz="1425" b="1">
                 <a:solidFill>
-                  <a:srgbClr val="F3F8FA"/>
+                  <a:srgbClr val="132E41"/>
                 </a:solidFill>
                 <a:latin typeface="Arial"/>
                 <a:ea typeface="Arial"/>
@@ -6832,7 +6805,7 @@
           <p:cNvPr id="28" name="">
             <a:extLst xmlns:a="http://schemas.openxmlformats.org/drawingml/2006/main">
               <a:ext uri="{FF2B5EF4-FFF2-40B4-BE49-F238E27FC236}">
-                <a16:creationId xmlns:a16="http://schemas.microsoft.com/office/drawing/2014/main" id="{EE2E85D3-EA8C-4AA1-9688-E8076CF6F36A}"/>
+                <a16:creationId xmlns:a16="http://schemas.microsoft.com/office/drawing/2014/main" id="{7951A9D7-E150-4D49-BF83-94ECF542A22C}"/>
               </a:ext>
             </a:extLst>
           </p:cNvPr>
@@ -6869,7 +6842,7 @@
           <p:cNvPr id="29" name="">
             <a:extLst xmlns:a="http://schemas.openxmlformats.org/drawingml/2006/main">
               <a:ext uri="{FF2B5EF4-FFF2-40B4-BE49-F238E27FC236}">
-                <a16:creationId xmlns:a16="http://schemas.microsoft.com/office/drawing/2014/main" id="{3FFD8E28-6D32-423B-9AAF-B4B1460ACBB3}"/>
+                <a16:creationId xmlns:a16="http://schemas.microsoft.com/office/drawing/2014/main" id="{48EF9602-0D8F-4806-A2E3-53FA4F59E5F1}"/>
               </a:ext>
             </a:extLst>
           </p:cNvPr>
@@ -6927,7 +6900,7 @@
           <p:cNvPr id="30" name="">
             <a:extLst xmlns:a="http://schemas.openxmlformats.org/drawingml/2006/main">
               <a:ext uri="{FF2B5EF4-FFF2-40B4-BE49-F238E27FC236}">
-                <a16:creationId xmlns:a16="http://schemas.microsoft.com/office/drawing/2014/main" id="{254A58C1-E51C-4C60-89F6-F15868E53B28}"/>
+                <a16:creationId xmlns:a16="http://schemas.microsoft.com/office/drawing/2014/main" id="{997E5F4D-CDC6-46BD-9C44-62DA53482E17}"/>
               </a:ext>
             </a:extLst>
           </p:cNvPr>
@@ -6985,7 +6958,7 @@
           <p:cNvPr id="31" name="">
             <a:extLst xmlns:a="http://schemas.openxmlformats.org/drawingml/2006/main">
               <a:ext uri="{FF2B5EF4-FFF2-40B4-BE49-F238E27FC236}">
-                <a16:creationId xmlns:a16="http://schemas.microsoft.com/office/drawing/2014/main" id="{E359619B-2EBE-4706-9CE6-6D4A4DC85A80}"/>
+                <a16:creationId xmlns:a16="http://schemas.microsoft.com/office/drawing/2014/main" id="{C075DF91-93DC-449D-B364-2BC124B66689}"/>
               </a:ext>
             </a:extLst>
           </p:cNvPr>
@@ -7022,7 +6995,7 @@
           <p:cNvPr id="32" name="">
             <a:extLst xmlns:a="http://schemas.openxmlformats.org/drawingml/2006/main">
               <a:ext uri="{FF2B5EF4-FFF2-40B4-BE49-F238E27FC236}">
-                <a16:creationId xmlns:a16="http://schemas.microsoft.com/office/drawing/2014/main" id="{AF6F99F1-A8D6-4D0A-AE19-D4839F737BA9}"/>
+                <a16:creationId xmlns:a16="http://schemas.microsoft.com/office/drawing/2014/main" id="{F8990B96-BF76-4730-BD06-F2E4AC5F1645}"/>
               </a:ext>
             </a:extLst>
           </p:cNvPr>
@@ -7078,7 +7051,7 @@
     </p:spTree>
     <p:extLst>
       <p:ext uri="{BB962C8B-B14F-4D97-AF65-F5344CB8AC3E}">
-        <p14:creationId xmlns:p14="http://schemas.microsoft.com/office/powerpoint/2010/main" val="325498929"/>
+        <p14:creationId xmlns:p14="http://schemas.microsoft.com/office/powerpoint/2010/main" val="997914488"/>
       </p:ext>
     </p:extLst>
   </p:cSld>
@@ -7090,17 +7063,9 @@
   <p:cSld>
     <p:bg>
       <p:bgPr>
-        <a:gradFill xmlns:a="http://schemas.openxmlformats.org/drawingml/2006/main">
-          <a:gsLst>
-            <a:gs pos="0">
-              <a:srgbClr val="F6F9FA"/>
-            </a:gs>
-            <a:gs pos="100000">
-              <a:srgbClr val="E7EFF3"/>
-            </a:gs>
-          </a:gsLst>
-          <a:lin ang="8100000"/>
-        </a:gradFill>
+        <a:solidFill xmlns:a="http://schemas.openxmlformats.org/drawingml/2006/main">
+          <a:srgbClr val="F3F1EB"/>
+        </a:solidFill>
       </p:bgPr>
     </p:bg>
     <p:spTree>
@@ -7117,7 +7082,7 @@
           <p:cNvPr id="45" name="">
             <a:extLst xmlns:a="http://schemas.openxmlformats.org/drawingml/2006/main">
               <a:ext uri="{FF2B5EF4-FFF2-40B4-BE49-F238E27FC236}">
-                <a16:creationId xmlns:a16="http://schemas.microsoft.com/office/drawing/2014/main" id="{DF473A9C-DAFB-45C6-B785-3D881A5CF995}"/>
+                <a16:creationId xmlns:a16="http://schemas.microsoft.com/office/drawing/2014/main" id="{3DC3BCC2-CA36-48D0-AD5F-4683CEA62E9C}"/>
               </a:ext>
             </a:extLst>
           </p:cNvPr>
@@ -7174,7 +7139,7 @@
           <p:cNvPr id="2" name="">
             <a:extLst xmlns:a="http://schemas.openxmlformats.org/drawingml/2006/main">
               <a:ext uri="{FF2B5EF4-FFF2-40B4-BE49-F238E27FC236}">
-                <a16:creationId xmlns:a16="http://schemas.microsoft.com/office/drawing/2014/main" id="{3A24662C-E41D-46C1-BCC0-F14A5C797EDC}"/>
+                <a16:creationId xmlns:a16="http://schemas.microsoft.com/office/drawing/2014/main" id="{3560EAE4-752A-46A1-AB77-345AFC562927}"/>
               </a:ext>
             </a:extLst>
           </p:cNvPr>
@@ -7231,7 +7196,7 @@
           <p:cNvPr id="3" name="">
             <a:extLst xmlns:a="http://schemas.openxmlformats.org/drawingml/2006/main">
               <a:ext uri="{FF2B5EF4-FFF2-40B4-BE49-F238E27FC236}">
-                <a16:creationId xmlns:a16="http://schemas.microsoft.com/office/drawing/2014/main" id="{0F68738A-FFA5-4194-8A86-525877B169C5}"/>
+                <a16:creationId xmlns:a16="http://schemas.microsoft.com/office/drawing/2014/main" id="{0CE8CE45-ED5F-40A2-8FCB-246F0055045B}"/>
               </a:ext>
             </a:extLst>
           </p:cNvPr>
@@ -7288,7 +7253,7 @@
           <p:cNvPr id="4" name="">
             <a:extLst xmlns:a="http://schemas.openxmlformats.org/drawingml/2006/main">
               <a:ext uri="{FF2B5EF4-FFF2-40B4-BE49-F238E27FC236}">
-                <a16:creationId xmlns:a16="http://schemas.microsoft.com/office/drawing/2014/main" id="{EFE888A4-9C2D-4EA2-980C-5D8358AD3EFA}"/>
+                <a16:creationId xmlns:a16="http://schemas.microsoft.com/office/drawing/2014/main" id="{4A8B349E-0551-4139-B920-336DC9103C13}"/>
               </a:ext>
             </a:extLst>
           </p:cNvPr>
@@ -7319,7 +7284,7 @@
           <p:cNvPr id="5" name="">
             <a:extLst xmlns:a="http://schemas.openxmlformats.org/drawingml/2006/main">
               <a:ext uri="{FF2B5EF4-FFF2-40B4-BE49-F238E27FC236}">
-                <a16:creationId xmlns:a16="http://schemas.microsoft.com/office/drawing/2014/main" id="{3CD56600-8711-4FB8-B4E5-41E3E662EAF2}"/>
+                <a16:creationId xmlns:a16="http://schemas.microsoft.com/office/drawing/2014/main" id="{67E2F878-A65A-4F77-B678-A64A1108D770}"/>
               </a:ext>
             </a:extLst>
           </p:cNvPr>
@@ -7350,7 +7315,7 @@
           <p:cNvPr id="6" name="">
             <a:extLst xmlns:a="http://schemas.openxmlformats.org/drawingml/2006/main">
               <a:ext uri="{FF2B5EF4-FFF2-40B4-BE49-F238E27FC236}">
-                <a16:creationId xmlns:a16="http://schemas.microsoft.com/office/drawing/2014/main" id="{82E5B013-7B52-4B2D-AB6B-A16D41778718}"/>
+                <a16:creationId xmlns:a16="http://schemas.microsoft.com/office/drawing/2014/main" id="{C303D46D-3CF2-4C48-9533-E1F24796476A}"/>
               </a:ext>
             </a:extLst>
           </p:cNvPr>
@@ -7407,7 +7372,7 @@
           <p:cNvPr id="7" name="">
             <a:extLst xmlns:a="http://schemas.openxmlformats.org/drawingml/2006/main">
               <a:ext uri="{FF2B5EF4-FFF2-40B4-BE49-F238E27FC236}">
-                <a16:creationId xmlns:a16="http://schemas.microsoft.com/office/drawing/2014/main" id="{3CF99D92-7343-4557-B894-AE66172ED9BE}"/>
+                <a16:creationId xmlns:a16="http://schemas.microsoft.com/office/drawing/2014/main" id="{BEFFD9FB-FDAF-4117-AD50-9C38E36DBA87}"/>
               </a:ext>
             </a:extLst>
           </p:cNvPr>
@@ -7464,7 +7429,7 @@
           <p:cNvPr id="8" name="">
             <a:extLst xmlns:a="http://schemas.openxmlformats.org/drawingml/2006/main">
               <a:ext uri="{FF2B5EF4-FFF2-40B4-BE49-F238E27FC236}">
-                <a16:creationId xmlns:a16="http://schemas.microsoft.com/office/drawing/2014/main" id="{C3067483-A37B-455A-A9BC-2DF5CEF3321A}"/>
+                <a16:creationId xmlns:a16="http://schemas.microsoft.com/office/drawing/2014/main" id="{C818316E-3132-4775-9084-0919F8DEE59B}"/>
               </a:ext>
             </a:extLst>
           </p:cNvPr>
@@ -7521,7 +7486,7 @@
           <p:cNvPr id="9" name="">
             <a:extLst xmlns:a="http://schemas.openxmlformats.org/drawingml/2006/main">
               <a:ext uri="{FF2B5EF4-FFF2-40B4-BE49-F238E27FC236}">
-                <a16:creationId xmlns:a16="http://schemas.microsoft.com/office/drawing/2014/main" id="{AA836651-DD2A-4AE4-AE51-20DFC3D5E1D7}"/>
+                <a16:creationId xmlns:a16="http://schemas.microsoft.com/office/drawing/2014/main" id="{BF3CFA38-52D0-4289-88D7-F429D90F22B9}"/>
               </a:ext>
             </a:extLst>
           </p:cNvPr>
@@ -7552,7 +7517,7 @@
           <p:cNvPr id="10" name="">
             <a:extLst xmlns:a="http://schemas.openxmlformats.org/drawingml/2006/main">
               <a:ext uri="{FF2B5EF4-FFF2-40B4-BE49-F238E27FC236}">
-                <a16:creationId xmlns:a16="http://schemas.microsoft.com/office/drawing/2014/main" id="{E28BCF36-D308-4284-BB0A-5E0AE7BA498B}"/>
+                <a16:creationId xmlns:a16="http://schemas.microsoft.com/office/drawing/2014/main" id="{3E3DDBE7-D14E-4E48-99D4-3B3AC44615FE}"/>
               </a:ext>
             </a:extLst>
           </p:cNvPr>
@@ -7583,7 +7548,7 @@
           <p:cNvPr id="11" name="">
             <a:extLst xmlns:a="http://schemas.openxmlformats.org/drawingml/2006/main">
               <a:ext uri="{FF2B5EF4-FFF2-40B4-BE49-F238E27FC236}">
-                <a16:creationId xmlns:a16="http://schemas.microsoft.com/office/drawing/2014/main" id="{9867B6D1-9A67-414D-8CEE-07CE1E7F7529}"/>
+                <a16:creationId xmlns:a16="http://schemas.microsoft.com/office/drawing/2014/main" id="{B29C5097-3975-4B1A-AE1B-003A2CDA32B3}"/>
               </a:ext>
             </a:extLst>
           </p:cNvPr>
@@ -7641,7 +7606,7 @@
           <p:cNvPr id="12" name="">
             <a:extLst xmlns:a="http://schemas.openxmlformats.org/drawingml/2006/main">
               <a:ext uri="{FF2B5EF4-FFF2-40B4-BE49-F238E27FC236}">
-                <a16:creationId xmlns:a16="http://schemas.microsoft.com/office/drawing/2014/main" id="{7812637D-E2A8-4072-85C7-8B22C0170482}"/>
+                <a16:creationId xmlns:a16="http://schemas.microsoft.com/office/drawing/2014/main" id="{B663172A-8082-4C9D-B8A3-9398DA9BE019}"/>
               </a:ext>
             </a:extLst>
           </p:cNvPr>
@@ -7699,7 +7664,7 @@
           <p:cNvPr id="13" name="">
             <a:extLst xmlns:a="http://schemas.openxmlformats.org/drawingml/2006/main">
               <a:ext uri="{FF2B5EF4-FFF2-40B4-BE49-F238E27FC236}">
-                <a16:creationId xmlns:a16="http://schemas.microsoft.com/office/drawing/2014/main" id="{6D68714B-7476-4BF4-A9AD-20A5F87CAECD}"/>
+                <a16:creationId xmlns:a16="http://schemas.microsoft.com/office/drawing/2014/main" id="{9A49980A-8F3F-4C2F-8270-075B4DAA0F0E}"/>
               </a:ext>
             </a:extLst>
           </p:cNvPr>
@@ -7757,7 +7722,7 @@
           <p:cNvPr id="14" name="">
             <a:extLst xmlns:a="http://schemas.openxmlformats.org/drawingml/2006/main">
               <a:ext uri="{FF2B5EF4-FFF2-40B4-BE49-F238E27FC236}">
-                <a16:creationId xmlns:a16="http://schemas.microsoft.com/office/drawing/2014/main" id="{CB75DD1A-35C1-4BE4-9E32-8F076AF40E99}"/>
+                <a16:creationId xmlns:a16="http://schemas.microsoft.com/office/drawing/2014/main" id="{FDED5B98-806C-4BE1-8F41-4905572205E9}"/>
               </a:ext>
             </a:extLst>
           </p:cNvPr>
@@ -7815,7 +7780,7 @@
           <p:cNvPr id="15" name="">
             <a:extLst xmlns:a="http://schemas.openxmlformats.org/drawingml/2006/main">
               <a:ext uri="{FF2B5EF4-FFF2-40B4-BE49-F238E27FC236}">
-                <a16:creationId xmlns:a16="http://schemas.microsoft.com/office/drawing/2014/main" id="{E3DBB3FA-A2FD-41E4-8CC7-7C8BAD6648BD}"/>
+                <a16:creationId xmlns:a16="http://schemas.microsoft.com/office/drawing/2014/main" id="{E1ECBA15-C1B9-409C-B530-34F8BB876393}"/>
               </a:ext>
             </a:extLst>
           </p:cNvPr>
@@ -7873,7 +7838,7 @@
           <p:cNvPr id="16" name="">
             <a:extLst xmlns:a="http://schemas.openxmlformats.org/drawingml/2006/main">
               <a:ext uri="{FF2B5EF4-FFF2-40B4-BE49-F238E27FC236}">
-                <a16:creationId xmlns:a16="http://schemas.microsoft.com/office/drawing/2014/main" id="{F823100D-00A0-4B32-9E54-C90D437399B4}"/>
+                <a16:creationId xmlns:a16="http://schemas.microsoft.com/office/drawing/2014/main" id="{F87682B1-92F1-4081-B6C7-464A09C0DEA8}"/>
               </a:ext>
             </a:extLst>
           </p:cNvPr>
@@ -7931,7 +7896,7 @@
           <p:cNvPr id="17" name="">
             <a:extLst xmlns:a="http://schemas.openxmlformats.org/drawingml/2006/main">
               <a:ext uri="{FF2B5EF4-FFF2-40B4-BE49-F238E27FC236}">
-                <a16:creationId xmlns:a16="http://schemas.microsoft.com/office/drawing/2014/main" id="{6BB73AA2-A000-485A-A1B7-422AA0FF47E6}"/>
+                <a16:creationId xmlns:a16="http://schemas.microsoft.com/office/drawing/2014/main" id="{E9CED515-3779-4199-BDAC-357961A0FA31}"/>
               </a:ext>
             </a:extLst>
           </p:cNvPr>
@@ -7989,7 +7954,7 @@
           <p:cNvPr id="18" name="">
             <a:extLst xmlns:a="http://schemas.openxmlformats.org/drawingml/2006/main">
               <a:ext uri="{FF2B5EF4-FFF2-40B4-BE49-F238E27FC236}">
-                <a16:creationId xmlns:a16="http://schemas.microsoft.com/office/drawing/2014/main" id="{994CE85C-2110-4759-A874-6BCC23C54185}"/>
+                <a16:creationId xmlns:a16="http://schemas.microsoft.com/office/drawing/2014/main" id="{92D3B160-A1A5-4877-91DE-657D71496328}"/>
               </a:ext>
             </a:extLst>
           </p:cNvPr>
@@ -8046,7 +8011,7 @@
           <p:cNvPr id="19" name="">
             <a:extLst xmlns:a="http://schemas.openxmlformats.org/drawingml/2006/main">
               <a:ext uri="{FF2B5EF4-FFF2-40B4-BE49-F238E27FC236}">
-                <a16:creationId xmlns:a16="http://schemas.microsoft.com/office/drawing/2014/main" id="{25981AA5-467A-4321-9442-14937D271006}"/>
+                <a16:creationId xmlns:a16="http://schemas.microsoft.com/office/drawing/2014/main" id="{099B022D-BBFA-4815-AD2F-54D1D23E1B0D}"/>
               </a:ext>
             </a:extLst>
           </p:cNvPr>
@@ -8104,7 +8069,7 @@
           <p:cNvPr id="20" name="">
             <a:extLst xmlns:a="http://schemas.openxmlformats.org/drawingml/2006/main">
               <a:ext uri="{FF2B5EF4-FFF2-40B4-BE49-F238E27FC236}">
-                <a16:creationId xmlns:a16="http://schemas.microsoft.com/office/drawing/2014/main" id="{8F74B44E-3D9E-4992-9FCD-4A295331DFE6}"/>
+                <a16:creationId xmlns:a16="http://schemas.microsoft.com/office/drawing/2014/main" id="{54C3500F-6CE0-4111-8324-A52FEB7A7D37}"/>
               </a:ext>
             </a:extLst>
           </p:cNvPr>
@@ -8162,7 +8127,7 @@
           <p:cNvPr id="21" name="">
             <a:extLst xmlns:a="http://schemas.openxmlformats.org/drawingml/2006/main">
               <a:ext uri="{FF2B5EF4-FFF2-40B4-BE49-F238E27FC236}">
-                <a16:creationId xmlns:a16="http://schemas.microsoft.com/office/drawing/2014/main" id="{484B2BA8-57F2-46C9-945D-DC757F0E2C22}"/>
+                <a16:creationId xmlns:a16="http://schemas.microsoft.com/office/drawing/2014/main" id="{189BB76F-1247-42D2-8489-3F594B4E4770}"/>
               </a:ext>
             </a:extLst>
           </p:cNvPr>
@@ -8219,7 +8184,7 @@
           <p:cNvPr id="22" name="">
             <a:extLst xmlns:a="http://schemas.openxmlformats.org/drawingml/2006/main">
               <a:ext uri="{FF2B5EF4-FFF2-40B4-BE49-F238E27FC236}">
-                <a16:creationId xmlns:a16="http://schemas.microsoft.com/office/drawing/2014/main" id="{C90ACBD2-F7DF-495C-8DCB-7DA13E0F796F}"/>
+                <a16:creationId xmlns:a16="http://schemas.microsoft.com/office/drawing/2014/main" id="{69072C18-676B-49A3-AC06-FB3C09D7239B}"/>
               </a:ext>
             </a:extLst>
           </p:cNvPr>
@@ -8277,7 +8242,7 @@
           <p:cNvPr id="23" name="">
             <a:extLst xmlns:a="http://schemas.openxmlformats.org/drawingml/2006/main">
               <a:ext uri="{FF2B5EF4-FFF2-40B4-BE49-F238E27FC236}">
-                <a16:creationId xmlns:a16="http://schemas.microsoft.com/office/drawing/2014/main" id="{AFC4E60F-AE9E-4AE9-9988-BF84F85F2AFA}"/>
+                <a16:creationId xmlns:a16="http://schemas.microsoft.com/office/drawing/2014/main" id="{7423598E-15E1-4BB1-BE7F-6115163F1A4A}"/>
               </a:ext>
             </a:extLst>
           </p:cNvPr>
@@ -8335,7 +8300,7 @@
           <p:cNvPr id="24" name="">
             <a:extLst xmlns:a="http://schemas.openxmlformats.org/drawingml/2006/main">
               <a:ext uri="{FF2B5EF4-FFF2-40B4-BE49-F238E27FC236}">
-                <a16:creationId xmlns:a16="http://schemas.microsoft.com/office/drawing/2014/main" id="{80ECADA9-9C5A-4737-8744-5A6424E3EC7A}"/>
+                <a16:creationId xmlns:a16="http://schemas.microsoft.com/office/drawing/2014/main" id="{A2D94FC7-1852-4872-90FE-3DAB512FFE43}"/>
               </a:ext>
             </a:extLst>
           </p:cNvPr>
@@ -8392,7 +8357,7 @@
           <p:cNvPr id="25" name="">
             <a:extLst xmlns:a="http://schemas.openxmlformats.org/drawingml/2006/main">
               <a:ext uri="{FF2B5EF4-FFF2-40B4-BE49-F238E27FC236}">
-                <a16:creationId xmlns:a16="http://schemas.microsoft.com/office/drawing/2014/main" id="{94C8DCF4-BFD6-4C78-B6AA-D93B38CF578E}"/>
+                <a16:creationId xmlns:a16="http://schemas.microsoft.com/office/drawing/2014/main" id="{C289CD24-3C6D-434B-AD58-E289B3DA4676}"/>
               </a:ext>
             </a:extLst>
           </p:cNvPr>
@@ -8450,7 +8415,7 @@
           <p:cNvPr id="26" name="">
             <a:extLst xmlns:a="http://schemas.openxmlformats.org/drawingml/2006/main">
               <a:ext uri="{FF2B5EF4-FFF2-40B4-BE49-F238E27FC236}">
-                <a16:creationId xmlns:a16="http://schemas.microsoft.com/office/drawing/2014/main" id="{749A24DA-9686-447A-A0DD-4C190896BC43}"/>
+                <a16:creationId xmlns:a16="http://schemas.microsoft.com/office/drawing/2014/main" id="{D2929A49-930F-42B4-A8D0-8E505C44AD1C}"/>
               </a:ext>
             </a:extLst>
           </p:cNvPr>
@@ -8508,7 +8473,7 @@
           <p:cNvPr id="27" name="">
             <a:extLst xmlns:a="http://schemas.openxmlformats.org/drawingml/2006/main">
               <a:ext uri="{FF2B5EF4-FFF2-40B4-BE49-F238E27FC236}">
-                <a16:creationId xmlns:a16="http://schemas.microsoft.com/office/drawing/2014/main" id="{6D5478AE-914C-4060-8004-28F8B787501C}"/>
+                <a16:creationId xmlns:a16="http://schemas.microsoft.com/office/drawing/2014/main" id="{805663E8-454A-41A2-A8AF-D0D14554CD30}"/>
               </a:ext>
             </a:extLst>
           </p:cNvPr>
@@ -8543,7 +8508,7 @@
           <p:cNvPr id="28" name="">
             <a:extLst xmlns:a="http://schemas.openxmlformats.org/drawingml/2006/main">
               <a:ext uri="{FF2B5EF4-FFF2-40B4-BE49-F238E27FC236}">
-                <a16:creationId xmlns:a16="http://schemas.microsoft.com/office/drawing/2014/main" id="{D75AAD1E-08DA-43C0-ACFE-DB506A42A2D8}"/>
+                <a16:creationId xmlns:a16="http://schemas.microsoft.com/office/drawing/2014/main" id="{6615C04E-429B-4022-A110-61790ED63640}"/>
               </a:ext>
             </a:extLst>
           </p:cNvPr>
@@ -8601,7 +8566,7 @@
           <p:cNvPr id="29" name="">
             <a:extLst xmlns:a="http://schemas.openxmlformats.org/drawingml/2006/main">
               <a:ext uri="{FF2B5EF4-FFF2-40B4-BE49-F238E27FC236}">
-                <a16:creationId xmlns:a16="http://schemas.microsoft.com/office/drawing/2014/main" id="{3896DED9-EC6E-4E2F-95A0-AF0B0890AB76}"/>
+                <a16:creationId xmlns:a16="http://schemas.microsoft.com/office/drawing/2014/main" id="{8C407330-02C3-4A67-AE6D-59592D99F206}"/>
               </a:ext>
             </a:extLst>
           </p:cNvPr>
@@ -8638,7 +8603,7 @@
           <p:cNvPr id="30" name="">
             <a:extLst xmlns:a="http://schemas.openxmlformats.org/drawingml/2006/main">
               <a:ext uri="{FF2B5EF4-FFF2-40B4-BE49-F238E27FC236}">
-                <a16:creationId xmlns:a16="http://schemas.microsoft.com/office/drawing/2014/main" id="{B24DACEA-5CE8-44D2-A5B0-E830D9FC9D0E}"/>
+                <a16:creationId xmlns:a16="http://schemas.microsoft.com/office/drawing/2014/main" id="{A4753FA7-063B-4B56-A562-D2481F5F995D}"/>
               </a:ext>
             </a:extLst>
           </p:cNvPr>
@@ -8696,7 +8661,7 @@
           <p:cNvPr id="31" name="">
             <a:extLst xmlns:a="http://schemas.openxmlformats.org/drawingml/2006/main">
               <a:ext uri="{FF2B5EF4-FFF2-40B4-BE49-F238E27FC236}">
-                <a16:creationId xmlns:a16="http://schemas.microsoft.com/office/drawing/2014/main" id="{C1149A8F-41F7-464F-9142-25E20B6B9F8E}"/>
+                <a16:creationId xmlns:a16="http://schemas.microsoft.com/office/drawing/2014/main" id="{F14C4851-3562-4563-8263-F9DD00A78835}"/>
               </a:ext>
             </a:extLst>
           </p:cNvPr>
@@ -8754,7 +8719,7 @@
           <p:cNvPr id="32" name="">
             <a:extLst xmlns:a="http://schemas.openxmlformats.org/drawingml/2006/main">
               <a:ext uri="{FF2B5EF4-FFF2-40B4-BE49-F238E27FC236}">
-                <a16:creationId xmlns:a16="http://schemas.microsoft.com/office/drawing/2014/main" id="{C47C0A11-A920-4213-9685-63A4A36ED046}"/>
+                <a16:creationId xmlns:a16="http://schemas.microsoft.com/office/drawing/2014/main" id="{4F7E8C42-8F59-473F-B821-74E6D3F6B326}"/>
               </a:ext>
             </a:extLst>
           </p:cNvPr>
@@ -8791,7 +8756,7 @@
           <p:cNvPr id="33" name="">
             <a:extLst xmlns:a="http://schemas.openxmlformats.org/drawingml/2006/main">
               <a:ext uri="{FF2B5EF4-FFF2-40B4-BE49-F238E27FC236}">
-                <a16:creationId xmlns:a16="http://schemas.microsoft.com/office/drawing/2014/main" id="{608ADEC5-ECA3-4CF2-92AE-E5E64E8ED813}"/>
+                <a16:creationId xmlns:a16="http://schemas.microsoft.com/office/drawing/2014/main" id="{DA677549-C366-4E13-AB54-686D3A5C751F}"/>
               </a:ext>
             </a:extLst>
           </p:cNvPr>
@@ -8849,7 +8814,7 @@
           <p:cNvPr id="34" name="">
             <a:extLst xmlns:a="http://schemas.openxmlformats.org/drawingml/2006/main">
               <a:ext uri="{FF2B5EF4-FFF2-40B4-BE49-F238E27FC236}">
-                <a16:creationId xmlns:a16="http://schemas.microsoft.com/office/drawing/2014/main" id="{9F602865-1001-4332-9B9E-1BECD84C4DCA}"/>
+                <a16:creationId xmlns:a16="http://schemas.microsoft.com/office/drawing/2014/main" id="{6727E1CC-9FD1-49DC-A05C-2B6DCDEE50DE}"/>
               </a:ext>
             </a:extLst>
           </p:cNvPr>
@@ -8907,7 +8872,7 @@
           <p:cNvPr id="35" name="">
             <a:extLst xmlns:a="http://schemas.openxmlformats.org/drawingml/2006/main">
               <a:ext uri="{FF2B5EF4-FFF2-40B4-BE49-F238E27FC236}">
-                <a16:creationId xmlns:a16="http://schemas.microsoft.com/office/drawing/2014/main" id="{8D8C6599-3E40-4EDB-8A67-5874E4086547}"/>
+                <a16:creationId xmlns:a16="http://schemas.microsoft.com/office/drawing/2014/main" id="{4A8999E3-BEE1-44BF-92EC-785CA0AE2C9B}"/>
               </a:ext>
             </a:extLst>
           </p:cNvPr>
@@ -8944,7 +8909,7 @@
           <p:cNvPr id="36" name="">
             <a:extLst xmlns:a="http://schemas.openxmlformats.org/drawingml/2006/main">
               <a:ext uri="{FF2B5EF4-FFF2-40B4-BE49-F238E27FC236}">
-                <a16:creationId xmlns:a16="http://schemas.microsoft.com/office/drawing/2014/main" id="{3120225E-39A6-4E90-A14F-4215AC5F2A35}"/>
+                <a16:creationId xmlns:a16="http://schemas.microsoft.com/office/drawing/2014/main" id="{DE58479E-5936-4D3C-8A40-E4C2BA9C5670}"/>
               </a:ext>
             </a:extLst>
           </p:cNvPr>
@@ -9002,7 +8967,7 @@
           <p:cNvPr id="37" name="">
             <a:extLst xmlns:a="http://schemas.openxmlformats.org/drawingml/2006/main">
               <a:ext uri="{FF2B5EF4-FFF2-40B4-BE49-F238E27FC236}">
-                <a16:creationId xmlns:a16="http://schemas.microsoft.com/office/drawing/2014/main" id="{8ED28347-6BB4-4FE9-A899-BC5590DF66CF}"/>
+                <a16:creationId xmlns:a16="http://schemas.microsoft.com/office/drawing/2014/main" id="{0ACB9D26-2EEA-4772-A0A9-5943EA3D6CEC}"/>
               </a:ext>
             </a:extLst>
           </p:cNvPr>
@@ -9060,7 +9025,7 @@
           <p:cNvPr id="38" name="">
             <a:extLst xmlns:a="http://schemas.openxmlformats.org/drawingml/2006/main">
               <a:ext uri="{FF2B5EF4-FFF2-40B4-BE49-F238E27FC236}">
-                <a16:creationId xmlns:a16="http://schemas.microsoft.com/office/drawing/2014/main" id="{B81A4AF4-FB75-40F3-88B9-05D6903557FE}"/>
+                <a16:creationId xmlns:a16="http://schemas.microsoft.com/office/drawing/2014/main" id="{DB84EDBB-FF49-47C7-9F5A-F0DAB8B613E3}"/>
               </a:ext>
             </a:extLst>
           </p:cNvPr>
@@ -9097,7 +9062,7 @@
           <p:cNvPr id="39" name="">
             <a:extLst xmlns:a="http://schemas.openxmlformats.org/drawingml/2006/main">
               <a:ext uri="{FF2B5EF4-FFF2-40B4-BE49-F238E27FC236}">
-                <a16:creationId xmlns:a16="http://schemas.microsoft.com/office/drawing/2014/main" id="{AABCEBEC-6558-4D67-8D57-724E57AF59AB}"/>
+                <a16:creationId xmlns:a16="http://schemas.microsoft.com/office/drawing/2014/main" id="{3DA713AB-3BEB-4DB4-8BC7-D82ABB0DBCED}"/>
               </a:ext>
             </a:extLst>
           </p:cNvPr>
@@ -9155,7 +9120,7 @@
           <p:cNvPr id="40" name="">
             <a:extLst xmlns:a="http://schemas.openxmlformats.org/drawingml/2006/main">
               <a:ext uri="{FF2B5EF4-FFF2-40B4-BE49-F238E27FC236}">
-                <a16:creationId xmlns:a16="http://schemas.microsoft.com/office/drawing/2014/main" id="{9CC1C532-9442-4386-9672-16F10CC18E61}"/>
+                <a16:creationId xmlns:a16="http://schemas.microsoft.com/office/drawing/2014/main" id="{196B0270-DEF5-4A6C-9BFD-86C63254C646}"/>
               </a:ext>
             </a:extLst>
           </p:cNvPr>
@@ -9213,7 +9178,7 @@
           <p:cNvPr id="41" name="">
             <a:extLst xmlns:a="http://schemas.openxmlformats.org/drawingml/2006/main">
               <a:ext uri="{FF2B5EF4-FFF2-40B4-BE49-F238E27FC236}">
-                <a16:creationId xmlns:a16="http://schemas.microsoft.com/office/drawing/2014/main" id="{91AFA3CC-C349-43F2-804A-43214D973318}"/>
+                <a16:creationId xmlns:a16="http://schemas.microsoft.com/office/drawing/2014/main" id="{1C3A5FB6-E26C-4390-A564-55A486CF4C83}"/>
               </a:ext>
             </a:extLst>
           </p:cNvPr>
@@ -9250,7 +9215,7 @@
           <p:cNvPr id="42" name="">
             <a:extLst xmlns:a="http://schemas.openxmlformats.org/drawingml/2006/main">
               <a:ext uri="{FF2B5EF4-FFF2-40B4-BE49-F238E27FC236}">
-                <a16:creationId xmlns:a16="http://schemas.microsoft.com/office/drawing/2014/main" id="{1ABB3BF0-3B29-4B5D-899C-94DB4A9FF1DA}"/>
+                <a16:creationId xmlns:a16="http://schemas.microsoft.com/office/drawing/2014/main" id="{B315EA91-0189-464E-8BEC-D67DF1087EAA}"/>
               </a:ext>
             </a:extLst>
           </p:cNvPr>
@@ -9308,7 +9273,7 @@
           <p:cNvPr id="43" name="">
             <a:extLst xmlns:a="http://schemas.openxmlformats.org/drawingml/2006/main">
               <a:ext uri="{FF2B5EF4-FFF2-40B4-BE49-F238E27FC236}">
-                <a16:creationId xmlns:a16="http://schemas.microsoft.com/office/drawing/2014/main" id="{B64C9F2C-D7EF-490D-B26E-51714A80DFDD}"/>
+                <a16:creationId xmlns:a16="http://schemas.microsoft.com/office/drawing/2014/main" id="{5434CA21-24C9-4CF2-A892-584E19294632}"/>
               </a:ext>
             </a:extLst>
           </p:cNvPr>
@@ -9366,7 +9331,7 @@
           <p:cNvPr id="44" name="">
             <a:extLst xmlns:a="http://schemas.openxmlformats.org/drawingml/2006/main">
               <a:ext uri="{FF2B5EF4-FFF2-40B4-BE49-F238E27FC236}">
-                <a16:creationId xmlns:a16="http://schemas.microsoft.com/office/drawing/2014/main" id="{14D8F241-F5E7-4FEC-AB76-91B3651B6A5C}"/>
+                <a16:creationId xmlns:a16="http://schemas.microsoft.com/office/drawing/2014/main" id="{984141E6-4B36-42D5-A787-B1D9A38388C8}"/>
               </a:ext>
             </a:extLst>
           </p:cNvPr>
@@ -9445,7 +9410,7 @@
     </p:spTree>
     <p:extLst>
       <p:ext uri="{BB962C8B-B14F-4D97-AF65-F5344CB8AC3E}">
-        <p14:creationId xmlns:p14="http://schemas.microsoft.com/office/powerpoint/2010/main" val="287077445"/>
+        <p14:creationId xmlns:p14="http://schemas.microsoft.com/office/powerpoint/2010/main" val="209758999"/>
       </p:ext>
     </p:extLst>
   </p:cSld>
@@ -9457,17 +9422,9 @@
   <p:cSld>
     <p:bg>
       <p:bgPr>
-        <a:gradFill xmlns:a="http://schemas.openxmlformats.org/drawingml/2006/main">
-          <a:gsLst>
-            <a:gs pos="0">
-              <a:srgbClr val="0A1722"/>
-            </a:gs>
-            <a:gs pos="100000">
-              <a:srgbClr val="16394B"/>
-            </a:gs>
-          </a:gsLst>
-          <a:lin ang="8100000"/>
-        </a:gradFill>
+        <a:solidFill xmlns:a="http://schemas.openxmlformats.org/drawingml/2006/main">
+          <a:srgbClr val="F3F1EB"/>
+        </a:solidFill>
       </p:bgPr>
     </p:bg>
     <p:spTree>
@@ -9484,7 +9441,7 @@
           <p:cNvPr id="23" name="">
             <a:extLst xmlns:a="http://schemas.openxmlformats.org/drawingml/2006/main">
               <a:ext uri="{FF2B5EF4-FFF2-40B4-BE49-F238E27FC236}">
-                <a16:creationId xmlns:a16="http://schemas.microsoft.com/office/drawing/2014/main" id="{C1E8D79D-5B5C-46F8-9BDB-B7CC1FE51AC4}"/>
+                <a16:creationId xmlns:a16="http://schemas.microsoft.com/office/drawing/2014/main" id="{00BC9626-28BE-4D5D-BDB4-7456EE221E97}"/>
               </a:ext>
             </a:extLst>
           </p:cNvPr>
@@ -9541,7 +9498,7 @@
           <p:cNvPr id="2" name="">
             <a:extLst xmlns:a="http://schemas.openxmlformats.org/drawingml/2006/main">
               <a:ext uri="{FF2B5EF4-FFF2-40B4-BE49-F238E27FC236}">
-                <a16:creationId xmlns:a16="http://schemas.microsoft.com/office/drawing/2014/main" id="{B85338D3-56D6-4616-B6DD-731303FFD9EC}"/>
+                <a16:creationId xmlns:a16="http://schemas.microsoft.com/office/drawing/2014/main" id="{28019D43-1B69-4B2A-895A-0B1C7F49CD40}"/>
               </a:ext>
             </a:extLst>
           </p:cNvPr>
@@ -9598,7 +9555,7 @@
           <p:cNvPr id="3" name="">
             <a:extLst xmlns:a="http://schemas.openxmlformats.org/drawingml/2006/main">
               <a:ext uri="{FF2B5EF4-FFF2-40B4-BE49-F238E27FC236}">
-                <a16:creationId xmlns:a16="http://schemas.microsoft.com/office/drawing/2014/main" id="{044A219A-48B8-4F84-9063-47BFFCD19643}"/>
+                <a16:creationId xmlns:a16="http://schemas.microsoft.com/office/drawing/2014/main" id="{DD552CC4-B8F4-4FA0-A702-898A410FDAD2}"/>
               </a:ext>
             </a:extLst>
           </p:cNvPr>
@@ -9655,7 +9612,7 @@
           <p:cNvPr id="4" name="">
             <a:extLst xmlns:a="http://schemas.openxmlformats.org/drawingml/2006/main">
               <a:ext uri="{FF2B5EF4-FFF2-40B4-BE49-F238E27FC236}">
-                <a16:creationId xmlns:a16="http://schemas.microsoft.com/office/drawing/2014/main" id="{30E14D19-75E0-43EE-BA48-9CA14E6CE58D}"/>
+                <a16:creationId xmlns:a16="http://schemas.microsoft.com/office/drawing/2014/main" id="{7FDBB61B-527C-4038-BC2D-051EB8B30360}"/>
               </a:ext>
             </a:extLst>
           </p:cNvPr>
@@ -9686,7 +9643,7 @@
           <p:cNvPr id="5" name="">
             <a:extLst xmlns:a="http://schemas.openxmlformats.org/drawingml/2006/main">
               <a:ext uri="{FF2B5EF4-FFF2-40B4-BE49-F238E27FC236}">
-                <a16:creationId xmlns:a16="http://schemas.microsoft.com/office/drawing/2014/main" id="{A029A7C9-2217-4F60-B29A-F79C3E316D06}"/>
+                <a16:creationId xmlns:a16="http://schemas.microsoft.com/office/drawing/2014/main" id="{67EA91F6-59B2-4127-80F6-9207CC2B3DC7}"/>
               </a:ext>
             </a:extLst>
           </p:cNvPr>
@@ -9706,7 +9663,7 @@
           <a:noFill xmlns:a="http://schemas.openxmlformats.org/drawingml/2006/main"/>
           <a:ln xmlns:a="http://schemas.openxmlformats.org/drawingml/2006/main" w="9525">
             <a:solidFill>
-              <a:srgbClr val="2A4D65"/>
+              <a:srgbClr val="C5D4DC"/>
             </a:solidFill>
             <a:prstDash val="solid"/>
           </a:ln>
@@ -9717,7 +9674,7 @@
           <p:cNvPr id="6" name="">
             <a:extLst xmlns:a="http://schemas.openxmlformats.org/drawingml/2006/main">
               <a:ext uri="{FF2B5EF4-FFF2-40B4-BE49-F238E27FC236}">
-                <a16:creationId xmlns:a16="http://schemas.microsoft.com/office/drawing/2014/main" id="{7779D2B2-44FC-4489-BA56-12A7FAF8A44A}"/>
+                <a16:creationId xmlns:a16="http://schemas.microsoft.com/office/drawing/2014/main" id="{7FEF554E-5426-4A62-9BE1-4CF632F6A594}"/>
               </a:ext>
             </a:extLst>
           </p:cNvPr>
@@ -9774,7 +9731,7 @@
           <p:cNvPr id="7" name="">
             <a:extLst xmlns:a="http://schemas.openxmlformats.org/drawingml/2006/main">
               <a:ext uri="{FF2B5EF4-FFF2-40B4-BE49-F238E27FC236}">
-                <a16:creationId xmlns:a16="http://schemas.microsoft.com/office/drawing/2014/main" id="{252A6EE8-D306-4899-BF71-E6E678D4D1F0}"/>
+                <a16:creationId xmlns:a16="http://schemas.microsoft.com/office/drawing/2014/main" id="{B510E4E2-04E3-46B3-AEF5-0FB61F54F538}"/>
               </a:ext>
             </a:extLst>
           </p:cNvPr>
@@ -9831,7 +9788,7 @@
           <p:cNvPr id="8" name="">
             <a:extLst xmlns:a="http://schemas.openxmlformats.org/drawingml/2006/main">
               <a:ext uri="{FF2B5EF4-FFF2-40B4-BE49-F238E27FC236}">
-                <a16:creationId xmlns:a16="http://schemas.microsoft.com/office/drawing/2014/main" id="{422EF6BC-BA53-45A0-AC5F-A03CC444A77F}"/>
+                <a16:creationId xmlns:a16="http://schemas.microsoft.com/office/drawing/2014/main" id="{52D778A3-FCD4-4C26-B750-9034B4B07369}"/>
               </a:ext>
             </a:extLst>
           </p:cNvPr>
@@ -9888,7 +9845,7 @@
           <p:cNvPr id="9" name="">
             <a:extLst xmlns:a="http://schemas.openxmlformats.org/drawingml/2006/main">
               <a:ext uri="{FF2B5EF4-FFF2-40B4-BE49-F238E27FC236}">
-                <a16:creationId xmlns:a16="http://schemas.microsoft.com/office/drawing/2014/main" id="{8F475AAE-F177-4FC6-8F2A-7C45BBA1A63D}"/>
+                <a16:creationId xmlns:a16="http://schemas.microsoft.com/office/drawing/2014/main" id="{5D7982BA-950F-4028-8807-6A54E8477A19}"/>
               </a:ext>
             </a:extLst>
           </p:cNvPr>
@@ -9919,7 +9876,7 @@
           <p:cNvPr id="10" name="">
             <a:extLst xmlns:a="http://schemas.openxmlformats.org/drawingml/2006/main">
               <a:ext uri="{FF2B5EF4-FFF2-40B4-BE49-F238E27FC236}">
-                <a16:creationId xmlns:a16="http://schemas.microsoft.com/office/drawing/2014/main" id="{BCA7675E-30AC-4307-A2D3-0D3058B6E6E8}"/>
+                <a16:creationId xmlns:a16="http://schemas.microsoft.com/office/drawing/2014/main" id="{1FFF04CA-C51D-4C78-ADF7-524BDA4BD414}"/>
               </a:ext>
             </a:extLst>
           </p:cNvPr>
@@ -9939,7 +9896,7 @@
           <a:noFill xmlns:a="http://schemas.openxmlformats.org/drawingml/2006/main"/>
           <a:ln xmlns:a="http://schemas.openxmlformats.org/drawingml/2006/main" w="9525">
             <a:solidFill>
-              <a:srgbClr val="2A4D65"/>
+              <a:srgbClr val="C5D4DC"/>
             </a:solidFill>
             <a:prstDash val="solid"/>
           </a:ln>
@@ -9950,7 +9907,7 @@
           <p:cNvPr id="11" name="">
             <a:extLst xmlns:a="http://schemas.openxmlformats.org/drawingml/2006/main">
               <a:ext uri="{FF2B5EF4-FFF2-40B4-BE49-F238E27FC236}">
-                <a16:creationId xmlns:a16="http://schemas.microsoft.com/office/drawing/2014/main" id="{B475E0A0-DC61-4DB8-84C6-BEF17FCC951D}"/>
+                <a16:creationId xmlns:a16="http://schemas.microsoft.com/office/drawing/2014/main" id="{E4DFDAC4-004C-40AC-95D7-F9A7FBC4E9BD}"/>
               </a:ext>
             </a:extLst>
           </p:cNvPr>
@@ -10008,7 +9965,7 @@
           <p:cNvPr id="12" name="">
             <a:extLst xmlns:a="http://schemas.openxmlformats.org/drawingml/2006/main">
               <a:ext uri="{FF2B5EF4-FFF2-40B4-BE49-F238E27FC236}">
-                <a16:creationId xmlns:a16="http://schemas.microsoft.com/office/drawing/2014/main" id="{F3F1A416-003D-45D3-82F1-6031F77F58C2}"/>
+                <a16:creationId xmlns:a16="http://schemas.microsoft.com/office/drawing/2014/main" id="{A35C13E3-0098-4919-9CAE-79E049AB901B}"/>
               </a:ext>
             </a:extLst>
           </p:cNvPr>
@@ -10089,7 +10046,7 @@
           <p:cNvPr id="13" name="">
             <a:extLst xmlns:a="http://schemas.openxmlformats.org/drawingml/2006/main">
               <a:ext uri="{FF2B5EF4-FFF2-40B4-BE49-F238E27FC236}">
-                <a16:creationId xmlns:a16="http://schemas.microsoft.com/office/drawing/2014/main" id="{591FF456-10FF-40FD-87C9-2C4F2E4CF008}"/>
+                <a16:creationId xmlns:a16="http://schemas.microsoft.com/office/drawing/2014/main" id="{B52E437B-2E16-46A4-81D7-06D285DD3DFC}"/>
               </a:ext>
             </a:extLst>
           </p:cNvPr>
@@ -10121,7 +10078,7 @@
             <a:pPr algn="l">
               <a:defRPr sz="1275" b="0">
                 <a:solidFill>
-                  <a:srgbClr val="B8C9D3"/>
+                  <a:srgbClr val="587080"/>
                 </a:solidFill>
                 <a:latin typeface="Arial"/>
                 <a:ea typeface="Arial"/>
@@ -10131,7 +10088,7 @@
             <a:r>
               <a:rPr sz="1275" b="0">
                 <a:solidFill>
-                  <a:srgbClr val="B8C9D3"/>
+                  <a:srgbClr val="587080"/>
                 </a:solidFill>
                 <a:latin typeface="Arial"/>
                 <a:ea typeface="Arial"/>
@@ -10144,7 +10101,7 @@
             <a:pPr algn="l">
               <a:defRPr sz="1275" b="0">
                 <a:solidFill>
-                  <a:srgbClr val="B8C9D3"/>
+                  <a:srgbClr val="587080"/>
                 </a:solidFill>
                 <a:latin typeface="Arial"/>
                 <a:ea typeface="Arial"/>
@@ -10154,7 +10111,7 @@
             <a:r>
               <a:rPr sz="1275" b="0">
                 <a:solidFill>
-                  <a:srgbClr val="B8C9D3"/>
+                  <a:srgbClr val="587080"/>
                 </a:solidFill>
                 <a:latin typeface="Arial"/>
                 <a:ea typeface="Arial"/>
@@ -10170,7 +10127,7 @@
           <p:cNvPr id="14" name="">
             <a:extLst xmlns:a="http://schemas.openxmlformats.org/drawingml/2006/main">
               <a:ext uri="{FF2B5EF4-FFF2-40B4-BE49-F238E27FC236}">
-                <a16:creationId xmlns:a16="http://schemas.microsoft.com/office/drawing/2014/main" id="{2B78F4BA-2751-49B3-ACAF-6048715B067B}"/>
+                <a16:creationId xmlns:a16="http://schemas.microsoft.com/office/drawing/2014/main" id="{5C45079A-AE29-41C7-9FD6-E7E05A7A7861}"/>
               </a:ext>
             </a:extLst>
           </p:cNvPr>
@@ -10207,7 +10164,7 @@
           <p:cNvPr id="15" name="">
             <a:extLst xmlns:a="http://schemas.openxmlformats.org/drawingml/2006/main">
               <a:ext uri="{FF2B5EF4-FFF2-40B4-BE49-F238E27FC236}">
-                <a16:creationId xmlns:a16="http://schemas.microsoft.com/office/drawing/2014/main" id="{8F427F32-98FB-4FD3-8B96-B41685257599}"/>
+                <a16:creationId xmlns:a16="http://schemas.microsoft.com/office/drawing/2014/main" id="{8598C0B8-109E-488A-9DAE-8A3FBDDCE193}"/>
               </a:ext>
             </a:extLst>
           </p:cNvPr>
@@ -10239,7 +10196,7 @@
             <a:pPr algn="ctr">
               <a:defRPr sz="900" b="1">
                 <a:solidFill>
-                  <a:srgbClr val="F3F8FA"/>
+                  <a:srgbClr val="132E41"/>
                 </a:solidFill>
                 <a:latin typeface="Arial"/>
                 <a:ea typeface="Arial"/>
@@ -10249,7 +10206,7 @@
             <a:r>
               <a:rPr sz="900" b="1">
                 <a:solidFill>
-                  <a:srgbClr val="F3F8FA"/>
+                  <a:srgbClr val="132E41"/>
                 </a:solidFill>
                 <a:latin typeface="Arial"/>
                 <a:ea typeface="Arial"/>
@@ -10265,7 +10222,7 @@
           <p:cNvPr id="16" name="">
             <a:extLst xmlns:a="http://schemas.openxmlformats.org/drawingml/2006/main">
               <a:ext uri="{FF2B5EF4-FFF2-40B4-BE49-F238E27FC236}">
-                <a16:creationId xmlns:a16="http://schemas.microsoft.com/office/drawing/2014/main" id="{966FB4C3-C68F-4B6D-87B6-8BAFF6DABE79}"/>
+                <a16:creationId xmlns:a16="http://schemas.microsoft.com/office/drawing/2014/main" id="{D9DD83F7-6757-4151-8A2E-0B73790ED7AE}"/>
               </a:ext>
             </a:extLst>
           </p:cNvPr>
@@ -10322,7 +10279,7 @@
           <p:cNvPr id="17" name="">
             <a:extLst xmlns:a="http://schemas.openxmlformats.org/drawingml/2006/main">
               <a:ext uri="{FF2B5EF4-FFF2-40B4-BE49-F238E27FC236}">
-                <a16:creationId xmlns:a16="http://schemas.microsoft.com/office/drawing/2014/main" id="{2CDFEB1C-CB76-4E37-BA5D-EE569C698B06}"/>
+                <a16:creationId xmlns:a16="http://schemas.microsoft.com/office/drawing/2014/main" id="{2CABB680-35EC-4DE8-8CD5-E047BC03A02B}"/>
               </a:ext>
             </a:extLst>
           </p:cNvPr>
@@ -10380,7 +10337,7 @@
           <p:cNvPr id="18" name="">
             <a:extLst xmlns:a="http://schemas.openxmlformats.org/drawingml/2006/main">
               <a:ext uri="{FF2B5EF4-FFF2-40B4-BE49-F238E27FC236}">
-                <a16:creationId xmlns:a16="http://schemas.microsoft.com/office/drawing/2014/main" id="{4C11CBDE-412F-4EEC-9847-BF3899030EA1}"/>
+                <a16:creationId xmlns:a16="http://schemas.microsoft.com/office/drawing/2014/main" id="{FD0DB0B4-C0A2-49F5-9D8E-37A5B65F1CA0}"/>
               </a:ext>
             </a:extLst>
           </p:cNvPr>
@@ -10437,7 +10394,7 @@
           <p:cNvPr id="19" name="">
             <a:extLst xmlns:a="http://schemas.openxmlformats.org/drawingml/2006/main">
               <a:ext uri="{FF2B5EF4-FFF2-40B4-BE49-F238E27FC236}">
-                <a16:creationId xmlns:a16="http://schemas.microsoft.com/office/drawing/2014/main" id="{A3A4D854-B0A4-4400-A2AB-127701609833}"/>
+                <a16:creationId xmlns:a16="http://schemas.microsoft.com/office/drawing/2014/main" id="{78B4A8AD-1E63-43E4-9017-E20C53BF21A2}"/>
               </a:ext>
             </a:extLst>
           </p:cNvPr>
@@ -10495,7 +10452,7 @@
           <p:cNvPr id="20" name="">
             <a:extLst xmlns:a="http://schemas.openxmlformats.org/drawingml/2006/main">
               <a:ext uri="{FF2B5EF4-FFF2-40B4-BE49-F238E27FC236}">
-                <a16:creationId xmlns:a16="http://schemas.microsoft.com/office/drawing/2014/main" id="{4484AEDD-B80E-4145-9C9C-83A8A3C30F71}"/>
+                <a16:creationId xmlns:a16="http://schemas.microsoft.com/office/drawing/2014/main" id="{2FE9AFD0-78F2-424A-B8AB-FD9159E4CEEA}"/>
               </a:ext>
             </a:extLst>
           </p:cNvPr>
@@ -10515,7 +10472,7 @@
           <a:noFill xmlns:a="http://schemas.openxmlformats.org/drawingml/2006/main"/>
           <a:ln xmlns:a="http://schemas.openxmlformats.org/drawingml/2006/main" w="19050">
             <a:solidFill>
-              <a:srgbClr val="2A4D65"/>
+              <a:srgbClr val="C5D4DC"/>
             </a:solidFill>
             <a:prstDash val="solid"/>
           </a:ln>
@@ -10526,7 +10483,7 @@
           <p:cNvPr id="21" name="">
             <a:extLst xmlns:a="http://schemas.openxmlformats.org/drawingml/2006/main">
               <a:ext uri="{FF2B5EF4-FFF2-40B4-BE49-F238E27FC236}">
-                <a16:creationId xmlns:a16="http://schemas.microsoft.com/office/drawing/2014/main" id="{690E644E-E0DB-4C42-9035-46D6ED5D2677}"/>
+                <a16:creationId xmlns:a16="http://schemas.microsoft.com/office/drawing/2014/main" id="{65A5780C-E2DA-49B7-B3CF-6C30DF731BE3}"/>
               </a:ext>
             </a:extLst>
           </p:cNvPr>
@@ -10558,7 +10515,7 @@
             <a:pPr algn="l">
               <a:defRPr sz="600" b="0">
                 <a:solidFill>
-                  <a:srgbClr val="B8C9D3"/>
+                  <a:srgbClr val="587080"/>
                 </a:solidFill>
                 <a:latin typeface="Arial"/>
                 <a:ea typeface="Arial"/>
@@ -10568,7 +10525,7 @@
             <a:r>
               <a:rPr sz="600" b="0">
                 <a:solidFill>
-                  <a:srgbClr val="B8C9D3"/>
+                  <a:srgbClr val="587080"/>
                 </a:solidFill>
                 <a:latin typeface="Arial"/>
                 <a:ea typeface="Arial"/>
@@ -10584,7 +10541,7 @@
           <p:cNvPr id="22" name="">
             <a:extLst xmlns:a="http://schemas.openxmlformats.org/drawingml/2006/main">
               <a:ext uri="{FF2B5EF4-FFF2-40B4-BE49-F238E27FC236}">
-                <a16:creationId xmlns:a16="http://schemas.microsoft.com/office/drawing/2014/main" id="{14BC9520-D88C-478B-A079-2E6AC3D95FA2}"/>
+                <a16:creationId xmlns:a16="http://schemas.microsoft.com/office/drawing/2014/main" id="{40AB8744-9597-41F0-928D-CC200C48D89E}"/>
               </a:ext>
             </a:extLst>
           </p:cNvPr>
@@ -10616,7 +10573,7 @@
             <a:pPr algn="r">
               <a:defRPr sz="750" b="1">
                 <a:solidFill>
-                  <a:srgbClr val="B8C9D3"/>
+                  <a:srgbClr val="587080"/>
                 </a:solidFill>
                 <a:latin typeface="Arial"/>
                 <a:ea typeface="Arial"/>
@@ -10626,7 +10583,7 @@
             <a:r>
               <a:rPr sz="750" b="1">
                 <a:solidFill>
-                  <a:srgbClr val="B8C9D3"/>
+                  <a:srgbClr val="587080"/>
                 </a:solidFill>
                 <a:latin typeface="Arial"/>
                 <a:ea typeface="Arial"/>
@@ -10640,7 +10597,7 @@
     </p:spTree>
     <p:extLst>
       <p:ext uri="{BB962C8B-B14F-4D97-AF65-F5344CB8AC3E}">
-        <p14:creationId xmlns:p14="http://schemas.microsoft.com/office/powerpoint/2010/main" val="653282149"/>
+        <p14:creationId xmlns:p14="http://schemas.microsoft.com/office/powerpoint/2010/main" val="362314632"/>
       </p:ext>
     </p:extLst>
   </p:cSld>
@@ -10652,17 +10609,9 @@
   <p:cSld>
     <p:bg>
       <p:bgPr>
-        <a:gradFill xmlns:a="http://schemas.openxmlformats.org/drawingml/2006/main">
-          <a:gsLst>
-            <a:gs pos="0">
-              <a:srgbClr val="F7F9FA"/>
-            </a:gs>
-            <a:gs pos="100000">
-              <a:srgbClr val="E6EEF2"/>
-            </a:gs>
-          </a:gsLst>
-          <a:lin ang="8100000"/>
-        </a:gradFill>
+        <a:solidFill xmlns:a="http://schemas.openxmlformats.org/drawingml/2006/main">
+          <a:srgbClr val="F3F1EB"/>
+        </a:solidFill>
       </p:bgPr>
     </p:bg>
     <p:spTree>
@@ -10679,7 +10628,7 @@
           <p:cNvPr id="54" name="">
             <a:extLst xmlns:a="http://schemas.openxmlformats.org/drawingml/2006/main">
               <a:ext uri="{FF2B5EF4-FFF2-40B4-BE49-F238E27FC236}">
-                <a16:creationId xmlns:a16="http://schemas.microsoft.com/office/drawing/2014/main" id="{74C732EA-9F73-4A6A-BEDD-2B88C1C8425F}"/>
+                <a16:creationId xmlns:a16="http://schemas.microsoft.com/office/drawing/2014/main" id="{18E300D9-87D8-4CA2-BD45-D32B7A167487}"/>
               </a:ext>
             </a:extLst>
           </p:cNvPr>
@@ -10736,7 +10685,7 @@
           <p:cNvPr id="2" name="">
             <a:extLst xmlns:a="http://schemas.openxmlformats.org/drawingml/2006/main">
               <a:ext uri="{FF2B5EF4-FFF2-40B4-BE49-F238E27FC236}">
-                <a16:creationId xmlns:a16="http://schemas.microsoft.com/office/drawing/2014/main" id="{C4C7D3CA-8A38-4A5B-AE5B-BF10D394B32A}"/>
+                <a16:creationId xmlns:a16="http://schemas.microsoft.com/office/drawing/2014/main" id="{3D6B8FE5-002E-47A9-924D-32041472085E}"/>
               </a:ext>
             </a:extLst>
           </p:cNvPr>
@@ -10793,7 +10742,7 @@
           <p:cNvPr id="3" name="">
             <a:extLst xmlns:a="http://schemas.openxmlformats.org/drawingml/2006/main">
               <a:ext uri="{FF2B5EF4-FFF2-40B4-BE49-F238E27FC236}">
-                <a16:creationId xmlns:a16="http://schemas.microsoft.com/office/drawing/2014/main" id="{83BC065B-FD66-451B-BA06-E2FAFA73E08E}"/>
+                <a16:creationId xmlns:a16="http://schemas.microsoft.com/office/drawing/2014/main" id="{8383B5F0-2348-4D7E-A610-6660519949D2}"/>
               </a:ext>
             </a:extLst>
           </p:cNvPr>
@@ -10850,7 +10799,7 @@
           <p:cNvPr id="4" name="">
             <a:extLst xmlns:a="http://schemas.openxmlformats.org/drawingml/2006/main">
               <a:ext uri="{FF2B5EF4-FFF2-40B4-BE49-F238E27FC236}">
-                <a16:creationId xmlns:a16="http://schemas.microsoft.com/office/drawing/2014/main" id="{C1A9D97E-CC06-418D-B3C0-84C8E607084B}"/>
+                <a16:creationId xmlns:a16="http://schemas.microsoft.com/office/drawing/2014/main" id="{84A6ED10-681A-4AB7-BE6B-50D3D946CEBE}"/>
               </a:ext>
             </a:extLst>
           </p:cNvPr>
@@ -10881,7 +10830,7 @@
           <p:cNvPr id="5" name="">
             <a:extLst xmlns:a="http://schemas.openxmlformats.org/drawingml/2006/main">
               <a:ext uri="{FF2B5EF4-FFF2-40B4-BE49-F238E27FC236}">
-                <a16:creationId xmlns:a16="http://schemas.microsoft.com/office/drawing/2014/main" id="{3A533822-2FAF-4664-9D07-88868496EA81}"/>
+                <a16:creationId xmlns:a16="http://schemas.microsoft.com/office/drawing/2014/main" id="{9C4E0460-54EB-47B8-9CD5-F3AADE4DA1AC}"/>
               </a:ext>
             </a:extLst>
           </p:cNvPr>
@@ -10912,7 +10861,7 @@
           <p:cNvPr id="6" name="">
             <a:extLst xmlns:a="http://schemas.openxmlformats.org/drawingml/2006/main">
               <a:ext uri="{FF2B5EF4-FFF2-40B4-BE49-F238E27FC236}">
-                <a16:creationId xmlns:a16="http://schemas.microsoft.com/office/drawing/2014/main" id="{D6704C37-1291-4FCF-B0BE-6FE3F566FD11}"/>
+                <a16:creationId xmlns:a16="http://schemas.microsoft.com/office/drawing/2014/main" id="{F533E501-C8A5-42B3-A822-AB0A7B6AD52E}"/>
               </a:ext>
             </a:extLst>
           </p:cNvPr>
@@ -10969,7 +10918,7 @@
           <p:cNvPr id="7" name="">
             <a:extLst xmlns:a="http://schemas.openxmlformats.org/drawingml/2006/main">
               <a:ext uri="{FF2B5EF4-FFF2-40B4-BE49-F238E27FC236}">
-                <a16:creationId xmlns:a16="http://schemas.microsoft.com/office/drawing/2014/main" id="{33D21147-477E-4293-961E-FADE49EC1C9D}"/>
+                <a16:creationId xmlns:a16="http://schemas.microsoft.com/office/drawing/2014/main" id="{9261F034-D75E-42C7-9829-87B6C6A7892F}"/>
               </a:ext>
             </a:extLst>
           </p:cNvPr>
@@ -11026,7 +10975,7 @@
           <p:cNvPr id="8" name="">
             <a:extLst xmlns:a="http://schemas.openxmlformats.org/drawingml/2006/main">
               <a:ext uri="{FF2B5EF4-FFF2-40B4-BE49-F238E27FC236}">
-                <a16:creationId xmlns:a16="http://schemas.microsoft.com/office/drawing/2014/main" id="{3F36FCD8-676E-4B13-B6E5-AA0C0C611D3A}"/>
+                <a16:creationId xmlns:a16="http://schemas.microsoft.com/office/drawing/2014/main" id="{3F31123A-4ECC-4C64-8258-C20FC724C7DD}"/>
               </a:ext>
             </a:extLst>
           </p:cNvPr>
@@ -11083,7 +11032,7 @@
           <p:cNvPr id="9" name="">
             <a:extLst xmlns:a="http://schemas.openxmlformats.org/drawingml/2006/main">
               <a:ext uri="{FF2B5EF4-FFF2-40B4-BE49-F238E27FC236}">
-                <a16:creationId xmlns:a16="http://schemas.microsoft.com/office/drawing/2014/main" id="{B55A1C0C-A8F1-4EFE-BADD-A1A44BF5A88C}"/>
+                <a16:creationId xmlns:a16="http://schemas.microsoft.com/office/drawing/2014/main" id="{A97D1D1B-8EA4-4158-9321-F276ABA05253}"/>
               </a:ext>
             </a:extLst>
           </p:cNvPr>
@@ -11114,7 +11063,7 @@
           <p:cNvPr id="10" name="">
             <a:extLst xmlns:a="http://schemas.openxmlformats.org/drawingml/2006/main">
               <a:ext uri="{FF2B5EF4-FFF2-40B4-BE49-F238E27FC236}">
-                <a16:creationId xmlns:a16="http://schemas.microsoft.com/office/drawing/2014/main" id="{E458E327-69F7-481C-A832-8D74F6AF4392}"/>
+                <a16:creationId xmlns:a16="http://schemas.microsoft.com/office/drawing/2014/main" id="{BB479165-2F67-46A9-865A-0D90456A2508}"/>
               </a:ext>
             </a:extLst>
           </p:cNvPr>
@@ -11145,7 +11094,7 @@
           <p:cNvPr id="11" name="">
             <a:extLst xmlns:a="http://schemas.openxmlformats.org/drawingml/2006/main">
               <a:ext uri="{FF2B5EF4-FFF2-40B4-BE49-F238E27FC236}">
-                <a16:creationId xmlns:a16="http://schemas.microsoft.com/office/drawing/2014/main" id="{60065A39-4037-48E1-B85B-E25F476CA322}"/>
+                <a16:creationId xmlns:a16="http://schemas.microsoft.com/office/drawing/2014/main" id="{301D7CB1-0186-4D91-BA56-4E41E2F802B5}"/>
               </a:ext>
             </a:extLst>
           </p:cNvPr>
@@ -11203,7 +11152,7 @@
           <p:cNvPr id="12" name="">
             <a:extLst xmlns:a="http://schemas.openxmlformats.org/drawingml/2006/main">
               <a:ext uri="{FF2B5EF4-FFF2-40B4-BE49-F238E27FC236}">
-                <a16:creationId xmlns:a16="http://schemas.microsoft.com/office/drawing/2014/main" id="{36363581-3A87-4332-92A6-1DF531ED63CF}"/>
+                <a16:creationId xmlns:a16="http://schemas.microsoft.com/office/drawing/2014/main" id="{E9A22EE0-E0D8-420E-93DD-9D4FBA28A8D3}"/>
               </a:ext>
             </a:extLst>
           </p:cNvPr>
@@ -11261,7 +11210,7 @@
           <p:cNvPr id="13" name="">
             <a:extLst xmlns:a="http://schemas.openxmlformats.org/drawingml/2006/main">
               <a:ext uri="{FF2B5EF4-FFF2-40B4-BE49-F238E27FC236}">
-                <a16:creationId xmlns:a16="http://schemas.microsoft.com/office/drawing/2014/main" id="{15421793-5046-4576-9AB7-D651FD6240DE}"/>
+                <a16:creationId xmlns:a16="http://schemas.microsoft.com/office/drawing/2014/main" id="{A97853B3-99D9-4B2C-AC68-1B2575A38553}"/>
               </a:ext>
             </a:extLst>
           </p:cNvPr>
@@ -11319,7 +11268,7 @@
           <p:cNvPr id="14" name="">
             <a:extLst xmlns:a="http://schemas.openxmlformats.org/drawingml/2006/main">
               <a:ext uri="{FF2B5EF4-FFF2-40B4-BE49-F238E27FC236}">
-                <a16:creationId xmlns:a16="http://schemas.microsoft.com/office/drawing/2014/main" id="{E4EE162F-548B-48E7-ADB3-D1BE3E279973}"/>
+                <a16:creationId xmlns:a16="http://schemas.microsoft.com/office/drawing/2014/main" id="{3B90B573-98F1-44EF-93E8-A59BD781902B}"/>
               </a:ext>
             </a:extLst>
           </p:cNvPr>
@@ -11377,7 +11326,7 @@
           <p:cNvPr id="15" name="">
             <a:extLst xmlns:a="http://schemas.openxmlformats.org/drawingml/2006/main">
               <a:ext uri="{FF2B5EF4-FFF2-40B4-BE49-F238E27FC236}">
-                <a16:creationId xmlns:a16="http://schemas.microsoft.com/office/drawing/2014/main" id="{F20B715C-F657-4C3B-BF98-2B18B071BC47}"/>
+                <a16:creationId xmlns:a16="http://schemas.microsoft.com/office/drawing/2014/main" id="{424DCCDE-3339-455D-A9EB-BD9DFBA565E8}"/>
               </a:ext>
             </a:extLst>
           </p:cNvPr>
@@ -11435,7 +11384,7 @@
           <p:cNvPr id="16" name="">
             <a:extLst xmlns:a="http://schemas.openxmlformats.org/drawingml/2006/main">
               <a:ext uri="{FF2B5EF4-FFF2-40B4-BE49-F238E27FC236}">
-                <a16:creationId xmlns:a16="http://schemas.microsoft.com/office/drawing/2014/main" id="{FBD594CA-4E5B-4573-A7ED-BB185DBBA7D2}"/>
+                <a16:creationId xmlns:a16="http://schemas.microsoft.com/office/drawing/2014/main" id="{0CAC5092-9154-4956-B692-C1ACD91E2450}"/>
               </a:ext>
             </a:extLst>
           </p:cNvPr>
@@ -11493,7 +11442,7 @@
           <p:cNvPr id="17" name="">
             <a:extLst xmlns:a="http://schemas.openxmlformats.org/drawingml/2006/main">
               <a:ext uri="{FF2B5EF4-FFF2-40B4-BE49-F238E27FC236}">
-                <a16:creationId xmlns:a16="http://schemas.microsoft.com/office/drawing/2014/main" id="{5C91B24D-10DF-4414-979B-3597A83A321D}"/>
+                <a16:creationId xmlns:a16="http://schemas.microsoft.com/office/drawing/2014/main" id="{B0C95857-3309-44AE-90CB-7A34AD5EFF19}"/>
               </a:ext>
             </a:extLst>
           </p:cNvPr>
@@ -11528,7 +11477,7 @@
           <p:cNvPr id="18" name="">
             <a:extLst xmlns:a="http://schemas.openxmlformats.org/drawingml/2006/main">
               <a:ext uri="{FF2B5EF4-FFF2-40B4-BE49-F238E27FC236}">
-                <a16:creationId xmlns:a16="http://schemas.microsoft.com/office/drawing/2014/main" id="{83285270-FBD0-455B-AE0F-99D0E8414F73}"/>
+                <a16:creationId xmlns:a16="http://schemas.microsoft.com/office/drawing/2014/main" id="{790DFA5C-F503-4900-B61D-021E37E5A286}"/>
               </a:ext>
             </a:extLst>
           </p:cNvPr>
@@ -11586,7 +11535,7 @@
           <p:cNvPr id="19" name="">
             <a:extLst xmlns:a="http://schemas.openxmlformats.org/drawingml/2006/main">
               <a:ext uri="{FF2B5EF4-FFF2-40B4-BE49-F238E27FC236}">
-                <a16:creationId xmlns:a16="http://schemas.microsoft.com/office/drawing/2014/main" id="{0EE532AD-3F65-4E4F-93CC-8271AC86DC92}"/>
+                <a16:creationId xmlns:a16="http://schemas.microsoft.com/office/drawing/2014/main" id="{F5DD1FA6-D7F8-4C97-BF08-9BA039B53A25}"/>
               </a:ext>
             </a:extLst>
           </p:cNvPr>
@@ -11643,7 +11592,7 @@
           <p:cNvPr id="20" name="">
             <a:extLst xmlns:a="http://schemas.openxmlformats.org/drawingml/2006/main">
               <a:ext uri="{FF2B5EF4-FFF2-40B4-BE49-F238E27FC236}">
-                <a16:creationId xmlns:a16="http://schemas.microsoft.com/office/drawing/2014/main" id="{9B1BAEEC-15C4-4BE1-AD54-B7D045947F74}"/>
+                <a16:creationId xmlns:a16="http://schemas.microsoft.com/office/drawing/2014/main" id="{692DC0BD-6715-4551-A738-78552ACA3013}"/>
               </a:ext>
             </a:extLst>
           </p:cNvPr>
@@ -11674,7 +11623,7 @@
           <p:cNvPr id="21" name="">
             <a:extLst xmlns:a="http://schemas.openxmlformats.org/drawingml/2006/main">
               <a:ext uri="{FF2B5EF4-FFF2-40B4-BE49-F238E27FC236}">
-                <a16:creationId xmlns:a16="http://schemas.microsoft.com/office/drawing/2014/main" id="{2B824617-80E2-4250-8FB0-6A0CA7A22843}"/>
+                <a16:creationId xmlns:a16="http://schemas.microsoft.com/office/drawing/2014/main" id="{F453BA09-B9E4-4748-9304-0C0CAE5AC230}"/>
               </a:ext>
             </a:extLst>
           </p:cNvPr>
@@ -11732,7 +11681,7 @@
           <p:cNvPr id="22" name="">
             <a:extLst xmlns:a="http://schemas.openxmlformats.org/drawingml/2006/main">
               <a:ext uri="{FF2B5EF4-FFF2-40B4-BE49-F238E27FC236}">
-                <a16:creationId xmlns:a16="http://schemas.microsoft.com/office/drawing/2014/main" id="{F68754F0-7CDE-48BA-BA4C-35606F98984D}"/>
+                <a16:creationId xmlns:a16="http://schemas.microsoft.com/office/drawing/2014/main" id="{6A9794F2-9393-449D-B1EC-D798292B9015}"/>
               </a:ext>
             </a:extLst>
           </p:cNvPr>
@@ -11789,7 +11738,7 @@
           <p:cNvPr id="23" name="">
             <a:extLst xmlns:a="http://schemas.openxmlformats.org/drawingml/2006/main">
               <a:ext uri="{FF2B5EF4-FFF2-40B4-BE49-F238E27FC236}">
-                <a16:creationId xmlns:a16="http://schemas.microsoft.com/office/drawing/2014/main" id="{16C1BCA6-70B1-421F-861D-B7846E4A1A0B}"/>
+                <a16:creationId xmlns:a16="http://schemas.microsoft.com/office/drawing/2014/main" id="{D7D2875F-EEED-403C-A1F6-DA62C02BCF86}"/>
               </a:ext>
             </a:extLst>
           </p:cNvPr>
@@ -11820,7 +11769,7 @@
           <p:cNvPr id="24" name="">
             <a:extLst xmlns:a="http://schemas.openxmlformats.org/drawingml/2006/main">
               <a:ext uri="{FF2B5EF4-FFF2-40B4-BE49-F238E27FC236}">
-                <a16:creationId xmlns:a16="http://schemas.microsoft.com/office/drawing/2014/main" id="{5F62BA2F-C717-47F3-9E44-DE5754BE41D5}"/>
+                <a16:creationId xmlns:a16="http://schemas.microsoft.com/office/drawing/2014/main" id="{BD1EDB6C-66C7-4970-A071-3B191FA08665}"/>
               </a:ext>
             </a:extLst>
           </p:cNvPr>
@@ -11878,7 +11827,7 @@
           <p:cNvPr id="25" name="">
             <a:extLst xmlns:a="http://schemas.openxmlformats.org/drawingml/2006/main">
               <a:ext uri="{FF2B5EF4-FFF2-40B4-BE49-F238E27FC236}">
-                <a16:creationId xmlns:a16="http://schemas.microsoft.com/office/drawing/2014/main" id="{9BB8CF93-9B9C-4AA6-9376-39DFF676582C}"/>
+                <a16:creationId xmlns:a16="http://schemas.microsoft.com/office/drawing/2014/main" id="{04C9093B-0E16-40BA-8AE8-A0236CE0EA78}"/>
               </a:ext>
             </a:extLst>
           </p:cNvPr>
@@ -11935,7 +11884,7 @@
           <p:cNvPr id="26" name="">
             <a:extLst xmlns:a="http://schemas.openxmlformats.org/drawingml/2006/main">
               <a:ext uri="{FF2B5EF4-FFF2-40B4-BE49-F238E27FC236}">
-                <a16:creationId xmlns:a16="http://schemas.microsoft.com/office/drawing/2014/main" id="{8AD2120A-8E08-43DF-A419-B3FCBEB75AF7}"/>
+                <a16:creationId xmlns:a16="http://schemas.microsoft.com/office/drawing/2014/main" id="{78A57A7E-D00F-4CE9-AA1D-181B6CCF5343}"/>
               </a:ext>
             </a:extLst>
           </p:cNvPr>
@@ -11966,7 +11915,7 @@
           <p:cNvPr id="27" name="">
             <a:extLst xmlns:a="http://schemas.openxmlformats.org/drawingml/2006/main">
               <a:ext uri="{FF2B5EF4-FFF2-40B4-BE49-F238E27FC236}">
-                <a16:creationId xmlns:a16="http://schemas.microsoft.com/office/drawing/2014/main" id="{DC6239DF-5C31-4611-B0E1-E50B61D54A71}"/>
+                <a16:creationId xmlns:a16="http://schemas.microsoft.com/office/drawing/2014/main" id="{DD579E64-26CB-467F-B3CC-D2BBFCC6A478}"/>
               </a:ext>
             </a:extLst>
           </p:cNvPr>
@@ -12024,7 +11973,7 @@
           <p:cNvPr id="28" name="">
             <a:extLst xmlns:a="http://schemas.openxmlformats.org/drawingml/2006/main">
               <a:ext uri="{FF2B5EF4-FFF2-40B4-BE49-F238E27FC236}">
-                <a16:creationId xmlns:a16="http://schemas.microsoft.com/office/drawing/2014/main" id="{98AAB14A-FF28-4D48-9B31-EE081497B4B3}"/>
+                <a16:creationId xmlns:a16="http://schemas.microsoft.com/office/drawing/2014/main" id="{94498AEE-DDCE-46F0-AAB5-B4E71FA8ABCB}"/>
               </a:ext>
             </a:extLst>
           </p:cNvPr>
@@ -12081,7 +12030,7 @@
           <p:cNvPr id="29" name="">
             <a:extLst xmlns:a="http://schemas.openxmlformats.org/drawingml/2006/main">
               <a:ext uri="{FF2B5EF4-FFF2-40B4-BE49-F238E27FC236}">
-                <a16:creationId xmlns:a16="http://schemas.microsoft.com/office/drawing/2014/main" id="{7ABEE999-B016-4E19-AB21-E29E8F2BA838}"/>
+                <a16:creationId xmlns:a16="http://schemas.microsoft.com/office/drawing/2014/main" id="{81BA3704-3B2F-437E-8EA3-109A7FDBE416}"/>
               </a:ext>
             </a:extLst>
           </p:cNvPr>
@@ -12112,7 +12061,7 @@
           <p:cNvPr id="30" name="">
             <a:extLst xmlns:a="http://schemas.openxmlformats.org/drawingml/2006/main">
               <a:ext uri="{FF2B5EF4-FFF2-40B4-BE49-F238E27FC236}">
-                <a16:creationId xmlns:a16="http://schemas.microsoft.com/office/drawing/2014/main" id="{3F6D0B07-CA9A-447F-BE58-3D40013730BA}"/>
+                <a16:creationId xmlns:a16="http://schemas.microsoft.com/office/drawing/2014/main" id="{3DB10D04-E807-4C4D-8C52-4987A590A4AD}"/>
               </a:ext>
             </a:extLst>
           </p:cNvPr>
@@ -12170,7 +12119,7 @@
           <p:cNvPr id="31" name="">
             <a:extLst xmlns:a="http://schemas.openxmlformats.org/drawingml/2006/main">
               <a:ext uri="{FF2B5EF4-FFF2-40B4-BE49-F238E27FC236}">
-                <a16:creationId xmlns:a16="http://schemas.microsoft.com/office/drawing/2014/main" id="{EC51B231-9ABC-452E-A924-9B18D9CE4895}"/>
+                <a16:creationId xmlns:a16="http://schemas.microsoft.com/office/drawing/2014/main" id="{F79AB76A-57C3-4303-A429-06D8B69D1982}"/>
               </a:ext>
             </a:extLst>
           </p:cNvPr>
@@ -12227,7 +12176,7 @@
           <p:cNvPr id="32" name="">
             <a:extLst xmlns:a="http://schemas.openxmlformats.org/drawingml/2006/main">
               <a:ext uri="{FF2B5EF4-FFF2-40B4-BE49-F238E27FC236}">
-                <a16:creationId xmlns:a16="http://schemas.microsoft.com/office/drawing/2014/main" id="{E89D77EE-D383-4F2D-B014-87B0EF1F0B4B}"/>
+                <a16:creationId xmlns:a16="http://schemas.microsoft.com/office/drawing/2014/main" id="{E3052349-90F8-4A1A-8163-AA36EE6A3815}"/>
               </a:ext>
             </a:extLst>
           </p:cNvPr>
@@ -12258,7 +12207,7 @@
           <p:cNvPr id="33" name="">
             <a:extLst xmlns:a="http://schemas.openxmlformats.org/drawingml/2006/main">
               <a:ext uri="{FF2B5EF4-FFF2-40B4-BE49-F238E27FC236}">
-                <a16:creationId xmlns:a16="http://schemas.microsoft.com/office/drawing/2014/main" id="{D22F9723-370D-48EC-A27F-AB9FA51D32D3}"/>
+                <a16:creationId xmlns:a16="http://schemas.microsoft.com/office/drawing/2014/main" id="{36F6EBCC-41FB-4948-BE1D-0532C0D4508D}"/>
               </a:ext>
             </a:extLst>
           </p:cNvPr>
@@ -12316,7 +12265,7 @@
           <p:cNvPr id="34" name="">
             <a:extLst xmlns:a="http://schemas.openxmlformats.org/drawingml/2006/main">
               <a:ext uri="{FF2B5EF4-FFF2-40B4-BE49-F238E27FC236}">
-                <a16:creationId xmlns:a16="http://schemas.microsoft.com/office/drawing/2014/main" id="{EA91693D-790B-452A-8E2B-DBAEDD5E50FF}"/>
+                <a16:creationId xmlns:a16="http://schemas.microsoft.com/office/drawing/2014/main" id="{22E980E3-9BCC-453F-9E53-25ADBB4FA26C}"/>
               </a:ext>
             </a:extLst>
           </p:cNvPr>
@@ -12351,7 +12300,7 @@
           <p:cNvPr id="35" name="">
             <a:extLst xmlns:a="http://schemas.openxmlformats.org/drawingml/2006/main">
               <a:ext uri="{FF2B5EF4-FFF2-40B4-BE49-F238E27FC236}">
-                <a16:creationId xmlns:a16="http://schemas.microsoft.com/office/drawing/2014/main" id="{2CF793E6-A721-4A19-95A9-39B840595280}"/>
+                <a16:creationId xmlns:a16="http://schemas.microsoft.com/office/drawing/2014/main" id="{56864A1B-ECFD-4350-AB66-5DE5899F19AF}"/>
               </a:ext>
             </a:extLst>
           </p:cNvPr>
@@ -12409,7 +12358,7 @@
           <p:cNvPr id="36" name="">
             <a:extLst xmlns:a="http://schemas.openxmlformats.org/drawingml/2006/main">
               <a:ext uri="{FF2B5EF4-FFF2-40B4-BE49-F238E27FC236}">
-                <a16:creationId xmlns:a16="http://schemas.microsoft.com/office/drawing/2014/main" id="{FC1CEDFE-F92E-4FBB-A72C-0A39A4B1D82E}"/>
+                <a16:creationId xmlns:a16="http://schemas.microsoft.com/office/drawing/2014/main" id="{D101F072-B7A1-457B-A84B-63A6BA6E1035}"/>
               </a:ext>
             </a:extLst>
           </p:cNvPr>
@@ -12440,7 +12389,7 @@
           <p:cNvPr id="37" name="">
             <a:extLst xmlns:a="http://schemas.openxmlformats.org/drawingml/2006/main">
               <a:ext uri="{FF2B5EF4-FFF2-40B4-BE49-F238E27FC236}">
-                <a16:creationId xmlns:a16="http://schemas.microsoft.com/office/drawing/2014/main" id="{E48EB0C7-FC8A-4574-BD0D-5E70517E1B5A}"/>
+                <a16:creationId xmlns:a16="http://schemas.microsoft.com/office/drawing/2014/main" id="{0107D37B-C9F1-4F63-A70C-7E3F03FF7DA7}"/>
               </a:ext>
             </a:extLst>
           </p:cNvPr>
@@ -12471,7 +12420,7 @@
           <p:cNvPr id="38" name="">
             <a:extLst xmlns:a="http://schemas.openxmlformats.org/drawingml/2006/main">
               <a:ext uri="{FF2B5EF4-FFF2-40B4-BE49-F238E27FC236}">
-                <a16:creationId xmlns:a16="http://schemas.microsoft.com/office/drawing/2014/main" id="{32E4C65D-302C-47C0-A319-2B81AE468CF9}"/>
+                <a16:creationId xmlns:a16="http://schemas.microsoft.com/office/drawing/2014/main" id="{5BC4F618-AA82-4105-A0DD-86A0B96969A4}"/>
               </a:ext>
             </a:extLst>
           </p:cNvPr>
@@ -12502,7 +12451,7 @@
           <p:cNvPr id="39" name="">
             <a:extLst xmlns:a="http://schemas.openxmlformats.org/drawingml/2006/main">
               <a:ext uri="{FF2B5EF4-FFF2-40B4-BE49-F238E27FC236}">
-                <a16:creationId xmlns:a16="http://schemas.microsoft.com/office/drawing/2014/main" id="{B97FF3B6-4D37-4407-971F-E4AF52CFE4E3}"/>
+                <a16:creationId xmlns:a16="http://schemas.microsoft.com/office/drawing/2014/main" id="{7BFFABD7-DA44-43A6-B5ED-B2D9E456BB0C}"/>
               </a:ext>
             </a:extLst>
           </p:cNvPr>
@@ -12533,7 +12482,7 @@
           <p:cNvPr id="40" name="">
             <a:extLst xmlns:a="http://schemas.openxmlformats.org/drawingml/2006/main">
               <a:ext uri="{FF2B5EF4-FFF2-40B4-BE49-F238E27FC236}">
-                <a16:creationId xmlns:a16="http://schemas.microsoft.com/office/drawing/2014/main" id="{6C925862-CACB-40DC-80F3-F331619BB4C0}"/>
+                <a16:creationId xmlns:a16="http://schemas.microsoft.com/office/drawing/2014/main" id="{1E168C19-C512-4145-84D8-281DAE105D13}"/>
               </a:ext>
             </a:extLst>
           </p:cNvPr>
@@ -12590,7 +12539,7 @@
           <p:cNvPr id="41" name="">
             <a:extLst xmlns:a="http://schemas.openxmlformats.org/drawingml/2006/main">
               <a:ext uri="{FF2B5EF4-FFF2-40B4-BE49-F238E27FC236}">
-                <a16:creationId xmlns:a16="http://schemas.microsoft.com/office/drawing/2014/main" id="{8F50CDBF-8D42-4A62-BC08-1D8E490629C7}"/>
+                <a16:creationId xmlns:a16="http://schemas.microsoft.com/office/drawing/2014/main" id="{B32802CE-B980-412C-A7EA-7F93960EC5E3}"/>
               </a:ext>
             </a:extLst>
           </p:cNvPr>
@@ -12621,7 +12570,7 @@
           <p:cNvPr id="42" name="">
             <a:extLst xmlns:a="http://schemas.openxmlformats.org/drawingml/2006/main">
               <a:ext uri="{FF2B5EF4-FFF2-40B4-BE49-F238E27FC236}">
-                <a16:creationId xmlns:a16="http://schemas.microsoft.com/office/drawing/2014/main" id="{B63459A0-0E73-4AD7-9496-15778C5DC841}"/>
+                <a16:creationId xmlns:a16="http://schemas.microsoft.com/office/drawing/2014/main" id="{76CBB806-B1C9-4D1C-A1BA-89E434E27BA2}"/>
               </a:ext>
             </a:extLst>
           </p:cNvPr>
@@ -12679,7 +12628,7 @@
           <p:cNvPr id="43" name="">
             <a:extLst xmlns:a="http://schemas.openxmlformats.org/drawingml/2006/main">
               <a:ext uri="{FF2B5EF4-FFF2-40B4-BE49-F238E27FC236}">
-                <a16:creationId xmlns:a16="http://schemas.microsoft.com/office/drawing/2014/main" id="{D590FBAE-D86D-431E-BAF7-9F563F56BE29}"/>
+                <a16:creationId xmlns:a16="http://schemas.microsoft.com/office/drawing/2014/main" id="{26AB6B92-7F44-4CC7-B4D4-469937EB9967}"/>
               </a:ext>
             </a:extLst>
           </p:cNvPr>
@@ -12736,7 +12685,7 @@
           <p:cNvPr id="44" name="">
             <a:extLst xmlns:a="http://schemas.openxmlformats.org/drawingml/2006/main">
               <a:ext uri="{FF2B5EF4-FFF2-40B4-BE49-F238E27FC236}">
-                <a16:creationId xmlns:a16="http://schemas.microsoft.com/office/drawing/2014/main" id="{F5800CB2-EBE9-4EB9-87C4-BEE6D322E907}"/>
+                <a16:creationId xmlns:a16="http://schemas.microsoft.com/office/drawing/2014/main" id="{C700AABD-0E4A-4F1E-A1C1-10C73FBF77C9}"/>
               </a:ext>
             </a:extLst>
           </p:cNvPr>
@@ -12767,7 +12716,7 @@
           <p:cNvPr id="45" name="">
             <a:extLst xmlns:a="http://schemas.openxmlformats.org/drawingml/2006/main">
               <a:ext uri="{FF2B5EF4-FFF2-40B4-BE49-F238E27FC236}">
-                <a16:creationId xmlns:a16="http://schemas.microsoft.com/office/drawing/2014/main" id="{6507D7A8-3D5A-40B4-82AE-0E270D71DA94}"/>
+                <a16:creationId xmlns:a16="http://schemas.microsoft.com/office/drawing/2014/main" id="{F6D7CCB4-8559-4687-A5D1-4245A8A821D9}"/>
               </a:ext>
             </a:extLst>
           </p:cNvPr>
@@ -12825,7 +12774,7 @@
           <p:cNvPr id="46" name="">
             <a:extLst xmlns:a="http://schemas.openxmlformats.org/drawingml/2006/main">
               <a:ext uri="{FF2B5EF4-FFF2-40B4-BE49-F238E27FC236}">
-                <a16:creationId xmlns:a16="http://schemas.microsoft.com/office/drawing/2014/main" id="{4C8266EB-4AEA-4149-9889-1C81E08D40E8}"/>
+                <a16:creationId xmlns:a16="http://schemas.microsoft.com/office/drawing/2014/main" id="{A1E7D3C2-7499-45DE-906D-2DC6F7AFA137}"/>
               </a:ext>
             </a:extLst>
           </p:cNvPr>
@@ -12882,7 +12831,7 @@
           <p:cNvPr id="47" name="">
             <a:extLst xmlns:a="http://schemas.openxmlformats.org/drawingml/2006/main">
               <a:ext uri="{FF2B5EF4-FFF2-40B4-BE49-F238E27FC236}">
-                <a16:creationId xmlns:a16="http://schemas.microsoft.com/office/drawing/2014/main" id="{368454CC-2842-4EA5-9325-59F2B2AA095D}"/>
+                <a16:creationId xmlns:a16="http://schemas.microsoft.com/office/drawing/2014/main" id="{F7C25319-ED4A-4F84-9D5B-14AC78D84398}"/>
               </a:ext>
             </a:extLst>
           </p:cNvPr>
@@ -12913,7 +12862,7 @@
           <p:cNvPr id="48" name="">
             <a:extLst xmlns:a="http://schemas.openxmlformats.org/drawingml/2006/main">
               <a:ext uri="{FF2B5EF4-FFF2-40B4-BE49-F238E27FC236}">
-                <a16:creationId xmlns:a16="http://schemas.microsoft.com/office/drawing/2014/main" id="{2FFB5E0D-1CD8-4E54-B857-BEB3A56E03F6}"/>
+                <a16:creationId xmlns:a16="http://schemas.microsoft.com/office/drawing/2014/main" id="{08FABF2F-0A89-408A-84EB-B5CDAAE05A49}"/>
               </a:ext>
             </a:extLst>
           </p:cNvPr>
@@ -12971,7 +12920,7 @@
           <p:cNvPr id="49" name="">
             <a:extLst xmlns:a="http://schemas.openxmlformats.org/drawingml/2006/main">
               <a:ext uri="{FF2B5EF4-FFF2-40B4-BE49-F238E27FC236}">
-                <a16:creationId xmlns:a16="http://schemas.microsoft.com/office/drawing/2014/main" id="{7F15CEC6-EC5A-44BD-B93C-23842BDA85CD}"/>
+                <a16:creationId xmlns:a16="http://schemas.microsoft.com/office/drawing/2014/main" id="{F418AF38-ABB7-4CE1-BD48-E195A2A0B323}"/>
               </a:ext>
             </a:extLst>
           </p:cNvPr>
@@ -13028,7 +12977,7 @@
           <p:cNvPr id="50" name="">
             <a:extLst xmlns:a="http://schemas.openxmlformats.org/drawingml/2006/main">
               <a:ext uri="{FF2B5EF4-FFF2-40B4-BE49-F238E27FC236}">
-                <a16:creationId xmlns:a16="http://schemas.microsoft.com/office/drawing/2014/main" id="{D13343C8-F22C-46CB-86EF-AE0F6D4C7675}"/>
+                <a16:creationId xmlns:a16="http://schemas.microsoft.com/office/drawing/2014/main" id="{987B0609-883C-49DA-8F37-7153EC56C64A}"/>
               </a:ext>
             </a:extLst>
           </p:cNvPr>
@@ -13059,7 +13008,7 @@
           <p:cNvPr id="51" name="">
             <a:extLst xmlns:a="http://schemas.openxmlformats.org/drawingml/2006/main">
               <a:ext uri="{FF2B5EF4-FFF2-40B4-BE49-F238E27FC236}">
-                <a16:creationId xmlns:a16="http://schemas.microsoft.com/office/drawing/2014/main" id="{6A123BD2-3818-4D0B-BB44-202AD5B45311}"/>
+                <a16:creationId xmlns:a16="http://schemas.microsoft.com/office/drawing/2014/main" id="{38EBE843-0EF0-429D-A8A2-49D7557A4B7D}"/>
               </a:ext>
             </a:extLst>
           </p:cNvPr>
@@ -13117,7 +13066,7 @@
           <p:cNvPr id="52" name="">
             <a:extLst xmlns:a="http://schemas.openxmlformats.org/drawingml/2006/main">
               <a:ext uri="{FF2B5EF4-FFF2-40B4-BE49-F238E27FC236}">
-                <a16:creationId xmlns:a16="http://schemas.microsoft.com/office/drawing/2014/main" id="{2B6927A3-BEA6-4A07-A8C2-16208D6823A0}"/>
+                <a16:creationId xmlns:a16="http://schemas.microsoft.com/office/drawing/2014/main" id="{264776B5-E24C-448E-AF29-679D6C40B54A}"/>
               </a:ext>
             </a:extLst>
           </p:cNvPr>
@@ -13154,7 +13103,7 @@
           <p:cNvPr id="53" name="">
             <a:extLst xmlns:a="http://schemas.openxmlformats.org/drawingml/2006/main">
               <a:ext uri="{FF2B5EF4-FFF2-40B4-BE49-F238E27FC236}">
-                <a16:creationId xmlns:a16="http://schemas.microsoft.com/office/drawing/2014/main" id="{D675D15E-CD9C-4511-891B-E40EF885CF01}"/>
+                <a16:creationId xmlns:a16="http://schemas.microsoft.com/office/drawing/2014/main" id="{8E191D6A-0AFE-46D2-B6B9-A8E5604F2C4C}"/>
               </a:ext>
             </a:extLst>
           </p:cNvPr>
@@ -13210,7 +13159,7 @@
     </p:spTree>
     <p:extLst>
       <p:ext uri="{BB962C8B-B14F-4D97-AF65-F5344CB8AC3E}">
-        <p14:creationId xmlns:p14="http://schemas.microsoft.com/office/powerpoint/2010/main" val="2134834685"/>
+        <p14:creationId xmlns:p14="http://schemas.microsoft.com/office/powerpoint/2010/main" val="1570406256"/>
       </p:ext>
     </p:extLst>
   </p:cSld>
@@ -13222,17 +13171,9 @@
   <p:cSld>
     <p:bg>
       <p:bgPr>
-        <a:gradFill xmlns:a="http://schemas.openxmlformats.org/drawingml/2006/main">
-          <a:gsLst>
-            <a:gs pos="0">
-              <a:srgbClr val="0A1722"/>
-            </a:gs>
-            <a:gs pos="100000">
-              <a:srgbClr val="153A4C"/>
-            </a:gs>
-          </a:gsLst>
-          <a:lin ang="8100000"/>
-        </a:gradFill>
+        <a:solidFill xmlns:a="http://schemas.openxmlformats.org/drawingml/2006/main">
+          <a:srgbClr val="F3F1EB"/>
+        </a:solidFill>
       </p:bgPr>
     </p:bg>
     <p:spTree>
@@ -13249,7 +13190,7 @@
           <p:cNvPr id="43" name="">
             <a:extLst xmlns:a="http://schemas.openxmlformats.org/drawingml/2006/main">
               <a:ext uri="{FF2B5EF4-FFF2-40B4-BE49-F238E27FC236}">
-                <a16:creationId xmlns:a16="http://schemas.microsoft.com/office/drawing/2014/main" id="{1208A58F-0CD1-465A-833A-89FC99C63754}"/>
+                <a16:creationId xmlns:a16="http://schemas.microsoft.com/office/drawing/2014/main" id="{EDB7D07B-DB33-4735-8FFF-68EEF39189C3}"/>
               </a:ext>
             </a:extLst>
           </p:cNvPr>
@@ -13306,7 +13247,7 @@
           <p:cNvPr id="2" name="">
             <a:extLst xmlns:a="http://schemas.openxmlformats.org/drawingml/2006/main">
               <a:ext uri="{FF2B5EF4-FFF2-40B4-BE49-F238E27FC236}">
-                <a16:creationId xmlns:a16="http://schemas.microsoft.com/office/drawing/2014/main" id="{103D3617-5A50-4933-AF4F-3828F037155E}"/>
+                <a16:creationId xmlns:a16="http://schemas.microsoft.com/office/drawing/2014/main" id="{CF1BAADC-8429-4665-A074-EBA36C538974}"/>
               </a:ext>
             </a:extLst>
           </p:cNvPr>
@@ -13363,7 +13304,7 @@
           <p:cNvPr id="3" name="">
             <a:extLst xmlns:a="http://schemas.openxmlformats.org/drawingml/2006/main">
               <a:ext uri="{FF2B5EF4-FFF2-40B4-BE49-F238E27FC236}">
-                <a16:creationId xmlns:a16="http://schemas.microsoft.com/office/drawing/2014/main" id="{D436B50F-C76B-490D-8835-ABED83F449C8}"/>
+                <a16:creationId xmlns:a16="http://schemas.microsoft.com/office/drawing/2014/main" id="{BE4F14E9-4AC0-4FCC-9016-1C0EE0A86D99}"/>
               </a:ext>
             </a:extLst>
           </p:cNvPr>
@@ -13420,7 +13361,7 @@
           <p:cNvPr id="4" name="">
             <a:extLst xmlns:a="http://schemas.openxmlformats.org/drawingml/2006/main">
               <a:ext uri="{FF2B5EF4-FFF2-40B4-BE49-F238E27FC236}">
-                <a16:creationId xmlns:a16="http://schemas.microsoft.com/office/drawing/2014/main" id="{31D6A584-EE6D-4584-8AC0-712D8E03C81F}"/>
+                <a16:creationId xmlns:a16="http://schemas.microsoft.com/office/drawing/2014/main" id="{3E965749-2CF6-4B19-9289-0F29B083F514}"/>
               </a:ext>
             </a:extLst>
           </p:cNvPr>
@@ -13451,7 +13392,7 @@
           <p:cNvPr id="5" name="">
             <a:extLst xmlns:a="http://schemas.openxmlformats.org/drawingml/2006/main">
               <a:ext uri="{FF2B5EF4-FFF2-40B4-BE49-F238E27FC236}">
-                <a16:creationId xmlns:a16="http://schemas.microsoft.com/office/drawing/2014/main" id="{0D6AD9BC-3FED-43F3-B535-9F35658BAD08}"/>
+                <a16:creationId xmlns:a16="http://schemas.microsoft.com/office/drawing/2014/main" id="{738A0032-8B87-45BF-8EB2-C003BABB56C6}"/>
               </a:ext>
             </a:extLst>
           </p:cNvPr>
@@ -13471,7 +13412,7 @@
           <a:noFill xmlns:a="http://schemas.openxmlformats.org/drawingml/2006/main"/>
           <a:ln xmlns:a="http://schemas.openxmlformats.org/drawingml/2006/main" w="9525">
             <a:solidFill>
-              <a:srgbClr val="2A4D65"/>
+              <a:srgbClr val="C5D4DC"/>
             </a:solidFill>
             <a:prstDash val="solid"/>
           </a:ln>
@@ -13482,7 +13423,7 @@
           <p:cNvPr id="6" name="">
             <a:extLst xmlns:a="http://schemas.openxmlformats.org/drawingml/2006/main">
               <a:ext uri="{FF2B5EF4-FFF2-40B4-BE49-F238E27FC236}">
-                <a16:creationId xmlns:a16="http://schemas.microsoft.com/office/drawing/2014/main" id="{0F7A4A56-C866-4989-B778-0CD722FFED48}"/>
+                <a16:creationId xmlns:a16="http://schemas.microsoft.com/office/drawing/2014/main" id="{D56FB5CF-227A-42D9-B988-5F7F8EEAF690}"/>
               </a:ext>
             </a:extLst>
           </p:cNvPr>
@@ -13539,7 +13480,7 @@
           <p:cNvPr id="7" name="">
             <a:extLst xmlns:a="http://schemas.openxmlformats.org/drawingml/2006/main">
               <a:ext uri="{FF2B5EF4-FFF2-40B4-BE49-F238E27FC236}">
-                <a16:creationId xmlns:a16="http://schemas.microsoft.com/office/drawing/2014/main" id="{192319D2-4EC0-43A2-872F-D797EBE27C1C}"/>
+                <a16:creationId xmlns:a16="http://schemas.microsoft.com/office/drawing/2014/main" id="{87DDB7CC-4C73-40EB-8789-80C0EE078C21}"/>
               </a:ext>
             </a:extLst>
           </p:cNvPr>
@@ -13596,7 +13537,7 @@
           <p:cNvPr id="8" name="">
             <a:extLst xmlns:a="http://schemas.openxmlformats.org/drawingml/2006/main">
               <a:ext uri="{FF2B5EF4-FFF2-40B4-BE49-F238E27FC236}">
-                <a16:creationId xmlns:a16="http://schemas.microsoft.com/office/drawing/2014/main" id="{2239C752-4609-4FD7-B35F-F4FC66A68A94}"/>
+                <a16:creationId xmlns:a16="http://schemas.microsoft.com/office/drawing/2014/main" id="{731915E9-82CD-4B27-A1D6-59D6BBE143A4}"/>
               </a:ext>
             </a:extLst>
           </p:cNvPr>
@@ -13653,7 +13594,7 @@
           <p:cNvPr id="9" name="">
             <a:extLst xmlns:a="http://schemas.openxmlformats.org/drawingml/2006/main">
               <a:ext uri="{FF2B5EF4-FFF2-40B4-BE49-F238E27FC236}">
-                <a16:creationId xmlns:a16="http://schemas.microsoft.com/office/drawing/2014/main" id="{6E53B726-AB64-4B8F-9BA8-5BC2E06CA533}"/>
+                <a16:creationId xmlns:a16="http://schemas.microsoft.com/office/drawing/2014/main" id="{0F620E18-08DB-45D1-8BEF-3A961F14E1E1}"/>
               </a:ext>
             </a:extLst>
           </p:cNvPr>
@@ -13684,7 +13625,7 @@
           <p:cNvPr id="10" name="">
             <a:extLst xmlns:a="http://schemas.openxmlformats.org/drawingml/2006/main">
               <a:ext uri="{FF2B5EF4-FFF2-40B4-BE49-F238E27FC236}">
-                <a16:creationId xmlns:a16="http://schemas.microsoft.com/office/drawing/2014/main" id="{0B2AF899-4111-410F-BA61-AF8C21C5F414}"/>
+                <a16:creationId xmlns:a16="http://schemas.microsoft.com/office/drawing/2014/main" id="{9EE77F44-824D-45E5-965F-0EF8A6C3A53A}"/>
               </a:ext>
             </a:extLst>
           </p:cNvPr>
@@ -13704,7 +13645,7 @@
           <a:noFill xmlns:a="http://schemas.openxmlformats.org/drawingml/2006/main"/>
           <a:ln xmlns:a="http://schemas.openxmlformats.org/drawingml/2006/main" w="9525">
             <a:solidFill>
-              <a:srgbClr val="2A4D65"/>
+              <a:srgbClr val="C5D4DC"/>
             </a:solidFill>
             <a:prstDash val="solid"/>
           </a:ln>
@@ -13715,7 +13656,7 @@
           <p:cNvPr id="11" name="">
             <a:extLst xmlns:a="http://schemas.openxmlformats.org/drawingml/2006/main">
               <a:ext uri="{FF2B5EF4-FFF2-40B4-BE49-F238E27FC236}">
-                <a16:creationId xmlns:a16="http://schemas.microsoft.com/office/drawing/2014/main" id="{25C3445D-A8BF-472B-A5F6-9B2449BBA1D2}"/>
+                <a16:creationId xmlns:a16="http://schemas.microsoft.com/office/drawing/2014/main" id="{2059B7E4-D436-4F49-8EA3-6A637F43DFEE}"/>
               </a:ext>
             </a:extLst>
           </p:cNvPr>
@@ -13773,7 +13714,7 @@
           <p:cNvPr id="12" name="">
             <a:extLst xmlns:a="http://schemas.openxmlformats.org/drawingml/2006/main">
               <a:ext uri="{FF2B5EF4-FFF2-40B4-BE49-F238E27FC236}">
-                <a16:creationId xmlns:a16="http://schemas.microsoft.com/office/drawing/2014/main" id="{82F4AA42-A8DE-48E5-84C2-9189FA312B92}"/>
+                <a16:creationId xmlns:a16="http://schemas.microsoft.com/office/drawing/2014/main" id="{FB9DEB03-D62F-49A6-8826-99FB54DB7157}"/>
               </a:ext>
             </a:extLst>
           </p:cNvPr>
@@ -13805,7 +13746,7 @@
             <a:pPr algn="r">
               <a:defRPr sz="750" b="1">
                 <a:solidFill>
-                  <a:srgbClr val="B8C9D3"/>
+                  <a:srgbClr val="587080"/>
                 </a:solidFill>
                 <a:latin typeface="Arial"/>
                 <a:ea typeface="Arial"/>
@@ -13815,7 +13756,7 @@
             <a:r>
               <a:rPr sz="750" b="1">
                 <a:solidFill>
-                  <a:srgbClr val="B8C9D3"/>
+                  <a:srgbClr val="587080"/>
                 </a:solidFill>
                 <a:latin typeface="Arial"/>
                 <a:ea typeface="Arial"/>
@@ -13831,7 +13772,7 @@
           <p:cNvPr id="13" name="">
             <a:extLst xmlns:a="http://schemas.openxmlformats.org/drawingml/2006/main">
               <a:ext uri="{FF2B5EF4-FFF2-40B4-BE49-F238E27FC236}">
-                <a16:creationId xmlns:a16="http://schemas.microsoft.com/office/drawing/2014/main" id="{02A2C5E1-C267-4FFA-9804-FECA5D0BDAB8}"/>
+                <a16:creationId xmlns:a16="http://schemas.microsoft.com/office/drawing/2014/main" id="{77BA16AD-7C1E-463C-9EB3-5ECEA4DBB8E7}"/>
               </a:ext>
             </a:extLst>
           </p:cNvPr>
@@ -13863,7 +13804,7 @@
             <a:pPr algn="l">
               <a:defRPr sz="600" b="0">
                 <a:solidFill>
-                  <a:srgbClr val="B8C9D3"/>
+                  <a:srgbClr val="587080"/>
                 </a:solidFill>
                 <a:latin typeface="Arial"/>
                 <a:ea typeface="Arial"/>
@@ -13873,7 +13814,7 @@
             <a:r>
               <a:rPr sz="600" b="0">
                 <a:solidFill>
-                  <a:srgbClr val="B8C9D3"/>
+                  <a:srgbClr val="587080"/>
                 </a:solidFill>
                 <a:latin typeface="Arial"/>
                 <a:ea typeface="Arial"/>
@@ -13889,7 +13830,7 @@
           <p:cNvPr id="14" name="">
             <a:extLst xmlns:a="http://schemas.openxmlformats.org/drawingml/2006/main">
               <a:ext uri="{FF2B5EF4-FFF2-40B4-BE49-F238E27FC236}">
-                <a16:creationId xmlns:a16="http://schemas.microsoft.com/office/drawing/2014/main" id="{CBD92121-5E6E-4676-90E3-0F171E570EDC}"/>
+                <a16:creationId xmlns:a16="http://schemas.microsoft.com/office/drawing/2014/main" id="{9F97F6ED-9083-4612-9F10-303AE524FF5C}"/>
               </a:ext>
             </a:extLst>
           </p:cNvPr>
@@ -13921,7 +13862,7 @@
             <a:pPr algn="r">
               <a:defRPr sz="600" b="1">
                 <a:solidFill>
-                  <a:srgbClr val="B8C9D3"/>
+                  <a:srgbClr val="587080"/>
                 </a:solidFill>
                 <a:latin typeface="Arial"/>
                 <a:ea typeface="Arial"/>
@@ -13931,7 +13872,7 @@
             <a:r>
               <a:rPr sz="600" b="1">
                 <a:solidFill>
-                  <a:srgbClr val="B8C9D3"/>
+                  <a:srgbClr val="587080"/>
                 </a:solidFill>
                 <a:latin typeface="Arial"/>
                 <a:ea typeface="Arial"/>
@@ -13947,7 +13888,7 @@
           <p:cNvPr id="15" name="">
             <a:extLst xmlns:a="http://schemas.openxmlformats.org/drawingml/2006/main">
               <a:ext uri="{FF2B5EF4-FFF2-40B4-BE49-F238E27FC236}">
-                <a16:creationId xmlns:a16="http://schemas.microsoft.com/office/drawing/2014/main" id="{C8C710EF-FE62-4572-B2E0-724EEBE586E2}"/>
+                <a16:creationId xmlns:a16="http://schemas.microsoft.com/office/drawing/2014/main" id="{39E350AD-BE0A-41DD-85C4-018CAC07EB49}"/>
               </a:ext>
             </a:extLst>
           </p:cNvPr>
@@ -13979,7 +13920,7 @@
             <a:pPr algn="l">
               <a:defRPr sz="2250" b="0">
                 <a:solidFill>
-                  <a:srgbClr val="00E1C6"/>
+                  <a:srgbClr val="132E41"/>
                 </a:solidFill>
                 <a:latin typeface="Georgia"/>
                 <a:ea typeface="Georgia"/>
@@ -13989,7 +13930,7 @@
             <a:r>
               <a:rPr sz="2250" b="0">
                 <a:solidFill>
-                  <a:srgbClr val="00E1C6"/>
+                  <a:srgbClr val="132E41"/>
                 </a:solidFill>
                 <a:latin typeface="Georgia"/>
                 <a:ea typeface="Georgia"/>
@@ -14005,7 +13946,7 @@
           <p:cNvPr id="16" name="">
             <a:extLst xmlns:a="http://schemas.openxmlformats.org/drawingml/2006/main">
               <a:ext uri="{FF2B5EF4-FFF2-40B4-BE49-F238E27FC236}">
-                <a16:creationId xmlns:a16="http://schemas.microsoft.com/office/drawing/2014/main" id="{3495A05E-FB86-40AD-A515-7A4EE9A05F57}"/>
+                <a16:creationId xmlns:a16="http://schemas.microsoft.com/office/drawing/2014/main" id="{1DAA5926-B033-44F1-87B5-022F45F91BA8}"/>
               </a:ext>
             </a:extLst>
           </p:cNvPr>
@@ -14037,7 +13978,7 @@
             <a:pPr algn="l">
               <a:defRPr sz="1125" b="0">
                 <a:solidFill>
-                  <a:srgbClr val="B8C9D3"/>
+                  <a:srgbClr val="587080"/>
                 </a:solidFill>
                 <a:latin typeface="Arial"/>
                 <a:ea typeface="Arial"/>
@@ -14047,7 +13988,7 @@
             <a:r>
               <a:rPr sz="1125" b="0">
                 <a:solidFill>
-                  <a:srgbClr val="B8C9D3"/>
+                  <a:srgbClr val="587080"/>
                 </a:solidFill>
                 <a:latin typeface="Arial"/>
                 <a:ea typeface="Arial"/>
@@ -14063,7 +14004,7 @@
           <p:cNvPr id="17" name="">
             <a:extLst xmlns:a="http://schemas.openxmlformats.org/drawingml/2006/main">
               <a:ext uri="{FF2B5EF4-FFF2-40B4-BE49-F238E27FC236}">
-                <a16:creationId xmlns:a16="http://schemas.microsoft.com/office/drawing/2014/main" id="{E6BE903B-6A0D-45FA-B584-06C9EDD9553B}"/>
+                <a16:creationId xmlns:a16="http://schemas.microsoft.com/office/drawing/2014/main" id="{2611A7BE-AFB1-40CF-B6BF-4D03334A40A7}"/>
               </a:ext>
             </a:extLst>
           </p:cNvPr>
@@ -14083,7 +14024,7 @@
           <a:noFill xmlns:a="http://schemas.openxmlformats.org/drawingml/2006/main"/>
           <a:ln xmlns:a="http://schemas.openxmlformats.org/drawingml/2006/main" w="28575">
             <a:solidFill>
-              <a:srgbClr val="2A4D65"/>
+              <a:srgbClr val="C5D4DC"/>
             </a:solidFill>
             <a:prstDash val="solid"/>
           </a:ln>
@@ -14094,7 +14035,7 @@
           <p:cNvPr id="18" name="">
             <a:extLst xmlns:a="http://schemas.openxmlformats.org/drawingml/2006/main">
               <a:ext uri="{FF2B5EF4-FFF2-40B4-BE49-F238E27FC236}">
-                <a16:creationId xmlns:a16="http://schemas.microsoft.com/office/drawing/2014/main" id="{89484EDB-FA04-4B5B-9549-F85498AF9EEC}"/>
+                <a16:creationId xmlns:a16="http://schemas.microsoft.com/office/drawing/2014/main" id="{FD86F077-DB6B-4FA6-B430-0ABEFED23439}"/>
               </a:ext>
             </a:extLst>
           </p:cNvPr>
@@ -14151,7 +14092,7 @@
           <p:cNvPr id="19" name="">
             <a:extLst xmlns:a="http://schemas.openxmlformats.org/drawingml/2006/main">
               <a:ext uri="{FF2B5EF4-FFF2-40B4-BE49-F238E27FC236}">
-                <a16:creationId xmlns:a16="http://schemas.microsoft.com/office/drawing/2014/main" id="{9525A2CF-72DF-43A5-A289-897C4A603EF0}"/>
+                <a16:creationId xmlns:a16="http://schemas.microsoft.com/office/drawing/2014/main" id="{F137DFDA-FC05-437F-962C-375E710824D2}"/>
               </a:ext>
             </a:extLst>
           </p:cNvPr>
@@ -14209,7 +14150,7 @@
           <p:cNvPr id="20" name="">
             <a:extLst xmlns:a="http://schemas.openxmlformats.org/drawingml/2006/main">
               <a:ext uri="{FF2B5EF4-FFF2-40B4-BE49-F238E27FC236}">
-                <a16:creationId xmlns:a16="http://schemas.microsoft.com/office/drawing/2014/main" id="{F338AAD8-7FAB-4008-B06A-2E0F38AE0C39}"/>
+                <a16:creationId xmlns:a16="http://schemas.microsoft.com/office/drawing/2014/main" id="{79379DD2-69DD-4A4B-81D8-D4AD94F0BAAD}"/>
               </a:ext>
             </a:extLst>
           </p:cNvPr>
@@ -14241,7 +14182,7 @@
             <a:pPr algn="ctr">
               <a:defRPr sz="975" b="1">
                 <a:solidFill>
-                  <a:srgbClr val="F3F8FA"/>
+                  <a:srgbClr val="132E41"/>
                 </a:solidFill>
                 <a:latin typeface="Arial"/>
                 <a:ea typeface="Arial"/>
@@ -14251,7 +14192,7 @@
             <a:r>
               <a:rPr sz="975" b="1">
                 <a:solidFill>
-                  <a:srgbClr val="F3F8FA"/>
+                  <a:srgbClr val="132E41"/>
                 </a:solidFill>
                 <a:latin typeface="Arial"/>
                 <a:ea typeface="Arial"/>
@@ -14267,7 +14208,7 @@
           <p:cNvPr id="21" name="">
             <a:extLst xmlns:a="http://schemas.openxmlformats.org/drawingml/2006/main">
               <a:ext uri="{FF2B5EF4-FFF2-40B4-BE49-F238E27FC236}">
-                <a16:creationId xmlns:a16="http://schemas.microsoft.com/office/drawing/2014/main" id="{D7E7E0F5-3BB5-447C-8D6F-669B33D86045}"/>
+                <a16:creationId xmlns:a16="http://schemas.microsoft.com/office/drawing/2014/main" id="{8A71595C-E57D-4899-97D5-1DA2623998FA}"/>
               </a:ext>
             </a:extLst>
           </p:cNvPr>
@@ -14299,7 +14240,7 @@
             <a:pPr algn="ctr">
               <a:defRPr sz="825" b="0">
                 <a:solidFill>
-                  <a:srgbClr val="B8C9D3"/>
+                  <a:srgbClr val="587080"/>
                 </a:solidFill>
                 <a:latin typeface="Arial"/>
                 <a:ea typeface="Arial"/>
@@ -14309,7 +14250,7 @@
             <a:r>
               <a:rPr sz="825" b="0">
                 <a:solidFill>
-                  <a:srgbClr val="B8C9D3"/>
+                  <a:srgbClr val="587080"/>
                 </a:solidFill>
                 <a:latin typeface="Arial"/>
                 <a:ea typeface="Arial"/>
@@ -14325,7 +14266,7 @@
           <p:cNvPr id="22" name="">
             <a:extLst xmlns:a="http://schemas.openxmlformats.org/drawingml/2006/main">
               <a:ext uri="{FF2B5EF4-FFF2-40B4-BE49-F238E27FC236}">
-                <a16:creationId xmlns:a16="http://schemas.microsoft.com/office/drawing/2014/main" id="{BC6995CB-C6BA-4E67-9F28-8FBE9A640142}"/>
+                <a16:creationId xmlns:a16="http://schemas.microsoft.com/office/drawing/2014/main" id="{19864F64-4149-4F2B-BCBD-68D9E70DE618}"/>
               </a:ext>
             </a:extLst>
           </p:cNvPr>
@@ -14345,7 +14286,7 @@
           <a:noFill xmlns:a="http://schemas.openxmlformats.org/drawingml/2006/main"/>
           <a:ln xmlns:a="http://schemas.openxmlformats.org/drawingml/2006/main" w="28575">
             <a:solidFill>
-              <a:srgbClr val="2A4D65"/>
+              <a:srgbClr val="C5D4DC"/>
             </a:solidFill>
             <a:prstDash val="solid"/>
           </a:ln>
@@ -14356,7 +14297,7 @@
           <p:cNvPr id="23" name="">
             <a:extLst xmlns:a="http://schemas.openxmlformats.org/drawingml/2006/main">
               <a:ext uri="{FF2B5EF4-FFF2-40B4-BE49-F238E27FC236}">
-                <a16:creationId xmlns:a16="http://schemas.microsoft.com/office/drawing/2014/main" id="{6EEF4D74-4155-46EE-9F2E-EF9D83CB906E}"/>
+                <a16:creationId xmlns:a16="http://schemas.microsoft.com/office/drawing/2014/main" id="{A4069148-5A29-4076-961D-7ECACC99E6CD}"/>
               </a:ext>
             </a:extLst>
           </p:cNvPr>
@@ -14413,7 +14354,7 @@
           <p:cNvPr id="24" name="">
             <a:extLst xmlns:a="http://schemas.openxmlformats.org/drawingml/2006/main">
               <a:ext uri="{FF2B5EF4-FFF2-40B4-BE49-F238E27FC236}">
-                <a16:creationId xmlns:a16="http://schemas.microsoft.com/office/drawing/2014/main" id="{5A64F6F2-675A-4A6A-A28B-B8E54A079679}"/>
+                <a16:creationId xmlns:a16="http://schemas.microsoft.com/office/drawing/2014/main" id="{F2322B2B-366F-4809-B350-CBCE180BCEEF}"/>
               </a:ext>
             </a:extLst>
           </p:cNvPr>
@@ -14471,7 +14412,7 @@
           <p:cNvPr id="25" name="">
             <a:extLst xmlns:a="http://schemas.openxmlformats.org/drawingml/2006/main">
               <a:ext uri="{FF2B5EF4-FFF2-40B4-BE49-F238E27FC236}">
-                <a16:creationId xmlns:a16="http://schemas.microsoft.com/office/drawing/2014/main" id="{75E4E134-D727-4FF4-8E6D-DEDEC7EC1F29}"/>
+                <a16:creationId xmlns:a16="http://schemas.microsoft.com/office/drawing/2014/main" id="{91D9ED45-7967-4C98-A31B-E3972182FE74}"/>
               </a:ext>
             </a:extLst>
           </p:cNvPr>
@@ -14503,7 +14444,7 @@
             <a:pPr algn="ctr">
               <a:defRPr sz="975" b="1">
                 <a:solidFill>
-                  <a:srgbClr val="F3F8FA"/>
+                  <a:srgbClr val="132E41"/>
                 </a:solidFill>
                 <a:latin typeface="Arial"/>
                 <a:ea typeface="Arial"/>
@@ -14513,7 +14454,7 @@
             <a:r>
               <a:rPr sz="975" b="1">
                 <a:solidFill>
-                  <a:srgbClr val="F3F8FA"/>
+                  <a:srgbClr val="132E41"/>
                 </a:solidFill>
                 <a:latin typeface="Arial"/>
                 <a:ea typeface="Arial"/>
@@ -14529,7 +14470,7 @@
           <p:cNvPr id="26" name="">
             <a:extLst xmlns:a="http://schemas.openxmlformats.org/drawingml/2006/main">
               <a:ext uri="{FF2B5EF4-FFF2-40B4-BE49-F238E27FC236}">
-                <a16:creationId xmlns:a16="http://schemas.microsoft.com/office/drawing/2014/main" id="{1C6DF7BF-C0A6-425A-9F04-D392931ED947}"/>
+                <a16:creationId xmlns:a16="http://schemas.microsoft.com/office/drawing/2014/main" id="{F5CD25D2-EE79-4E4B-98F5-D246592B11F7}"/>
               </a:ext>
             </a:extLst>
           </p:cNvPr>
@@ -14561,7 +14502,7 @@
             <a:pPr algn="ctr">
               <a:defRPr sz="825" b="0">
                 <a:solidFill>
-                  <a:srgbClr val="B8C9D3"/>
+                  <a:srgbClr val="587080"/>
                 </a:solidFill>
                 <a:latin typeface="Arial"/>
                 <a:ea typeface="Arial"/>
@@ -14571,7 +14512,7 @@
             <a:r>
               <a:rPr sz="825" b="0">
                 <a:solidFill>
-                  <a:srgbClr val="B8C9D3"/>
+                  <a:srgbClr val="587080"/>
                 </a:solidFill>
                 <a:latin typeface="Arial"/>
                 <a:ea typeface="Arial"/>
@@ -14587,7 +14528,7 @@
           <p:cNvPr id="27" name="">
             <a:extLst xmlns:a="http://schemas.openxmlformats.org/drawingml/2006/main">
               <a:ext uri="{FF2B5EF4-FFF2-40B4-BE49-F238E27FC236}">
-                <a16:creationId xmlns:a16="http://schemas.microsoft.com/office/drawing/2014/main" id="{9D8B62A5-BAD3-4CD9-B653-2312034169A5}"/>
+                <a16:creationId xmlns:a16="http://schemas.microsoft.com/office/drawing/2014/main" id="{FA597A40-7044-4EFA-8C12-46EEEAAEDEF3}"/>
               </a:ext>
             </a:extLst>
           </p:cNvPr>
@@ -14607,7 +14548,7 @@
           <a:noFill xmlns:a="http://schemas.openxmlformats.org/drawingml/2006/main"/>
           <a:ln xmlns:a="http://schemas.openxmlformats.org/drawingml/2006/main" w="28575">
             <a:solidFill>
-              <a:srgbClr val="2A4D65"/>
+              <a:srgbClr val="C5D4DC"/>
             </a:solidFill>
             <a:prstDash val="solid"/>
           </a:ln>
@@ -14618,7 +14559,7 @@
           <p:cNvPr id="28" name="">
             <a:extLst xmlns:a="http://schemas.openxmlformats.org/drawingml/2006/main">
               <a:ext uri="{FF2B5EF4-FFF2-40B4-BE49-F238E27FC236}">
-                <a16:creationId xmlns:a16="http://schemas.microsoft.com/office/drawing/2014/main" id="{8C459CFA-BD1C-439E-AC17-26EE9B3CA366}"/>
+                <a16:creationId xmlns:a16="http://schemas.microsoft.com/office/drawing/2014/main" id="{A7C38090-BFC2-4A7D-8B34-A510E966D953}"/>
               </a:ext>
             </a:extLst>
           </p:cNvPr>
@@ -14675,7 +14616,7 @@
           <p:cNvPr id="29" name="">
             <a:extLst xmlns:a="http://schemas.openxmlformats.org/drawingml/2006/main">
               <a:ext uri="{FF2B5EF4-FFF2-40B4-BE49-F238E27FC236}">
-                <a16:creationId xmlns:a16="http://schemas.microsoft.com/office/drawing/2014/main" id="{16EA3B84-92C1-4C72-B279-D2282C2F0891}"/>
+                <a16:creationId xmlns:a16="http://schemas.microsoft.com/office/drawing/2014/main" id="{5653CB79-546E-4DAE-84E7-461D5C3CD4AE}"/>
               </a:ext>
             </a:extLst>
           </p:cNvPr>
@@ -14733,7 +14674,7 @@
           <p:cNvPr id="30" name="">
             <a:extLst xmlns:a="http://schemas.openxmlformats.org/drawingml/2006/main">
               <a:ext uri="{FF2B5EF4-FFF2-40B4-BE49-F238E27FC236}">
-                <a16:creationId xmlns:a16="http://schemas.microsoft.com/office/drawing/2014/main" id="{278C78C6-EB9D-437F-8D5C-BA4FB0BB7201}"/>
+                <a16:creationId xmlns:a16="http://schemas.microsoft.com/office/drawing/2014/main" id="{B758D8B0-56B9-4914-9602-A04D2E3A446A}"/>
               </a:ext>
             </a:extLst>
           </p:cNvPr>
@@ -14765,7 +14706,7 @@
             <a:pPr algn="ctr">
               <a:defRPr sz="975" b="1">
                 <a:solidFill>
-                  <a:srgbClr val="F3F8FA"/>
+                  <a:srgbClr val="132E41"/>
                 </a:solidFill>
                 <a:latin typeface="Arial"/>
                 <a:ea typeface="Arial"/>
@@ -14775,7 +14716,7 @@
             <a:r>
               <a:rPr sz="975" b="1">
                 <a:solidFill>
-                  <a:srgbClr val="F3F8FA"/>
+                  <a:srgbClr val="132E41"/>
                 </a:solidFill>
                 <a:latin typeface="Arial"/>
                 <a:ea typeface="Arial"/>
@@ -14791,7 +14732,7 @@
           <p:cNvPr id="31" name="">
             <a:extLst xmlns:a="http://schemas.openxmlformats.org/drawingml/2006/main">
               <a:ext uri="{FF2B5EF4-FFF2-40B4-BE49-F238E27FC236}">
-                <a16:creationId xmlns:a16="http://schemas.microsoft.com/office/drawing/2014/main" id="{ED116BA8-63F9-45D3-ADD4-15B84EC57899}"/>
+                <a16:creationId xmlns:a16="http://schemas.microsoft.com/office/drawing/2014/main" id="{95D87AF6-38D5-418C-A9B4-F43A3A94768A}"/>
               </a:ext>
             </a:extLst>
           </p:cNvPr>
@@ -14823,7 +14764,7 @@
             <a:pPr algn="ctr">
               <a:defRPr sz="825" b="0">
                 <a:solidFill>
-                  <a:srgbClr val="B8C9D3"/>
+                  <a:srgbClr val="587080"/>
                 </a:solidFill>
                 <a:latin typeface="Arial"/>
                 <a:ea typeface="Arial"/>
@@ -14833,7 +14774,7 @@
             <a:r>
               <a:rPr sz="825" b="0">
                 <a:solidFill>
-                  <a:srgbClr val="B8C9D3"/>
+                  <a:srgbClr val="587080"/>
                 </a:solidFill>
                 <a:latin typeface="Arial"/>
                 <a:ea typeface="Arial"/>
@@ -14849,7 +14790,7 @@
           <p:cNvPr id="32" name="">
             <a:extLst xmlns:a="http://schemas.openxmlformats.org/drawingml/2006/main">
               <a:ext uri="{FF2B5EF4-FFF2-40B4-BE49-F238E27FC236}">
-                <a16:creationId xmlns:a16="http://schemas.microsoft.com/office/drawing/2014/main" id="{8AB602E3-804A-4775-BB41-C31BA42618AC}"/>
+                <a16:creationId xmlns:a16="http://schemas.microsoft.com/office/drawing/2014/main" id="{D217743F-674F-4151-9482-033CFE20DA1A}"/>
               </a:ext>
             </a:extLst>
           </p:cNvPr>
@@ -14869,7 +14810,7 @@
           <a:noFill xmlns:a="http://schemas.openxmlformats.org/drawingml/2006/main"/>
           <a:ln xmlns:a="http://schemas.openxmlformats.org/drawingml/2006/main" w="28575">
             <a:solidFill>
-              <a:srgbClr val="2A4D65"/>
+              <a:srgbClr val="C5D4DC"/>
             </a:solidFill>
             <a:prstDash val="solid"/>
           </a:ln>
@@ -14880,7 +14821,7 @@
           <p:cNvPr id="33" name="">
             <a:extLst xmlns:a="http://schemas.openxmlformats.org/drawingml/2006/main">
               <a:ext uri="{FF2B5EF4-FFF2-40B4-BE49-F238E27FC236}">
-                <a16:creationId xmlns:a16="http://schemas.microsoft.com/office/drawing/2014/main" id="{3F21C452-E788-436F-93C9-606B265E6BE5}"/>
+                <a16:creationId xmlns:a16="http://schemas.microsoft.com/office/drawing/2014/main" id="{A60AAD06-C37B-4854-A2D8-4905F71BCD50}"/>
               </a:ext>
             </a:extLst>
           </p:cNvPr>
@@ -14937,7 +14878,7 @@
           <p:cNvPr id="34" name="">
             <a:extLst xmlns:a="http://schemas.openxmlformats.org/drawingml/2006/main">
               <a:ext uri="{FF2B5EF4-FFF2-40B4-BE49-F238E27FC236}">
-                <a16:creationId xmlns:a16="http://schemas.microsoft.com/office/drawing/2014/main" id="{B8B44CF1-6960-4B46-8BED-19A34BBCC74F}"/>
+                <a16:creationId xmlns:a16="http://schemas.microsoft.com/office/drawing/2014/main" id="{2205BCAF-BCDC-4A96-B85B-A084DF79C13F}"/>
               </a:ext>
             </a:extLst>
           </p:cNvPr>
@@ -14995,7 +14936,7 @@
           <p:cNvPr id="35" name="">
             <a:extLst xmlns:a="http://schemas.openxmlformats.org/drawingml/2006/main">
               <a:ext uri="{FF2B5EF4-FFF2-40B4-BE49-F238E27FC236}">
-                <a16:creationId xmlns:a16="http://schemas.microsoft.com/office/drawing/2014/main" id="{56997677-DA25-4118-B1E9-830830EE3C09}"/>
+                <a16:creationId xmlns:a16="http://schemas.microsoft.com/office/drawing/2014/main" id="{85187E23-3FC3-4152-BB52-7AB8F162563B}"/>
               </a:ext>
             </a:extLst>
           </p:cNvPr>
@@ -15027,7 +14968,7 @@
             <a:pPr algn="ctr">
               <a:defRPr sz="975" b="1">
                 <a:solidFill>
-                  <a:srgbClr val="F3F8FA"/>
+                  <a:srgbClr val="132E41"/>
                 </a:solidFill>
                 <a:latin typeface="Arial"/>
                 <a:ea typeface="Arial"/>
@@ -15037,7 +14978,7 @@
             <a:r>
               <a:rPr sz="975" b="1">
                 <a:solidFill>
-                  <a:srgbClr val="F3F8FA"/>
+                  <a:srgbClr val="132E41"/>
                 </a:solidFill>
                 <a:latin typeface="Arial"/>
                 <a:ea typeface="Arial"/>
@@ -15053,7 +14994,7 @@
           <p:cNvPr id="36" name="">
             <a:extLst xmlns:a="http://schemas.openxmlformats.org/drawingml/2006/main">
               <a:ext uri="{FF2B5EF4-FFF2-40B4-BE49-F238E27FC236}">
-                <a16:creationId xmlns:a16="http://schemas.microsoft.com/office/drawing/2014/main" id="{451AF4EF-CD7B-41EF-ACEB-0B284D204949}"/>
+                <a16:creationId xmlns:a16="http://schemas.microsoft.com/office/drawing/2014/main" id="{312E3F07-0220-44F4-B172-19AE62518126}"/>
               </a:ext>
             </a:extLst>
           </p:cNvPr>
@@ -15085,7 +15026,7 @@
             <a:pPr algn="ctr">
               <a:defRPr sz="825" b="0">
                 <a:solidFill>
-                  <a:srgbClr val="B8C9D3"/>
+                  <a:srgbClr val="587080"/>
                 </a:solidFill>
                 <a:latin typeface="Arial"/>
                 <a:ea typeface="Arial"/>
@@ -15095,7 +15036,7 @@
             <a:r>
               <a:rPr sz="825" b="0">
                 <a:solidFill>
-                  <a:srgbClr val="B8C9D3"/>
+                  <a:srgbClr val="587080"/>
                 </a:solidFill>
                 <a:latin typeface="Arial"/>
                 <a:ea typeface="Arial"/>
@@ -15111,7 +15052,7 @@
           <p:cNvPr id="37" name="">
             <a:extLst xmlns:a="http://schemas.openxmlformats.org/drawingml/2006/main">
               <a:ext uri="{FF2B5EF4-FFF2-40B4-BE49-F238E27FC236}">
-                <a16:creationId xmlns:a16="http://schemas.microsoft.com/office/drawing/2014/main" id="{86A53019-80CD-46A7-A03F-0B75CFB83F42}"/>
+                <a16:creationId xmlns:a16="http://schemas.microsoft.com/office/drawing/2014/main" id="{BBD79751-98F1-4225-8E7D-C5127C93AD3E}"/>
               </a:ext>
             </a:extLst>
           </p:cNvPr>
@@ -15168,7 +15109,7 @@
           <p:cNvPr id="38" name="">
             <a:extLst xmlns:a="http://schemas.openxmlformats.org/drawingml/2006/main">
               <a:ext uri="{FF2B5EF4-FFF2-40B4-BE49-F238E27FC236}">
-                <a16:creationId xmlns:a16="http://schemas.microsoft.com/office/drawing/2014/main" id="{965AF535-AFA8-4F10-8167-A31971F89CFA}"/>
+                <a16:creationId xmlns:a16="http://schemas.microsoft.com/office/drawing/2014/main" id="{3EE97D93-0067-4043-8C78-BEA48A4A80A0}"/>
               </a:ext>
             </a:extLst>
           </p:cNvPr>
@@ -15226,7 +15167,7 @@
           <p:cNvPr id="39" name="">
             <a:extLst xmlns:a="http://schemas.openxmlformats.org/drawingml/2006/main">
               <a:ext uri="{FF2B5EF4-FFF2-40B4-BE49-F238E27FC236}">
-                <a16:creationId xmlns:a16="http://schemas.microsoft.com/office/drawing/2014/main" id="{7DCCFD32-B1E3-47C1-A246-FB54AA123052}"/>
+                <a16:creationId xmlns:a16="http://schemas.microsoft.com/office/drawing/2014/main" id="{94FB0BF8-4360-4735-B88E-D9058768A776}"/>
               </a:ext>
             </a:extLst>
           </p:cNvPr>
@@ -15258,7 +15199,7 @@
             <a:pPr algn="ctr">
               <a:defRPr sz="975" b="1">
                 <a:solidFill>
-                  <a:srgbClr val="F3F8FA"/>
+                  <a:srgbClr val="132E41"/>
                 </a:solidFill>
                 <a:latin typeface="Arial"/>
                 <a:ea typeface="Arial"/>
@@ -15268,7 +15209,7 @@
             <a:r>
               <a:rPr sz="975" b="1">
                 <a:solidFill>
-                  <a:srgbClr val="F3F8FA"/>
+                  <a:srgbClr val="132E41"/>
                 </a:solidFill>
                 <a:latin typeface="Arial"/>
                 <a:ea typeface="Arial"/>
@@ -15284,7 +15225,7 @@
           <p:cNvPr id="40" name="">
             <a:extLst xmlns:a="http://schemas.openxmlformats.org/drawingml/2006/main">
               <a:ext uri="{FF2B5EF4-FFF2-40B4-BE49-F238E27FC236}">
-                <a16:creationId xmlns:a16="http://schemas.microsoft.com/office/drawing/2014/main" id="{6D6DED46-8584-4763-B215-EC2F078BB59C}"/>
+                <a16:creationId xmlns:a16="http://schemas.microsoft.com/office/drawing/2014/main" id="{41C3E31C-271D-444C-872C-729EBB6C7265}"/>
               </a:ext>
             </a:extLst>
           </p:cNvPr>
@@ -15316,7 +15257,7 @@
             <a:pPr algn="ctr">
               <a:defRPr sz="825" b="0">
                 <a:solidFill>
-                  <a:srgbClr val="B8C9D3"/>
+                  <a:srgbClr val="587080"/>
                 </a:solidFill>
                 <a:latin typeface="Arial"/>
                 <a:ea typeface="Arial"/>
@@ -15326,7 +15267,7 @@
             <a:r>
               <a:rPr sz="825" b="0">
                 <a:solidFill>
-                  <a:srgbClr val="B8C9D3"/>
+                  <a:srgbClr val="587080"/>
                 </a:solidFill>
                 <a:latin typeface="Arial"/>
                 <a:ea typeface="Arial"/>
@@ -15342,7 +15283,7 @@
           <p:cNvPr id="41" name="">
             <a:extLst xmlns:a="http://schemas.openxmlformats.org/drawingml/2006/main">
               <a:ext uri="{FF2B5EF4-FFF2-40B4-BE49-F238E27FC236}">
-                <a16:creationId xmlns:a16="http://schemas.microsoft.com/office/drawing/2014/main" id="{45F70117-322F-4B86-AAA7-68BDC4671F04}"/>
+                <a16:creationId xmlns:a16="http://schemas.microsoft.com/office/drawing/2014/main" id="{9B2F907E-A9FF-4CB0-97A8-5AC3DEC58DC8}"/>
               </a:ext>
             </a:extLst>
           </p:cNvPr>
@@ -15362,11 +15303,11 @@
             </a:avLst>
           </a:prstGeom>
           <a:solidFill xmlns:a="http://schemas.openxmlformats.org/drawingml/2006/main">
-            <a:srgbClr val="102F46"/>
+            <a:srgbClr val="FFFFFF"/>
           </a:solidFill>
           <a:ln xmlns:a="http://schemas.openxmlformats.org/drawingml/2006/main" w="9525">
             <a:solidFill>
-              <a:srgbClr val="2A4D65"/>
+              <a:srgbClr val="C5D4DC"/>
             </a:solidFill>
             <a:prstDash val="solid"/>
           </a:ln>
@@ -15377,7 +15318,7 @@
           <p:cNvPr id="42" name="">
             <a:extLst xmlns:a="http://schemas.openxmlformats.org/drawingml/2006/main">
               <a:ext uri="{FF2B5EF4-FFF2-40B4-BE49-F238E27FC236}">
-                <a16:creationId xmlns:a16="http://schemas.microsoft.com/office/drawing/2014/main" id="{12203B97-DB2E-4D66-8A74-8C0E10043CCC}"/>
+                <a16:creationId xmlns:a16="http://schemas.microsoft.com/office/drawing/2014/main" id="{4C0DAE53-F2BD-44AF-8144-CD80B7038CAA}"/>
               </a:ext>
             </a:extLst>
           </p:cNvPr>
@@ -15433,7 +15374,7 @@
     </p:spTree>
     <p:extLst>
       <p:ext uri="{BB962C8B-B14F-4D97-AF65-F5344CB8AC3E}">
-        <p14:creationId xmlns:p14="http://schemas.microsoft.com/office/powerpoint/2010/main" val="1797468070"/>
+        <p14:creationId xmlns:p14="http://schemas.microsoft.com/office/powerpoint/2010/main" val="152405535"/>
       </p:ext>
     </p:extLst>
   </p:cSld>
@@ -15445,17 +15386,9 @@
   <p:cSld>
     <p:bg>
       <p:bgPr>
-        <a:gradFill xmlns:a="http://schemas.openxmlformats.org/drawingml/2006/main">
-          <a:gsLst>
-            <a:gs pos="0">
-              <a:srgbClr val="F7F9FA"/>
-            </a:gs>
-            <a:gs pos="100000">
-              <a:srgbClr val="EAF0F3"/>
-            </a:gs>
-          </a:gsLst>
-          <a:lin ang="8100000"/>
-        </a:gradFill>
+        <a:solidFill xmlns:a="http://schemas.openxmlformats.org/drawingml/2006/main">
+          <a:srgbClr val="F3F1EB"/>
+        </a:solidFill>
       </p:bgPr>
     </p:bg>
     <p:spTree>
@@ -15472,7 +15405,7 @@
           <p:cNvPr id="32" name="">
             <a:extLst xmlns:a="http://schemas.openxmlformats.org/drawingml/2006/main">
               <a:ext uri="{FF2B5EF4-FFF2-40B4-BE49-F238E27FC236}">
-                <a16:creationId xmlns:a16="http://schemas.microsoft.com/office/drawing/2014/main" id="{E88BF25A-90C1-4722-87C8-E2BCDC79FD37}"/>
+                <a16:creationId xmlns:a16="http://schemas.microsoft.com/office/drawing/2014/main" id="{DD403E46-D9FB-4B99-A7E3-83C9FEE0EB37}"/>
               </a:ext>
             </a:extLst>
           </p:cNvPr>
@@ -15529,7 +15462,7 @@
           <p:cNvPr id="2" name="">
             <a:extLst xmlns:a="http://schemas.openxmlformats.org/drawingml/2006/main">
               <a:ext uri="{FF2B5EF4-FFF2-40B4-BE49-F238E27FC236}">
-                <a16:creationId xmlns:a16="http://schemas.microsoft.com/office/drawing/2014/main" id="{51799889-63F0-4EDC-8ED8-D05701ADC108}"/>
+                <a16:creationId xmlns:a16="http://schemas.microsoft.com/office/drawing/2014/main" id="{768A5316-A184-41FB-90EB-AAD32B8A2EFD}"/>
               </a:ext>
             </a:extLst>
           </p:cNvPr>
@@ -15586,7 +15519,7 @@
           <p:cNvPr id="3" name="">
             <a:extLst xmlns:a="http://schemas.openxmlformats.org/drawingml/2006/main">
               <a:ext uri="{FF2B5EF4-FFF2-40B4-BE49-F238E27FC236}">
-                <a16:creationId xmlns:a16="http://schemas.microsoft.com/office/drawing/2014/main" id="{A39821B4-3895-40B1-9E2A-2AAA44D2ED47}"/>
+                <a16:creationId xmlns:a16="http://schemas.microsoft.com/office/drawing/2014/main" id="{7EF87CE7-33AC-4D1F-B892-B47F21501FFE}"/>
               </a:ext>
             </a:extLst>
           </p:cNvPr>
@@ -15643,7 +15576,7 @@
           <p:cNvPr id="4" name="">
             <a:extLst xmlns:a="http://schemas.openxmlformats.org/drawingml/2006/main">
               <a:ext uri="{FF2B5EF4-FFF2-40B4-BE49-F238E27FC236}">
-                <a16:creationId xmlns:a16="http://schemas.microsoft.com/office/drawing/2014/main" id="{E32C2488-04A3-4D8E-A9EA-604D950DF7A2}"/>
+                <a16:creationId xmlns:a16="http://schemas.microsoft.com/office/drawing/2014/main" id="{E9B04468-5CF7-4CCE-8342-B3A25DE53309}"/>
               </a:ext>
             </a:extLst>
           </p:cNvPr>
@@ -15674,7 +15607,7 @@
           <p:cNvPr id="5" name="">
             <a:extLst xmlns:a="http://schemas.openxmlformats.org/drawingml/2006/main">
               <a:ext uri="{FF2B5EF4-FFF2-40B4-BE49-F238E27FC236}">
-                <a16:creationId xmlns:a16="http://schemas.microsoft.com/office/drawing/2014/main" id="{736FA3FA-75B2-49F0-B50E-A92D74C07F61}"/>
+                <a16:creationId xmlns:a16="http://schemas.microsoft.com/office/drawing/2014/main" id="{B2873ACA-74E1-4665-87E3-03C4F15ECF07}"/>
               </a:ext>
             </a:extLst>
           </p:cNvPr>
@@ -15705,7 +15638,7 @@
           <p:cNvPr id="6" name="">
             <a:extLst xmlns:a="http://schemas.openxmlformats.org/drawingml/2006/main">
               <a:ext uri="{FF2B5EF4-FFF2-40B4-BE49-F238E27FC236}">
-                <a16:creationId xmlns:a16="http://schemas.microsoft.com/office/drawing/2014/main" id="{5F7CB08E-8677-49A9-AF3A-111B3889C188}"/>
+                <a16:creationId xmlns:a16="http://schemas.microsoft.com/office/drawing/2014/main" id="{188C7FE1-4F6C-4FBE-BB09-0A40ACFA0733}"/>
               </a:ext>
             </a:extLst>
           </p:cNvPr>
@@ -15762,7 +15695,7 @@
           <p:cNvPr id="7" name="">
             <a:extLst xmlns:a="http://schemas.openxmlformats.org/drawingml/2006/main">
               <a:ext uri="{FF2B5EF4-FFF2-40B4-BE49-F238E27FC236}">
-                <a16:creationId xmlns:a16="http://schemas.microsoft.com/office/drawing/2014/main" id="{1E1086CB-EF07-4CAF-B8E3-161FA594B342}"/>
+                <a16:creationId xmlns:a16="http://schemas.microsoft.com/office/drawing/2014/main" id="{194A1A45-8AF9-419B-A306-9ECC7E50576A}"/>
               </a:ext>
             </a:extLst>
           </p:cNvPr>
@@ -15819,7 +15752,7 @@
           <p:cNvPr id="8" name="">
             <a:extLst xmlns:a="http://schemas.openxmlformats.org/drawingml/2006/main">
               <a:ext uri="{FF2B5EF4-FFF2-40B4-BE49-F238E27FC236}">
-                <a16:creationId xmlns:a16="http://schemas.microsoft.com/office/drawing/2014/main" id="{32E7B9FE-7CA2-4171-A13E-4A699C4032D7}"/>
+                <a16:creationId xmlns:a16="http://schemas.microsoft.com/office/drawing/2014/main" id="{406B4856-2566-4587-9188-F02586B3116D}"/>
               </a:ext>
             </a:extLst>
           </p:cNvPr>
@@ -15876,7 +15809,7 @@
           <p:cNvPr id="9" name="">
             <a:extLst xmlns:a="http://schemas.openxmlformats.org/drawingml/2006/main">
               <a:ext uri="{FF2B5EF4-FFF2-40B4-BE49-F238E27FC236}">
-                <a16:creationId xmlns:a16="http://schemas.microsoft.com/office/drawing/2014/main" id="{002973FD-8EAE-4EF3-B83A-11CCBB92521B}"/>
+                <a16:creationId xmlns:a16="http://schemas.microsoft.com/office/drawing/2014/main" id="{AE85615B-48C2-49B9-A10D-64FBA2342834}"/>
               </a:ext>
             </a:extLst>
           </p:cNvPr>
@@ -15907,7 +15840,7 @@
           <p:cNvPr id="10" name="">
             <a:extLst xmlns:a="http://schemas.openxmlformats.org/drawingml/2006/main">
               <a:ext uri="{FF2B5EF4-FFF2-40B4-BE49-F238E27FC236}">
-                <a16:creationId xmlns:a16="http://schemas.microsoft.com/office/drawing/2014/main" id="{B296A4AB-618C-4FD4-AE48-1CADAED3BEEC}"/>
+                <a16:creationId xmlns:a16="http://schemas.microsoft.com/office/drawing/2014/main" id="{AF654038-503C-4BB9-8FC8-4C9EBDA7638F}"/>
               </a:ext>
             </a:extLst>
           </p:cNvPr>
@@ -15938,7 +15871,7 @@
           <p:cNvPr id="11" name="">
             <a:extLst xmlns:a="http://schemas.openxmlformats.org/drawingml/2006/main">
               <a:ext uri="{FF2B5EF4-FFF2-40B4-BE49-F238E27FC236}">
-                <a16:creationId xmlns:a16="http://schemas.microsoft.com/office/drawing/2014/main" id="{55EDAE88-0E51-4889-929C-01120786E5A3}"/>
+                <a16:creationId xmlns:a16="http://schemas.microsoft.com/office/drawing/2014/main" id="{3677CD73-5D52-4305-B0C1-F91A02C4E8D6}"/>
               </a:ext>
             </a:extLst>
           </p:cNvPr>
@@ -15996,7 +15929,7 @@
           <p:cNvPr id="12" name="">
             <a:extLst xmlns:a="http://schemas.openxmlformats.org/drawingml/2006/main">
               <a:ext uri="{FF2B5EF4-FFF2-40B4-BE49-F238E27FC236}">
-                <a16:creationId xmlns:a16="http://schemas.microsoft.com/office/drawing/2014/main" id="{F5DAE22F-2682-4A32-83B7-755BB3281DF7}"/>
+                <a16:creationId xmlns:a16="http://schemas.microsoft.com/office/drawing/2014/main" id="{09C3D771-AC87-4E79-A877-8FC0DD9335E7}"/>
               </a:ext>
             </a:extLst>
           </p:cNvPr>
@@ -16054,7 +15987,7 @@
           <p:cNvPr id="13" name="">
             <a:extLst xmlns:a="http://schemas.openxmlformats.org/drawingml/2006/main">
               <a:ext uri="{FF2B5EF4-FFF2-40B4-BE49-F238E27FC236}">
-                <a16:creationId xmlns:a16="http://schemas.microsoft.com/office/drawing/2014/main" id="{5E399285-F1FA-456D-B7F0-8313CC42B7ED}"/>
+                <a16:creationId xmlns:a16="http://schemas.microsoft.com/office/drawing/2014/main" id="{F38FC9D6-2FE4-439E-9572-5CBEC33D7C77}"/>
               </a:ext>
             </a:extLst>
           </p:cNvPr>
@@ -16112,7 +16045,7 @@
           <p:cNvPr id="14" name="">
             <a:extLst xmlns:a="http://schemas.openxmlformats.org/drawingml/2006/main">
               <a:ext uri="{FF2B5EF4-FFF2-40B4-BE49-F238E27FC236}">
-                <a16:creationId xmlns:a16="http://schemas.microsoft.com/office/drawing/2014/main" id="{F5EB3385-5D27-46E2-856B-8054AF7A6610}"/>
+                <a16:creationId xmlns:a16="http://schemas.microsoft.com/office/drawing/2014/main" id="{405E7607-B9F6-4147-B82D-C4CFD3C22402}"/>
               </a:ext>
             </a:extLst>
           </p:cNvPr>
@@ -16170,7 +16103,7 @@
           <p:cNvPr id="15" name="">
             <a:extLst xmlns:a="http://schemas.openxmlformats.org/drawingml/2006/main">
               <a:ext uri="{FF2B5EF4-FFF2-40B4-BE49-F238E27FC236}">
-                <a16:creationId xmlns:a16="http://schemas.microsoft.com/office/drawing/2014/main" id="{F3ED7672-48A3-4ACC-A14E-7D05286812F9}"/>
+                <a16:creationId xmlns:a16="http://schemas.microsoft.com/office/drawing/2014/main" id="{817887B0-D74F-4519-BC46-14A75817DA37}"/>
               </a:ext>
             </a:extLst>
           </p:cNvPr>
@@ -16228,7 +16161,7 @@
           <p:cNvPr id="16" name="">
             <a:extLst xmlns:a="http://schemas.openxmlformats.org/drawingml/2006/main">
               <a:ext uri="{FF2B5EF4-FFF2-40B4-BE49-F238E27FC236}">
-                <a16:creationId xmlns:a16="http://schemas.microsoft.com/office/drawing/2014/main" id="{F6394993-F6EC-4F10-84B5-B73D0567D81B}"/>
+                <a16:creationId xmlns:a16="http://schemas.microsoft.com/office/drawing/2014/main" id="{09D58EAA-B176-4C7A-9B22-96A63B700D95}"/>
               </a:ext>
             </a:extLst>
           </p:cNvPr>
@@ -16286,7 +16219,7 @@
           <p:cNvPr id="17" name="">
             <a:extLst xmlns:a="http://schemas.openxmlformats.org/drawingml/2006/main">
               <a:ext uri="{FF2B5EF4-FFF2-40B4-BE49-F238E27FC236}">
-                <a16:creationId xmlns:a16="http://schemas.microsoft.com/office/drawing/2014/main" id="{54DC7954-6CB4-46D3-A8E0-749EEE053CAC}"/>
+                <a16:creationId xmlns:a16="http://schemas.microsoft.com/office/drawing/2014/main" id="{8742898B-B02C-45EF-BECB-CB056F455D59}"/>
               </a:ext>
             </a:extLst>
           </p:cNvPr>
@@ -16321,7 +16254,7 @@
           <p:cNvPr id="18" name="">
             <a:extLst xmlns:a="http://schemas.openxmlformats.org/drawingml/2006/main">
               <a:ext uri="{FF2B5EF4-FFF2-40B4-BE49-F238E27FC236}">
-                <a16:creationId xmlns:a16="http://schemas.microsoft.com/office/drawing/2014/main" id="{ADF733CE-A845-4617-98A8-0665F21725AD}"/>
+                <a16:creationId xmlns:a16="http://schemas.microsoft.com/office/drawing/2014/main" id="{170D1E29-A67E-49BE-B0FE-5BC421EB2C17}"/>
               </a:ext>
             </a:extLst>
           </p:cNvPr>
@@ -16379,7 +16312,7 @@
           <p:cNvPr id="19" name="">
             <a:extLst xmlns:a="http://schemas.openxmlformats.org/drawingml/2006/main">
               <a:ext uri="{FF2B5EF4-FFF2-40B4-BE49-F238E27FC236}">
-                <a16:creationId xmlns:a16="http://schemas.microsoft.com/office/drawing/2014/main" id="{1B2671DB-12E7-4653-900D-4484186A4CF3}"/>
+                <a16:creationId xmlns:a16="http://schemas.microsoft.com/office/drawing/2014/main" id="{A50BC827-1BE3-4776-A38A-725E7B43FF1E}"/>
               </a:ext>
             </a:extLst>
           </p:cNvPr>
@@ -16437,7 +16370,7 @@
           <p:cNvPr id="20" name="">
             <a:extLst xmlns:a="http://schemas.openxmlformats.org/drawingml/2006/main">
               <a:ext uri="{FF2B5EF4-FFF2-40B4-BE49-F238E27FC236}">
-                <a16:creationId xmlns:a16="http://schemas.microsoft.com/office/drawing/2014/main" id="{74584A2E-8DE9-4DA7-80CA-110DA5BAAA8F}"/>
+                <a16:creationId xmlns:a16="http://schemas.microsoft.com/office/drawing/2014/main" id="{D8164761-CDEF-48A1-9D8C-7CFA85042D43}"/>
               </a:ext>
             </a:extLst>
           </p:cNvPr>
@@ -16474,7 +16407,7 @@
           <p:cNvPr id="21" name="">
             <a:extLst xmlns:a="http://schemas.openxmlformats.org/drawingml/2006/main">
               <a:ext uri="{FF2B5EF4-FFF2-40B4-BE49-F238E27FC236}">
-                <a16:creationId xmlns:a16="http://schemas.microsoft.com/office/drawing/2014/main" id="{4F2F836C-7E21-409C-A5E2-E79646F612AE}"/>
+                <a16:creationId xmlns:a16="http://schemas.microsoft.com/office/drawing/2014/main" id="{F299902E-E1B8-4E1A-BBAE-21C6BE2D6845}"/>
               </a:ext>
             </a:extLst>
           </p:cNvPr>
@@ -16532,7 +16465,7 @@
           <p:cNvPr id="22" name="">
             <a:extLst xmlns:a="http://schemas.openxmlformats.org/drawingml/2006/main">
               <a:ext uri="{FF2B5EF4-FFF2-40B4-BE49-F238E27FC236}">
-                <a16:creationId xmlns:a16="http://schemas.microsoft.com/office/drawing/2014/main" id="{B349D6A2-DEAB-4C49-88C8-11026BDC4578}"/>
+                <a16:creationId xmlns:a16="http://schemas.microsoft.com/office/drawing/2014/main" id="{970F4912-9F91-4A5D-92C8-5D969FE0B151}"/>
               </a:ext>
             </a:extLst>
           </p:cNvPr>
@@ -16613,7 +16546,7 @@
           <p:cNvPr id="23" name="">
             <a:extLst xmlns:a="http://schemas.openxmlformats.org/drawingml/2006/main">
               <a:ext uri="{FF2B5EF4-FFF2-40B4-BE49-F238E27FC236}">
-                <a16:creationId xmlns:a16="http://schemas.microsoft.com/office/drawing/2014/main" id="{E2A9572A-1A0A-4FD3-8847-B6BE3EBDF016}"/>
+                <a16:creationId xmlns:a16="http://schemas.microsoft.com/office/drawing/2014/main" id="{8B527924-60F2-4AA0-ADC4-72247B229FE0}"/>
               </a:ext>
             </a:extLst>
           </p:cNvPr>
@@ -16648,7 +16581,7 @@
           <p:cNvPr id="24" name="">
             <a:extLst xmlns:a="http://schemas.openxmlformats.org/drawingml/2006/main">
               <a:ext uri="{FF2B5EF4-FFF2-40B4-BE49-F238E27FC236}">
-                <a16:creationId xmlns:a16="http://schemas.microsoft.com/office/drawing/2014/main" id="{F9668FF0-04C6-455B-92D6-4110FEC6DBB8}"/>
+                <a16:creationId xmlns:a16="http://schemas.microsoft.com/office/drawing/2014/main" id="{DE456534-3F64-4B77-BD1F-2D58A5D45E7A}"/>
               </a:ext>
             </a:extLst>
           </p:cNvPr>
@@ -16706,7 +16639,7 @@
           <p:cNvPr id="25" name="">
             <a:extLst xmlns:a="http://schemas.openxmlformats.org/drawingml/2006/main">
               <a:ext uri="{FF2B5EF4-FFF2-40B4-BE49-F238E27FC236}">
-                <a16:creationId xmlns:a16="http://schemas.microsoft.com/office/drawing/2014/main" id="{2E377AC8-55BF-459D-AA55-DBC9C33A8102}"/>
+                <a16:creationId xmlns:a16="http://schemas.microsoft.com/office/drawing/2014/main" id="{274F358C-23CC-4E02-A738-51FDF666A83E}"/>
               </a:ext>
             </a:extLst>
           </p:cNvPr>
@@ -16764,7 +16697,7 @@
           <p:cNvPr id="26" name="">
             <a:extLst xmlns:a="http://schemas.openxmlformats.org/drawingml/2006/main">
               <a:ext uri="{FF2B5EF4-FFF2-40B4-BE49-F238E27FC236}">
-                <a16:creationId xmlns:a16="http://schemas.microsoft.com/office/drawing/2014/main" id="{3A74089B-5F69-4227-BE4B-28DAE1A26063}"/>
+                <a16:creationId xmlns:a16="http://schemas.microsoft.com/office/drawing/2014/main" id="{1E68E37F-2280-43FA-A30A-10CAB2BE6810}"/>
               </a:ext>
             </a:extLst>
           </p:cNvPr>
@@ -16822,7 +16755,7 @@
           <p:cNvPr id="27" name="">
             <a:extLst xmlns:a="http://schemas.openxmlformats.org/drawingml/2006/main">
               <a:ext uri="{FF2B5EF4-FFF2-40B4-BE49-F238E27FC236}">
-                <a16:creationId xmlns:a16="http://schemas.microsoft.com/office/drawing/2014/main" id="{8DDE7CDF-C1BF-4A4A-85BA-27AAAD092C66}"/>
+                <a16:creationId xmlns:a16="http://schemas.microsoft.com/office/drawing/2014/main" id="{E64F063B-023F-4A5C-B44F-179AEC0643B7}"/>
               </a:ext>
             </a:extLst>
           </p:cNvPr>
@@ -16880,7 +16813,7 @@
           <p:cNvPr id="28" name="">
             <a:extLst xmlns:a="http://schemas.openxmlformats.org/drawingml/2006/main">
               <a:ext uri="{FF2B5EF4-FFF2-40B4-BE49-F238E27FC236}">
-                <a16:creationId xmlns:a16="http://schemas.microsoft.com/office/drawing/2014/main" id="{E3D4E9E9-15C6-435E-85ED-46D52579D9DE}"/>
+                <a16:creationId xmlns:a16="http://schemas.microsoft.com/office/drawing/2014/main" id="{158640BE-415B-4D0E-AD12-9AF47BD7724B}"/>
               </a:ext>
             </a:extLst>
           </p:cNvPr>
@@ -16938,7 +16871,7 @@
           <p:cNvPr id="29" name="">
             <a:extLst xmlns:a="http://schemas.openxmlformats.org/drawingml/2006/main">
               <a:ext uri="{FF2B5EF4-FFF2-40B4-BE49-F238E27FC236}">
-                <a16:creationId xmlns:a16="http://schemas.microsoft.com/office/drawing/2014/main" id="{017AD53C-E8F7-4095-A06C-5244B4B03402}"/>
+                <a16:creationId xmlns:a16="http://schemas.microsoft.com/office/drawing/2014/main" id="{C1E43DD9-4810-4EA3-9AD7-9FC7C89F3390}"/>
               </a:ext>
             </a:extLst>
           </p:cNvPr>
@@ -16969,7 +16902,7 @@
           <p:cNvPr id="30" name="">
             <a:extLst xmlns:a="http://schemas.openxmlformats.org/drawingml/2006/main">
               <a:ext uri="{FF2B5EF4-FFF2-40B4-BE49-F238E27FC236}">
-                <a16:creationId xmlns:a16="http://schemas.microsoft.com/office/drawing/2014/main" id="{3DA6DA7C-B862-4712-B5EF-BCE49C138A1B}"/>
+                <a16:creationId xmlns:a16="http://schemas.microsoft.com/office/drawing/2014/main" id="{09299D7B-35F4-407C-9435-D93F499BD216}"/>
               </a:ext>
             </a:extLst>
           </p:cNvPr>
@@ -17027,7 +16960,7 @@
           <p:cNvPr id="31" name="">
             <a:extLst xmlns:a="http://schemas.openxmlformats.org/drawingml/2006/main">
               <a:ext uri="{FF2B5EF4-FFF2-40B4-BE49-F238E27FC236}">
-                <a16:creationId xmlns:a16="http://schemas.microsoft.com/office/drawing/2014/main" id="{39AD2D8C-4574-490E-A9C9-C9060CC783C5}"/>
+                <a16:creationId xmlns:a16="http://schemas.microsoft.com/office/drawing/2014/main" id="{6576297A-44C9-403C-A83D-0529BAA53872}"/>
               </a:ext>
             </a:extLst>
           </p:cNvPr>
@@ -17083,7 +17016,7 @@
     </p:spTree>
     <p:extLst>
       <p:ext uri="{BB962C8B-B14F-4D97-AF65-F5344CB8AC3E}">
-        <p14:creationId xmlns:p14="http://schemas.microsoft.com/office/powerpoint/2010/main" val="1778261507"/>
+        <p14:creationId xmlns:p14="http://schemas.microsoft.com/office/powerpoint/2010/main" val="205548986"/>
       </p:ext>
     </p:extLst>
   </p:cSld>
@@ -17095,17 +17028,9 @@
   <p:cSld>
     <p:bg>
       <p:bgPr>
-        <a:gradFill xmlns:a="http://schemas.openxmlformats.org/drawingml/2006/main">
-          <a:gsLst>
-            <a:gs pos="0">
-              <a:srgbClr val="0D2536"/>
-            </a:gs>
-            <a:gs pos="100000">
-              <a:srgbClr val="1B3342"/>
-            </a:gs>
-          </a:gsLst>
-          <a:lin ang="8100000"/>
-        </a:gradFill>
+        <a:solidFill xmlns:a="http://schemas.openxmlformats.org/drawingml/2006/main">
+          <a:srgbClr val="F3F1EB"/>
+        </a:solidFill>
       </p:bgPr>
     </p:bg>
     <p:spTree>
@@ -17122,7 +17047,7 @@
           <p:cNvPr id="40" name="">
             <a:extLst xmlns:a="http://schemas.openxmlformats.org/drawingml/2006/main">
               <a:ext uri="{FF2B5EF4-FFF2-40B4-BE49-F238E27FC236}">
-                <a16:creationId xmlns:a16="http://schemas.microsoft.com/office/drawing/2014/main" id="{E898437F-3162-4DB7-9B90-4C9DA3B73722}"/>
+                <a16:creationId xmlns:a16="http://schemas.microsoft.com/office/drawing/2014/main" id="{199B0B0F-0B41-4842-B6E3-75D977D8BF8D}"/>
               </a:ext>
             </a:extLst>
           </p:cNvPr>
@@ -17179,7 +17104,7 @@
           <p:cNvPr id="2" name="">
             <a:extLst xmlns:a="http://schemas.openxmlformats.org/drawingml/2006/main">
               <a:ext uri="{FF2B5EF4-FFF2-40B4-BE49-F238E27FC236}">
-                <a16:creationId xmlns:a16="http://schemas.microsoft.com/office/drawing/2014/main" id="{94CC3780-4A23-47DF-BBB4-22C46C310E13}"/>
+                <a16:creationId xmlns:a16="http://schemas.microsoft.com/office/drawing/2014/main" id="{DFCA42DD-E3C2-465A-B4DC-4D94804919AB}"/>
               </a:ext>
             </a:extLst>
           </p:cNvPr>
@@ -17236,7 +17161,7 @@
           <p:cNvPr id="3" name="">
             <a:extLst xmlns:a="http://schemas.openxmlformats.org/drawingml/2006/main">
               <a:ext uri="{FF2B5EF4-FFF2-40B4-BE49-F238E27FC236}">
-                <a16:creationId xmlns:a16="http://schemas.microsoft.com/office/drawing/2014/main" id="{69692A07-75F2-4C58-9199-5564AB677A18}"/>
+                <a16:creationId xmlns:a16="http://schemas.microsoft.com/office/drawing/2014/main" id="{E6EB56E8-5284-496A-A806-9668605DA067}"/>
               </a:ext>
             </a:extLst>
           </p:cNvPr>
@@ -17293,7 +17218,7 @@
           <p:cNvPr id="4" name="">
             <a:extLst xmlns:a="http://schemas.openxmlformats.org/drawingml/2006/main">
               <a:ext uri="{FF2B5EF4-FFF2-40B4-BE49-F238E27FC236}">
-                <a16:creationId xmlns:a16="http://schemas.microsoft.com/office/drawing/2014/main" id="{D34B425A-C1A5-4531-AB28-EA524C7CAF65}"/>
+                <a16:creationId xmlns:a16="http://schemas.microsoft.com/office/drawing/2014/main" id="{1D96D4B0-C1C5-4758-97E2-F1A562C4411A}"/>
               </a:ext>
             </a:extLst>
           </p:cNvPr>
@@ -17324,7 +17249,7 @@
           <p:cNvPr id="5" name="">
             <a:extLst xmlns:a="http://schemas.openxmlformats.org/drawingml/2006/main">
               <a:ext uri="{FF2B5EF4-FFF2-40B4-BE49-F238E27FC236}">
-                <a16:creationId xmlns:a16="http://schemas.microsoft.com/office/drawing/2014/main" id="{027095F2-6EB6-40D0-9F15-EB94D1757B68}"/>
+                <a16:creationId xmlns:a16="http://schemas.microsoft.com/office/drawing/2014/main" id="{FE87620A-F283-4F36-B178-BC7D1C2B11B8}"/>
               </a:ext>
             </a:extLst>
           </p:cNvPr>
@@ -17344,7 +17269,7 @@
           <a:noFill xmlns:a="http://schemas.openxmlformats.org/drawingml/2006/main"/>
           <a:ln xmlns:a="http://schemas.openxmlformats.org/drawingml/2006/main" w="9525">
             <a:solidFill>
-              <a:srgbClr val="2A4D65"/>
+              <a:srgbClr val="C5D4DC"/>
             </a:solidFill>
             <a:prstDash val="solid"/>
           </a:ln>
@@ -17355,7 +17280,7 @@
           <p:cNvPr id="6" name="">
             <a:extLst xmlns:a="http://schemas.openxmlformats.org/drawingml/2006/main">
               <a:ext uri="{FF2B5EF4-FFF2-40B4-BE49-F238E27FC236}">
-                <a16:creationId xmlns:a16="http://schemas.microsoft.com/office/drawing/2014/main" id="{48D9CEA3-9208-4AC7-876E-5041316B5297}"/>
+                <a16:creationId xmlns:a16="http://schemas.microsoft.com/office/drawing/2014/main" id="{09C66476-F7A6-4BA7-9380-526C8BC4C749}"/>
               </a:ext>
             </a:extLst>
           </p:cNvPr>
@@ -17412,7 +17337,7 @@
           <p:cNvPr id="7" name="">
             <a:extLst xmlns:a="http://schemas.openxmlformats.org/drawingml/2006/main">
               <a:ext uri="{FF2B5EF4-FFF2-40B4-BE49-F238E27FC236}">
-                <a16:creationId xmlns:a16="http://schemas.microsoft.com/office/drawing/2014/main" id="{9EDC9B68-A269-4C62-9356-20F068EB4DD2}"/>
+                <a16:creationId xmlns:a16="http://schemas.microsoft.com/office/drawing/2014/main" id="{15542518-B849-454B-9343-590461BB7DCD}"/>
               </a:ext>
             </a:extLst>
           </p:cNvPr>
@@ -17469,7 +17394,7 @@
           <p:cNvPr id="8" name="">
             <a:extLst xmlns:a="http://schemas.openxmlformats.org/drawingml/2006/main">
               <a:ext uri="{FF2B5EF4-FFF2-40B4-BE49-F238E27FC236}">
-                <a16:creationId xmlns:a16="http://schemas.microsoft.com/office/drawing/2014/main" id="{43ACD653-B924-49F4-A6C3-B528D9646769}"/>
+                <a16:creationId xmlns:a16="http://schemas.microsoft.com/office/drawing/2014/main" id="{4D6810FE-2F43-43F5-960E-DA2A92B7E18C}"/>
               </a:ext>
             </a:extLst>
           </p:cNvPr>
@@ -17526,7 +17451,7 @@
           <p:cNvPr id="9" name="">
             <a:extLst xmlns:a="http://schemas.openxmlformats.org/drawingml/2006/main">
               <a:ext uri="{FF2B5EF4-FFF2-40B4-BE49-F238E27FC236}">
-                <a16:creationId xmlns:a16="http://schemas.microsoft.com/office/drawing/2014/main" id="{3CAE412E-A4D8-441F-9708-76D15485B536}"/>
+                <a16:creationId xmlns:a16="http://schemas.microsoft.com/office/drawing/2014/main" id="{AECB48FE-0D38-41A8-A20B-8768C2121DCA}"/>
               </a:ext>
             </a:extLst>
           </p:cNvPr>
@@ -17557,7 +17482,7 @@
           <p:cNvPr id="10" name="">
             <a:extLst xmlns:a="http://schemas.openxmlformats.org/drawingml/2006/main">
               <a:ext uri="{FF2B5EF4-FFF2-40B4-BE49-F238E27FC236}">
-                <a16:creationId xmlns:a16="http://schemas.microsoft.com/office/drawing/2014/main" id="{FD5D2EDC-A949-4EE5-AC98-BC9C6D43B2EB}"/>
+                <a16:creationId xmlns:a16="http://schemas.microsoft.com/office/drawing/2014/main" id="{C11F1635-84E4-4947-9386-99D68B3EBB5D}"/>
               </a:ext>
             </a:extLst>
           </p:cNvPr>
@@ -17577,7 +17502,7 @@
           <a:noFill xmlns:a="http://schemas.openxmlformats.org/drawingml/2006/main"/>
           <a:ln xmlns:a="http://schemas.openxmlformats.org/drawingml/2006/main" w="9525">
             <a:solidFill>
-              <a:srgbClr val="2A4D65"/>
+              <a:srgbClr val="C5D4DC"/>
             </a:solidFill>
             <a:prstDash val="solid"/>
           </a:ln>
@@ -17588,7 +17513,7 @@
           <p:cNvPr id="11" name="">
             <a:extLst xmlns:a="http://schemas.openxmlformats.org/drawingml/2006/main">
               <a:ext uri="{FF2B5EF4-FFF2-40B4-BE49-F238E27FC236}">
-                <a16:creationId xmlns:a16="http://schemas.microsoft.com/office/drawing/2014/main" id="{EC1E8144-DC1E-41DA-BCB9-01174AE73903}"/>
+                <a16:creationId xmlns:a16="http://schemas.microsoft.com/office/drawing/2014/main" id="{9AC43883-6A28-4ADE-872B-52997E37A71A}"/>
               </a:ext>
             </a:extLst>
           </p:cNvPr>
@@ -17646,7 +17571,7 @@
           <p:cNvPr id="12" name="">
             <a:extLst xmlns:a="http://schemas.openxmlformats.org/drawingml/2006/main">
               <a:ext uri="{FF2B5EF4-FFF2-40B4-BE49-F238E27FC236}">
-                <a16:creationId xmlns:a16="http://schemas.microsoft.com/office/drawing/2014/main" id="{53FEB409-9271-46D0-901E-8E14E33AEA92}"/>
+                <a16:creationId xmlns:a16="http://schemas.microsoft.com/office/drawing/2014/main" id="{B86FF3BE-1D08-47F0-8B35-D59696451387}"/>
               </a:ext>
             </a:extLst>
           </p:cNvPr>
@@ -17678,7 +17603,7 @@
             <a:pPr algn="r">
               <a:defRPr sz="750" b="1">
                 <a:solidFill>
-                  <a:srgbClr val="B8C9D3"/>
+                  <a:srgbClr val="587080"/>
                 </a:solidFill>
                 <a:latin typeface="Arial"/>
                 <a:ea typeface="Arial"/>
@@ -17688,7 +17613,7 @@
             <a:r>
               <a:rPr sz="750" b="1">
                 <a:solidFill>
-                  <a:srgbClr val="B8C9D3"/>
+                  <a:srgbClr val="587080"/>
                 </a:solidFill>
                 <a:latin typeface="Arial"/>
                 <a:ea typeface="Arial"/>
@@ -17704,7 +17629,7 @@
           <p:cNvPr id="13" name="">
             <a:extLst xmlns:a="http://schemas.openxmlformats.org/drawingml/2006/main">
               <a:ext uri="{FF2B5EF4-FFF2-40B4-BE49-F238E27FC236}">
-                <a16:creationId xmlns:a16="http://schemas.microsoft.com/office/drawing/2014/main" id="{C0ADCFF6-B607-4777-A506-511685E85C82}"/>
+                <a16:creationId xmlns:a16="http://schemas.microsoft.com/office/drawing/2014/main" id="{5D017268-F4AD-44DC-BCAF-845054E035D1}"/>
               </a:ext>
             </a:extLst>
           </p:cNvPr>
@@ -17736,7 +17661,7 @@
             <a:pPr algn="l">
               <a:defRPr sz="600" b="0">
                 <a:solidFill>
-                  <a:srgbClr val="B8C9D3"/>
+                  <a:srgbClr val="587080"/>
                 </a:solidFill>
                 <a:latin typeface="Arial"/>
                 <a:ea typeface="Arial"/>
@@ -17746,7 +17671,7 @@
             <a:r>
               <a:rPr sz="600" b="0">
                 <a:solidFill>
-                  <a:srgbClr val="B8C9D3"/>
+                  <a:srgbClr val="587080"/>
                 </a:solidFill>
                 <a:latin typeface="Arial"/>
                 <a:ea typeface="Arial"/>
@@ -17762,7 +17687,7 @@
           <p:cNvPr id="14" name="">
             <a:extLst xmlns:a="http://schemas.openxmlformats.org/drawingml/2006/main">
               <a:ext uri="{FF2B5EF4-FFF2-40B4-BE49-F238E27FC236}">
-                <a16:creationId xmlns:a16="http://schemas.microsoft.com/office/drawing/2014/main" id="{21AC7798-3239-429D-B0BF-9C02922F2F01}"/>
+                <a16:creationId xmlns:a16="http://schemas.microsoft.com/office/drawing/2014/main" id="{52A1826B-62C0-4F11-9C46-8BDF3B1FFB9A}"/>
               </a:ext>
             </a:extLst>
           </p:cNvPr>
@@ -17794,7 +17719,7 @@
             <a:pPr algn="r">
               <a:defRPr sz="600" b="1">
                 <a:solidFill>
-                  <a:srgbClr val="B8C9D3"/>
+                  <a:srgbClr val="587080"/>
                 </a:solidFill>
                 <a:latin typeface="Arial"/>
                 <a:ea typeface="Arial"/>
@@ -17804,7 +17729,7 @@
             <a:r>
               <a:rPr sz="600" b="1">
                 <a:solidFill>
-                  <a:srgbClr val="B8C9D3"/>
+                  <a:srgbClr val="587080"/>
                 </a:solidFill>
                 <a:latin typeface="Arial"/>
                 <a:ea typeface="Arial"/>
@@ -17820,7 +17745,7 @@
           <p:cNvPr id="15" name="">
             <a:extLst xmlns:a="http://schemas.openxmlformats.org/drawingml/2006/main">
               <a:ext uri="{FF2B5EF4-FFF2-40B4-BE49-F238E27FC236}">
-                <a16:creationId xmlns:a16="http://schemas.microsoft.com/office/drawing/2014/main" id="{E9A49E13-431C-4A22-B328-F43BFBB7483C}"/>
+                <a16:creationId xmlns:a16="http://schemas.microsoft.com/office/drawing/2014/main" id="{328D0167-9D5A-485A-A97B-FE042204CE02}"/>
               </a:ext>
             </a:extLst>
           </p:cNvPr>
@@ -17852,7 +17777,7 @@
             <a:pPr algn="l">
               <a:defRPr sz="2250" b="0">
                 <a:solidFill>
-                  <a:srgbClr val="00E1C6"/>
+                  <a:srgbClr val="132E41"/>
                 </a:solidFill>
                 <a:latin typeface="Georgia"/>
                 <a:ea typeface="Georgia"/>
@@ -17862,7 +17787,7 @@
             <a:r>
               <a:rPr sz="2250" b="0">
                 <a:solidFill>
-                  <a:srgbClr val="00E1C6"/>
+                  <a:srgbClr val="132E41"/>
                 </a:solidFill>
                 <a:latin typeface="Georgia"/>
                 <a:ea typeface="Georgia"/>
@@ -17878,7 +17803,7 @@
           <p:cNvPr id="16" name="">
             <a:extLst xmlns:a="http://schemas.openxmlformats.org/drawingml/2006/main">
               <a:ext uri="{FF2B5EF4-FFF2-40B4-BE49-F238E27FC236}">
-                <a16:creationId xmlns:a16="http://schemas.microsoft.com/office/drawing/2014/main" id="{F611D537-8DCE-4AA5-98DC-B470843950E4}"/>
+                <a16:creationId xmlns:a16="http://schemas.microsoft.com/office/drawing/2014/main" id="{076B0BF3-632A-4857-B99A-AFF892765874}"/>
               </a:ext>
             </a:extLst>
           </p:cNvPr>
@@ -17910,7 +17835,7 @@
             <a:pPr algn="l">
               <a:defRPr sz="1125" b="0">
                 <a:solidFill>
-                  <a:srgbClr val="B8C9D3"/>
+                  <a:srgbClr val="587080"/>
                 </a:solidFill>
                 <a:latin typeface="Arial"/>
                 <a:ea typeface="Arial"/>
@@ -17920,7 +17845,7 @@
             <a:r>
               <a:rPr sz="1125" b="0">
                 <a:solidFill>
-                  <a:srgbClr val="B8C9D3"/>
+                  <a:srgbClr val="587080"/>
                 </a:solidFill>
                 <a:latin typeface="Arial"/>
                 <a:ea typeface="Arial"/>
@@ -17936,7 +17861,7 @@
           <p:cNvPr id="17" name="">
             <a:extLst xmlns:a="http://schemas.openxmlformats.org/drawingml/2006/main">
               <a:ext uri="{FF2B5EF4-FFF2-40B4-BE49-F238E27FC236}">
-                <a16:creationId xmlns:a16="http://schemas.microsoft.com/office/drawing/2014/main" id="{2FA8562B-51E3-4846-8473-B13775AF8342}"/>
+                <a16:creationId xmlns:a16="http://schemas.microsoft.com/office/drawing/2014/main" id="{BA97B934-780F-4CB9-92CD-71307A05F69F}"/>
               </a:ext>
             </a:extLst>
           </p:cNvPr>
@@ -17956,7 +17881,7 @@
           <a:noFill xmlns:a="http://schemas.openxmlformats.org/drawingml/2006/main"/>
           <a:ln xmlns:a="http://schemas.openxmlformats.org/drawingml/2006/main" w="23813">
             <a:solidFill>
-              <a:srgbClr val="2A4D65"/>
+              <a:srgbClr val="C5D4DC"/>
             </a:solidFill>
             <a:prstDash val="solid"/>
           </a:ln>
@@ -17967,7 +17892,7 @@
           <p:cNvPr id="18" name="">
             <a:extLst xmlns:a="http://schemas.openxmlformats.org/drawingml/2006/main">
               <a:ext uri="{FF2B5EF4-FFF2-40B4-BE49-F238E27FC236}">
-                <a16:creationId xmlns:a16="http://schemas.microsoft.com/office/drawing/2014/main" id="{8E600400-7D1F-4A19-9342-16B5B989DB11}"/>
+                <a16:creationId xmlns:a16="http://schemas.microsoft.com/office/drawing/2014/main" id="{B4E38FD4-AD1A-464E-97EF-1C754B92E055}"/>
               </a:ext>
             </a:extLst>
           </p:cNvPr>
@@ -18024,7 +17949,7 @@
           <p:cNvPr id="19" name="">
             <a:extLst xmlns:a="http://schemas.openxmlformats.org/drawingml/2006/main">
               <a:ext uri="{FF2B5EF4-FFF2-40B4-BE49-F238E27FC236}">
-                <a16:creationId xmlns:a16="http://schemas.microsoft.com/office/drawing/2014/main" id="{36CA22CA-8242-4511-8973-36E18730810A}"/>
+                <a16:creationId xmlns:a16="http://schemas.microsoft.com/office/drawing/2014/main" id="{5E6E5811-BF7A-4468-AE22-4065ED9C349B}"/>
               </a:ext>
             </a:extLst>
           </p:cNvPr>
@@ -18056,7 +17981,7 @@
             <a:pPr algn="ctr">
               <a:defRPr sz="975" b="1">
                 <a:solidFill>
-                  <a:srgbClr val="F3F8FA"/>
+                  <a:srgbClr val="132E41"/>
                 </a:solidFill>
                 <a:latin typeface="Arial"/>
                 <a:ea typeface="Arial"/>
@@ -18066,7 +17991,7 @@
             <a:r>
               <a:rPr sz="975" b="1">
                 <a:solidFill>
-                  <a:srgbClr val="F3F8FA"/>
+                  <a:srgbClr val="132E41"/>
                 </a:solidFill>
                 <a:latin typeface="Arial"/>
                 <a:ea typeface="Arial"/>
@@ -18082,7 +18007,7 @@
           <p:cNvPr id="20" name="">
             <a:extLst xmlns:a="http://schemas.openxmlformats.org/drawingml/2006/main">
               <a:ext uri="{FF2B5EF4-FFF2-40B4-BE49-F238E27FC236}">
-                <a16:creationId xmlns:a16="http://schemas.microsoft.com/office/drawing/2014/main" id="{7DB4B067-3EA9-48AD-8CF6-ABB55234096C}"/>
+                <a16:creationId xmlns:a16="http://schemas.microsoft.com/office/drawing/2014/main" id="{C08F334C-75EE-437C-8DDC-C6EEFDC2284B}"/>
               </a:ext>
             </a:extLst>
           </p:cNvPr>
@@ -18114,7 +18039,7 @@
             <a:pPr algn="ctr">
               <a:defRPr sz="825" b="0">
                 <a:solidFill>
-                  <a:srgbClr val="B8C9D3"/>
+                  <a:srgbClr val="587080"/>
                 </a:solidFill>
                 <a:latin typeface="Arial"/>
                 <a:ea typeface="Arial"/>
@@ -18124,7 +18049,7 @@
             <a:r>
               <a:rPr sz="825" b="0">
                 <a:solidFill>
-                  <a:srgbClr val="B8C9D3"/>
+                  <a:srgbClr val="587080"/>
                 </a:solidFill>
                 <a:latin typeface="Arial"/>
                 <a:ea typeface="Arial"/>
@@ -18140,7 +18065,7 @@
           <p:cNvPr id="21" name="">
             <a:extLst xmlns:a="http://schemas.openxmlformats.org/drawingml/2006/main">
               <a:ext uri="{FF2B5EF4-FFF2-40B4-BE49-F238E27FC236}">
-                <a16:creationId xmlns:a16="http://schemas.microsoft.com/office/drawing/2014/main" id="{A092F043-7B59-463E-AC17-4E6081D29466}"/>
+                <a16:creationId xmlns:a16="http://schemas.microsoft.com/office/drawing/2014/main" id="{C8E26816-6563-4C9B-B66E-2EDFC707D600}"/>
               </a:ext>
             </a:extLst>
           </p:cNvPr>
@@ -18160,7 +18085,7 @@
           <a:noFill xmlns:a="http://schemas.openxmlformats.org/drawingml/2006/main"/>
           <a:ln xmlns:a="http://schemas.openxmlformats.org/drawingml/2006/main" w="23813">
             <a:solidFill>
-              <a:srgbClr val="2A4D65"/>
+              <a:srgbClr val="C5D4DC"/>
             </a:solidFill>
             <a:prstDash val="solid"/>
           </a:ln>
@@ -18171,7 +18096,7 @@
           <p:cNvPr id="22" name="">
             <a:extLst xmlns:a="http://schemas.openxmlformats.org/drawingml/2006/main">
               <a:ext uri="{FF2B5EF4-FFF2-40B4-BE49-F238E27FC236}">
-                <a16:creationId xmlns:a16="http://schemas.microsoft.com/office/drawing/2014/main" id="{634E015F-8762-4390-80A8-8220E1B1F412}"/>
+                <a16:creationId xmlns:a16="http://schemas.microsoft.com/office/drawing/2014/main" id="{7ADA2C20-F137-46B3-A0A2-50086EAB754B}"/>
               </a:ext>
             </a:extLst>
           </p:cNvPr>
@@ -18228,7 +18153,7 @@
           <p:cNvPr id="23" name="">
             <a:extLst xmlns:a="http://schemas.openxmlformats.org/drawingml/2006/main">
               <a:ext uri="{FF2B5EF4-FFF2-40B4-BE49-F238E27FC236}">
-                <a16:creationId xmlns:a16="http://schemas.microsoft.com/office/drawing/2014/main" id="{8835F61E-4384-4FA9-9B59-13D0DF0D65D7}"/>
+                <a16:creationId xmlns:a16="http://schemas.microsoft.com/office/drawing/2014/main" id="{01EE1F48-3AAB-4EC5-9EEB-4D5C79D061F7}"/>
               </a:ext>
             </a:extLst>
           </p:cNvPr>
@@ -18260,7 +18185,7 @@
             <a:pPr algn="ctr">
               <a:defRPr sz="975" b="1">
                 <a:solidFill>
-                  <a:srgbClr val="F3F8FA"/>
+                  <a:srgbClr val="132E41"/>
                 </a:solidFill>
                 <a:latin typeface="Arial"/>
                 <a:ea typeface="Arial"/>
@@ -18270,7 +18195,7 @@
             <a:r>
               <a:rPr sz="975" b="1">
                 <a:solidFill>
-                  <a:srgbClr val="F3F8FA"/>
+                  <a:srgbClr val="132E41"/>
                 </a:solidFill>
                 <a:latin typeface="Arial"/>
                 <a:ea typeface="Arial"/>
@@ -18286,7 +18211,7 @@
           <p:cNvPr id="24" name="">
             <a:extLst xmlns:a="http://schemas.openxmlformats.org/drawingml/2006/main">
               <a:ext uri="{FF2B5EF4-FFF2-40B4-BE49-F238E27FC236}">
-                <a16:creationId xmlns:a16="http://schemas.microsoft.com/office/drawing/2014/main" id="{585E6863-3509-413E-ACF8-5A56EF480D0B}"/>
+                <a16:creationId xmlns:a16="http://schemas.microsoft.com/office/drawing/2014/main" id="{C40BD9A5-DD87-4766-8A1E-AAB4A22B9735}"/>
               </a:ext>
             </a:extLst>
           </p:cNvPr>
@@ -18318,7 +18243,7 @@
             <a:pPr algn="ctr">
               <a:defRPr sz="825" b="0">
                 <a:solidFill>
-                  <a:srgbClr val="B8C9D3"/>
+                  <a:srgbClr val="587080"/>
                 </a:solidFill>
                 <a:latin typeface="Arial"/>
                 <a:ea typeface="Arial"/>
@@ -18328,7 +18253,7 @@
             <a:r>
               <a:rPr sz="825" b="0">
                 <a:solidFill>
-                  <a:srgbClr val="B8C9D3"/>
+                  <a:srgbClr val="587080"/>
                 </a:solidFill>
                 <a:latin typeface="Arial"/>
                 <a:ea typeface="Arial"/>
@@ -18344,7 +18269,7 @@
           <p:cNvPr id="25" name="">
             <a:extLst xmlns:a="http://schemas.openxmlformats.org/drawingml/2006/main">
               <a:ext uri="{FF2B5EF4-FFF2-40B4-BE49-F238E27FC236}">
-                <a16:creationId xmlns:a16="http://schemas.microsoft.com/office/drawing/2014/main" id="{0144B5B6-EBCA-4065-A315-10F0656D70FB}"/>
+                <a16:creationId xmlns:a16="http://schemas.microsoft.com/office/drawing/2014/main" id="{2F9B2210-DD62-4E4C-B7AD-B047EC5A4F3C}"/>
               </a:ext>
             </a:extLst>
           </p:cNvPr>
@@ -18364,7 +18289,7 @@
           <a:noFill xmlns:a="http://schemas.openxmlformats.org/drawingml/2006/main"/>
           <a:ln xmlns:a="http://schemas.openxmlformats.org/drawingml/2006/main" w="23813">
             <a:solidFill>
-              <a:srgbClr val="2A4D65"/>
+              <a:srgbClr val="C5D4DC"/>
             </a:solidFill>
             <a:prstDash val="solid"/>
           </a:ln>
@@ -18375,7 +18300,7 @@
           <p:cNvPr id="26" name="">
             <a:extLst xmlns:a="http://schemas.openxmlformats.org/drawingml/2006/main">
               <a:ext uri="{FF2B5EF4-FFF2-40B4-BE49-F238E27FC236}">
-                <a16:creationId xmlns:a16="http://schemas.microsoft.com/office/drawing/2014/main" id="{24795A00-C980-4D4C-974E-C04877EE0A1C}"/>
+                <a16:creationId xmlns:a16="http://schemas.microsoft.com/office/drawing/2014/main" id="{81C1772E-FB46-412B-A8C3-5F30B9355741}"/>
               </a:ext>
             </a:extLst>
           </p:cNvPr>
@@ -18432,7 +18357,7 @@
           <p:cNvPr id="27" name="">
             <a:extLst xmlns:a="http://schemas.openxmlformats.org/drawingml/2006/main">
               <a:ext uri="{FF2B5EF4-FFF2-40B4-BE49-F238E27FC236}">
-                <a16:creationId xmlns:a16="http://schemas.microsoft.com/office/drawing/2014/main" id="{941E9E77-BB9B-4D35-A03B-4DD41820A6AD}"/>
+                <a16:creationId xmlns:a16="http://schemas.microsoft.com/office/drawing/2014/main" id="{73413E5C-6729-4EAA-9AFA-614C08EF294F}"/>
               </a:ext>
             </a:extLst>
           </p:cNvPr>
@@ -18464,7 +18389,7 @@
             <a:pPr algn="ctr">
               <a:defRPr sz="975" b="1">
                 <a:solidFill>
-                  <a:srgbClr val="F3F8FA"/>
+                  <a:srgbClr val="132E41"/>
                 </a:solidFill>
                 <a:latin typeface="Arial"/>
                 <a:ea typeface="Arial"/>
@@ -18474,7 +18399,7 @@
             <a:r>
               <a:rPr sz="975" b="1">
                 <a:solidFill>
-                  <a:srgbClr val="F3F8FA"/>
+                  <a:srgbClr val="132E41"/>
                 </a:solidFill>
                 <a:latin typeface="Arial"/>
                 <a:ea typeface="Arial"/>
@@ -18490,7 +18415,7 @@
           <p:cNvPr id="28" name="">
             <a:extLst xmlns:a="http://schemas.openxmlformats.org/drawingml/2006/main">
               <a:ext uri="{FF2B5EF4-FFF2-40B4-BE49-F238E27FC236}">
-                <a16:creationId xmlns:a16="http://schemas.microsoft.com/office/drawing/2014/main" id="{63604D71-C9F7-4C8F-BB9A-C3D00D395FD0}"/>
+                <a16:creationId xmlns:a16="http://schemas.microsoft.com/office/drawing/2014/main" id="{E2347F0C-4B6C-48E4-B927-26F9F3B3CBBC}"/>
               </a:ext>
             </a:extLst>
           </p:cNvPr>
@@ -18522,7 +18447,7 @@
             <a:pPr algn="ctr">
               <a:defRPr sz="825" b="0">
                 <a:solidFill>
-                  <a:srgbClr val="B8C9D3"/>
+                  <a:srgbClr val="587080"/>
                 </a:solidFill>
                 <a:latin typeface="Arial"/>
                 <a:ea typeface="Arial"/>
@@ -18532,7 +18457,7 @@
             <a:r>
               <a:rPr sz="825" b="0">
                 <a:solidFill>
-                  <a:srgbClr val="B8C9D3"/>
+                  <a:srgbClr val="587080"/>
                 </a:solidFill>
                 <a:latin typeface="Arial"/>
                 <a:ea typeface="Arial"/>
@@ -18548,7 +18473,7 @@
           <p:cNvPr id="29" name="">
             <a:extLst xmlns:a="http://schemas.openxmlformats.org/drawingml/2006/main">
               <a:ext uri="{FF2B5EF4-FFF2-40B4-BE49-F238E27FC236}">
-                <a16:creationId xmlns:a16="http://schemas.microsoft.com/office/drawing/2014/main" id="{080DC526-5DAA-4BE4-8078-AA62FA9AE8EC}"/>
+                <a16:creationId xmlns:a16="http://schemas.microsoft.com/office/drawing/2014/main" id="{1C1DC81C-62B3-483B-B0E4-21A0C9E4F6BF}"/>
               </a:ext>
             </a:extLst>
           </p:cNvPr>
@@ -18568,7 +18493,7 @@
           <a:noFill xmlns:a="http://schemas.openxmlformats.org/drawingml/2006/main"/>
           <a:ln xmlns:a="http://schemas.openxmlformats.org/drawingml/2006/main" w="23813">
             <a:solidFill>
-              <a:srgbClr val="2A4D65"/>
+              <a:srgbClr val="C5D4DC"/>
             </a:solidFill>
             <a:prstDash val="solid"/>
           </a:ln>
@@ -18579,7 +18504,7 @@
           <p:cNvPr id="30" name="">
             <a:extLst xmlns:a="http://schemas.openxmlformats.org/drawingml/2006/main">
               <a:ext uri="{FF2B5EF4-FFF2-40B4-BE49-F238E27FC236}">
-                <a16:creationId xmlns:a16="http://schemas.microsoft.com/office/drawing/2014/main" id="{91DCA4B6-C45E-473C-B178-226A9E194E26}"/>
+                <a16:creationId xmlns:a16="http://schemas.microsoft.com/office/drawing/2014/main" id="{32F110A4-43B0-48D2-AA3C-8C22BF177349}"/>
               </a:ext>
             </a:extLst>
           </p:cNvPr>
@@ -18636,7 +18561,7 @@
           <p:cNvPr id="31" name="">
             <a:extLst xmlns:a="http://schemas.openxmlformats.org/drawingml/2006/main">
               <a:ext uri="{FF2B5EF4-FFF2-40B4-BE49-F238E27FC236}">
-                <a16:creationId xmlns:a16="http://schemas.microsoft.com/office/drawing/2014/main" id="{6CA3A33D-A976-4DBB-BEFA-B1B0229BB692}"/>
+                <a16:creationId xmlns:a16="http://schemas.microsoft.com/office/drawing/2014/main" id="{D4FA40EC-2724-49EB-86BF-716912EB61D8}"/>
               </a:ext>
             </a:extLst>
           </p:cNvPr>
@@ -18668,7 +18593,7 @@
             <a:pPr algn="ctr">
               <a:defRPr sz="975" b="1">
                 <a:solidFill>
-                  <a:srgbClr val="F3F8FA"/>
+                  <a:srgbClr val="132E41"/>
                 </a:solidFill>
                 <a:latin typeface="Arial"/>
                 <a:ea typeface="Arial"/>
@@ -18678,7 +18603,7 @@
             <a:r>
               <a:rPr sz="975" b="1">
                 <a:solidFill>
-                  <a:srgbClr val="F3F8FA"/>
+                  <a:srgbClr val="132E41"/>
                 </a:solidFill>
                 <a:latin typeface="Arial"/>
                 <a:ea typeface="Arial"/>
@@ -18694,7 +18619,7 @@
           <p:cNvPr id="32" name="">
             <a:extLst xmlns:a="http://schemas.openxmlformats.org/drawingml/2006/main">
               <a:ext uri="{FF2B5EF4-FFF2-40B4-BE49-F238E27FC236}">
-                <a16:creationId xmlns:a16="http://schemas.microsoft.com/office/drawing/2014/main" id="{F42706D8-D336-440A-B073-E9F2A642BD9D}"/>
+                <a16:creationId xmlns:a16="http://schemas.microsoft.com/office/drawing/2014/main" id="{0171B823-5858-4AF4-9B97-8A5A42688CA7}"/>
               </a:ext>
             </a:extLst>
           </p:cNvPr>
@@ -18726,7 +18651,7 @@
             <a:pPr algn="ctr">
               <a:defRPr sz="825" b="0">
                 <a:solidFill>
-                  <a:srgbClr val="B8C9D3"/>
+                  <a:srgbClr val="587080"/>
                 </a:solidFill>
                 <a:latin typeface="Arial"/>
                 <a:ea typeface="Arial"/>
@@ -18736,7 +18661,7 @@
             <a:r>
               <a:rPr sz="825" b="0">
                 <a:solidFill>
-                  <a:srgbClr val="B8C9D3"/>
+                  <a:srgbClr val="587080"/>
                 </a:solidFill>
                 <a:latin typeface="Arial"/>
                 <a:ea typeface="Arial"/>
@@ -18752,7 +18677,7 @@
           <p:cNvPr id="33" name="">
             <a:extLst xmlns:a="http://schemas.openxmlformats.org/drawingml/2006/main">
               <a:ext uri="{FF2B5EF4-FFF2-40B4-BE49-F238E27FC236}">
-                <a16:creationId xmlns:a16="http://schemas.microsoft.com/office/drawing/2014/main" id="{74A88F15-DE02-420A-9FB7-E1481E178C3F}"/>
+                <a16:creationId xmlns:a16="http://schemas.microsoft.com/office/drawing/2014/main" id="{43B8E744-39F0-45ED-855E-F7BADECD4CC8}"/>
               </a:ext>
             </a:extLst>
           </p:cNvPr>
@@ -18809,7 +18734,7 @@
           <p:cNvPr id="34" name="">
             <a:extLst xmlns:a="http://schemas.openxmlformats.org/drawingml/2006/main">
               <a:ext uri="{FF2B5EF4-FFF2-40B4-BE49-F238E27FC236}">
-                <a16:creationId xmlns:a16="http://schemas.microsoft.com/office/drawing/2014/main" id="{DAEFFDE9-13EC-4F66-BC94-BF4D6506AEDA}"/>
+                <a16:creationId xmlns:a16="http://schemas.microsoft.com/office/drawing/2014/main" id="{FAE4160C-45FC-4E3D-8DBB-0E07A4A57A2B}"/>
               </a:ext>
             </a:extLst>
           </p:cNvPr>
@@ -18841,7 +18766,7 @@
             <a:pPr algn="ctr">
               <a:defRPr sz="975" b="1">
                 <a:solidFill>
-                  <a:srgbClr val="F3F8FA"/>
+                  <a:srgbClr val="132E41"/>
                 </a:solidFill>
                 <a:latin typeface="Arial"/>
                 <a:ea typeface="Arial"/>
@@ -18851,7 +18776,7 @@
             <a:r>
               <a:rPr sz="975" b="1">
                 <a:solidFill>
-                  <a:srgbClr val="F3F8FA"/>
+                  <a:srgbClr val="132E41"/>
                 </a:solidFill>
                 <a:latin typeface="Arial"/>
                 <a:ea typeface="Arial"/>
@@ -18867,7 +18792,7 @@
           <p:cNvPr id="35" name="">
             <a:extLst xmlns:a="http://schemas.openxmlformats.org/drawingml/2006/main">
               <a:ext uri="{FF2B5EF4-FFF2-40B4-BE49-F238E27FC236}">
-                <a16:creationId xmlns:a16="http://schemas.microsoft.com/office/drawing/2014/main" id="{0886BCE5-2DEE-434B-8067-11E8F6EDF147}"/>
+                <a16:creationId xmlns:a16="http://schemas.microsoft.com/office/drawing/2014/main" id="{4D3B42CC-DF9B-4277-803F-6FBFAD5B0ADA}"/>
               </a:ext>
             </a:extLst>
           </p:cNvPr>
@@ -18899,7 +18824,7 @@
             <a:pPr algn="ctr">
               <a:defRPr sz="825" b="0">
                 <a:solidFill>
-                  <a:srgbClr val="B8C9D3"/>
+                  <a:srgbClr val="587080"/>
                 </a:solidFill>
                 <a:latin typeface="Arial"/>
                 <a:ea typeface="Arial"/>
@@ -18909,7 +18834,7 @@
             <a:r>
               <a:rPr sz="825" b="0">
                 <a:solidFill>
-                  <a:srgbClr val="B8C9D3"/>
+                  <a:srgbClr val="587080"/>
                 </a:solidFill>
                 <a:latin typeface="Arial"/>
                 <a:ea typeface="Arial"/>
@@ -18925,7 +18850,7 @@
           <p:cNvPr id="36" name="">
             <a:extLst xmlns:a="http://schemas.openxmlformats.org/drawingml/2006/main">
               <a:ext uri="{FF2B5EF4-FFF2-40B4-BE49-F238E27FC236}">
-                <a16:creationId xmlns:a16="http://schemas.microsoft.com/office/drawing/2014/main" id="{6C25147D-4AB1-4F81-9284-8DA317A0F7B2}"/>
+                <a16:creationId xmlns:a16="http://schemas.microsoft.com/office/drawing/2014/main" id="{889A350D-3458-4506-BF88-093DA6720838}"/>
               </a:ext>
             </a:extLst>
           </p:cNvPr>
@@ -18945,11 +18870,11 @@
             </a:avLst>
           </a:prstGeom>
           <a:solidFill xmlns:a="http://schemas.openxmlformats.org/drawingml/2006/main">
-            <a:srgbClr val="102F46"/>
+            <a:srgbClr val="FFFFFF"/>
           </a:solidFill>
           <a:ln xmlns:a="http://schemas.openxmlformats.org/drawingml/2006/main" w="9525">
             <a:solidFill>
-              <a:srgbClr val="2A4D65"/>
+              <a:srgbClr val="C5D4DC"/>
             </a:solidFill>
             <a:prstDash val="solid"/>
           </a:ln>
@@ -18960,7 +18885,7 @@
           <p:cNvPr id="37" name="">
             <a:extLst xmlns:a="http://schemas.openxmlformats.org/drawingml/2006/main">
               <a:ext uri="{FF2B5EF4-FFF2-40B4-BE49-F238E27FC236}">
-                <a16:creationId xmlns:a16="http://schemas.microsoft.com/office/drawing/2014/main" id="{66CA039C-62F3-4973-9BB6-C6E432AA31D8}"/>
+                <a16:creationId xmlns:a16="http://schemas.microsoft.com/office/drawing/2014/main" id="{D1DFFD72-13DE-47F6-BD4D-A1AAC47045C8}"/>
               </a:ext>
             </a:extLst>
           </p:cNvPr>
@@ -19018,7 +18943,7 @@
           <p:cNvPr id="38" name="">
             <a:extLst xmlns:a="http://schemas.openxmlformats.org/drawingml/2006/main">
               <a:ext uri="{FF2B5EF4-FFF2-40B4-BE49-F238E27FC236}">
-                <a16:creationId xmlns:a16="http://schemas.microsoft.com/office/drawing/2014/main" id="{736E44F6-AC5D-432F-AAC9-B425E3981150}"/>
+                <a16:creationId xmlns:a16="http://schemas.microsoft.com/office/drawing/2014/main" id="{17D95434-B744-4FE0-8F93-9C62744A4856}"/>
               </a:ext>
             </a:extLst>
           </p:cNvPr>
@@ -19055,7 +18980,7 @@
           <p:cNvPr id="39" name="">
             <a:extLst xmlns:a="http://schemas.openxmlformats.org/drawingml/2006/main">
               <a:ext uri="{FF2B5EF4-FFF2-40B4-BE49-F238E27FC236}">
-                <a16:creationId xmlns:a16="http://schemas.microsoft.com/office/drawing/2014/main" id="{795808B4-A428-4030-9524-C8F1D93C90DD}"/>
+                <a16:creationId xmlns:a16="http://schemas.microsoft.com/office/drawing/2014/main" id="{2F9CB3B7-13ED-495C-814F-1C6D19E75C1A}"/>
               </a:ext>
             </a:extLst>
           </p:cNvPr>
@@ -19087,7 +19012,7 @@
             <a:pPr algn="ctr">
               <a:defRPr sz="975" b="1">
                 <a:solidFill>
-                  <a:srgbClr val="F3F8FA"/>
+                  <a:srgbClr val="132E41"/>
                 </a:solidFill>
                 <a:latin typeface="Arial"/>
                 <a:ea typeface="Arial"/>
@@ -19097,7 +19022,7 @@
             <a:r>
               <a:rPr sz="975" b="1">
                 <a:solidFill>
-                  <a:srgbClr val="F3F8FA"/>
+                  <a:srgbClr val="132E41"/>
                 </a:solidFill>
                 <a:latin typeface="Arial"/>
                 <a:ea typeface="Arial"/>
@@ -19111,7 +19036,7 @@
     </p:spTree>
     <p:extLst>
       <p:ext uri="{BB962C8B-B14F-4D97-AF65-F5344CB8AC3E}">
-        <p14:creationId xmlns:p14="http://schemas.microsoft.com/office/powerpoint/2010/main" val="4766469"/>
+        <p14:creationId xmlns:p14="http://schemas.microsoft.com/office/powerpoint/2010/main" val="1083170420"/>
       </p:ext>
     </p:extLst>
   </p:cSld>
@@ -19123,17 +19048,9 @@
   <p:cSld>
     <p:bg>
       <p:bgPr>
-        <a:gradFill xmlns:a="http://schemas.openxmlformats.org/drawingml/2006/main">
-          <a:gsLst>
-            <a:gs pos="0">
-              <a:srgbClr val="F7F9FA"/>
-            </a:gs>
-            <a:gs pos="100000">
-              <a:srgbClr val="E8EFF2"/>
-            </a:gs>
-          </a:gsLst>
-          <a:lin ang="8100000"/>
-        </a:gradFill>
+        <a:solidFill xmlns:a="http://schemas.openxmlformats.org/drawingml/2006/main">
+          <a:srgbClr val="F3F1EB"/>
+        </a:solidFill>
       </p:bgPr>
     </p:bg>
     <p:spTree>
@@ -19150,7 +19067,7 @@
           <p:cNvPr id="32" name="">
             <a:extLst xmlns:a="http://schemas.openxmlformats.org/drawingml/2006/main">
               <a:ext uri="{FF2B5EF4-FFF2-40B4-BE49-F238E27FC236}">
-                <a16:creationId xmlns:a16="http://schemas.microsoft.com/office/drawing/2014/main" id="{FC2FD5E2-7ECE-4DEC-BD16-23F418CE2ED3}"/>
+                <a16:creationId xmlns:a16="http://schemas.microsoft.com/office/drawing/2014/main" id="{5525D137-6650-420E-B236-2D29B26FAAE4}"/>
               </a:ext>
             </a:extLst>
           </p:cNvPr>
@@ -19207,7 +19124,7 @@
           <p:cNvPr id="2" name="">
             <a:extLst xmlns:a="http://schemas.openxmlformats.org/drawingml/2006/main">
               <a:ext uri="{FF2B5EF4-FFF2-40B4-BE49-F238E27FC236}">
-                <a16:creationId xmlns:a16="http://schemas.microsoft.com/office/drawing/2014/main" id="{034480D1-B653-4F9E-8446-737CF6BA5200}"/>
+                <a16:creationId xmlns:a16="http://schemas.microsoft.com/office/drawing/2014/main" id="{824E54E7-6C1A-4100-8944-F797E2D04EE2}"/>
               </a:ext>
             </a:extLst>
           </p:cNvPr>
@@ -19264,7 +19181,7 @@
           <p:cNvPr id="3" name="">
             <a:extLst xmlns:a="http://schemas.openxmlformats.org/drawingml/2006/main">
               <a:ext uri="{FF2B5EF4-FFF2-40B4-BE49-F238E27FC236}">
-                <a16:creationId xmlns:a16="http://schemas.microsoft.com/office/drawing/2014/main" id="{19C5FBF8-9617-4203-8406-41EDFE596411}"/>
+                <a16:creationId xmlns:a16="http://schemas.microsoft.com/office/drawing/2014/main" id="{A5C2EAF6-9949-4F98-9B55-6F936F01EA0F}"/>
               </a:ext>
             </a:extLst>
           </p:cNvPr>
@@ -19321,7 +19238,7 @@
           <p:cNvPr id="4" name="">
             <a:extLst xmlns:a="http://schemas.openxmlformats.org/drawingml/2006/main">
               <a:ext uri="{FF2B5EF4-FFF2-40B4-BE49-F238E27FC236}">
-                <a16:creationId xmlns:a16="http://schemas.microsoft.com/office/drawing/2014/main" id="{7B95CDCC-87C6-49FC-A33D-037D5C16FB9E}"/>
+                <a16:creationId xmlns:a16="http://schemas.microsoft.com/office/drawing/2014/main" id="{FDA86E83-A3A6-4186-9204-CEE5ED0D93A1}"/>
               </a:ext>
             </a:extLst>
           </p:cNvPr>
@@ -19352,7 +19269,7 @@
           <p:cNvPr id="5" name="">
             <a:extLst xmlns:a="http://schemas.openxmlformats.org/drawingml/2006/main">
               <a:ext uri="{FF2B5EF4-FFF2-40B4-BE49-F238E27FC236}">
-                <a16:creationId xmlns:a16="http://schemas.microsoft.com/office/drawing/2014/main" id="{339F9B30-3888-4DB4-8CBA-F27A504EF9D7}"/>
+                <a16:creationId xmlns:a16="http://schemas.microsoft.com/office/drawing/2014/main" id="{DF4D8768-2A42-4238-9265-E111B9ED54E1}"/>
               </a:ext>
             </a:extLst>
           </p:cNvPr>
@@ -19383,7 +19300,7 @@
           <p:cNvPr id="6" name="">
             <a:extLst xmlns:a="http://schemas.openxmlformats.org/drawingml/2006/main">
               <a:ext uri="{FF2B5EF4-FFF2-40B4-BE49-F238E27FC236}">
-                <a16:creationId xmlns:a16="http://schemas.microsoft.com/office/drawing/2014/main" id="{B0830411-9B28-4FDD-8480-D47963FCFE4A}"/>
+                <a16:creationId xmlns:a16="http://schemas.microsoft.com/office/drawing/2014/main" id="{4192737C-2C6B-4440-B3C2-43B2D50E8EDF}"/>
               </a:ext>
             </a:extLst>
           </p:cNvPr>
@@ -19440,7 +19357,7 @@
           <p:cNvPr id="7" name="">
             <a:extLst xmlns:a="http://schemas.openxmlformats.org/drawingml/2006/main">
               <a:ext uri="{FF2B5EF4-FFF2-40B4-BE49-F238E27FC236}">
-                <a16:creationId xmlns:a16="http://schemas.microsoft.com/office/drawing/2014/main" id="{22E6531E-FD22-42EF-B764-98838A2C768D}"/>
+                <a16:creationId xmlns:a16="http://schemas.microsoft.com/office/drawing/2014/main" id="{76968EDE-7665-4A64-9810-9DFD65FFF599}"/>
               </a:ext>
             </a:extLst>
           </p:cNvPr>
@@ -19497,7 +19414,7 @@
           <p:cNvPr id="8" name="">
             <a:extLst xmlns:a="http://schemas.openxmlformats.org/drawingml/2006/main">
               <a:ext uri="{FF2B5EF4-FFF2-40B4-BE49-F238E27FC236}">
-                <a16:creationId xmlns:a16="http://schemas.microsoft.com/office/drawing/2014/main" id="{E4D03BB6-CFF6-4E61-A535-57A254397ADC}"/>
+                <a16:creationId xmlns:a16="http://schemas.microsoft.com/office/drawing/2014/main" id="{66236B76-0CCA-4512-9F2E-37AD7226DB0C}"/>
               </a:ext>
             </a:extLst>
           </p:cNvPr>
@@ -19554,7 +19471,7 @@
           <p:cNvPr id="9" name="">
             <a:extLst xmlns:a="http://schemas.openxmlformats.org/drawingml/2006/main">
               <a:ext uri="{FF2B5EF4-FFF2-40B4-BE49-F238E27FC236}">
-                <a16:creationId xmlns:a16="http://schemas.microsoft.com/office/drawing/2014/main" id="{525492D0-045F-4ADA-96A5-5D083F48372E}"/>
+                <a16:creationId xmlns:a16="http://schemas.microsoft.com/office/drawing/2014/main" id="{67E961FC-665D-448A-B216-1D5EF3EF9C22}"/>
               </a:ext>
             </a:extLst>
           </p:cNvPr>
@@ -19585,7 +19502,7 @@
           <p:cNvPr id="10" name="">
             <a:extLst xmlns:a="http://schemas.openxmlformats.org/drawingml/2006/main">
               <a:ext uri="{FF2B5EF4-FFF2-40B4-BE49-F238E27FC236}">
-                <a16:creationId xmlns:a16="http://schemas.microsoft.com/office/drawing/2014/main" id="{A63CF97D-6979-43A0-B7B3-3694329880C5}"/>
+                <a16:creationId xmlns:a16="http://schemas.microsoft.com/office/drawing/2014/main" id="{BB08FC35-49FD-4F92-B69C-77790FA961E1}"/>
               </a:ext>
             </a:extLst>
           </p:cNvPr>
@@ -19616,7 +19533,7 @@
           <p:cNvPr id="11" name="">
             <a:extLst xmlns:a="http://schemas.openxmlformats.org/drawingml/2006/main">
               <a:ext uri="{FF2B5EF4-FFF2-40B4-BE49-F238E27FC236}">
-                <a16:creationId xmlns:a16="http://schemas.microsoft.com/office/drawing/2014/main" id="{91D60AFF-BA2A-4A90-ACFA-BF8CD1BF38BF}"/>
+                <a16:creationId xmlns:a16="http://schemas.microsoft.com/office/drawing/2014/main" id="{45EEF821-0A2A-434E-A1AA-9DE0483DDAE6}"/>
               </a:ext>
             </a:extLst>
           </p:cNvPr>
@@ -19674,7 +19591,7 @@
           <p:cNvPr id="12" name="">
             <a:extLst xmlns:a="http://schemas.openxmlformats.org/drawingml/2006/main">
               <a:ext uri="{FF2B5EF4-FFF2-40B4-BE49-F238E27FC236}">
-                <a16:creationId xmlns:a16="http://schemas.microsoft.com/office/drawing/2014/main" id="{8840FF31-6B90-43A6-AD9B-BC6FC540AAA2}"/>
+                <a16:creationId xmlns:a16="http://schemas.microsoft.com/office/drawing/2014/main" id="{87619834-2F08-4233-8C84-4203EE89EC40}"/>
               </a:ext>
             </a:extLst>
           </p:cNvPr>
@@ -19732,7 +19649,7 @@
           <p:cNvPr id="13" name="">
             <a:extLst xmlns:a="http://schemas.openxmlformats.org/drawingml/2006/main">
               <a:ext uri="{FF2B5EF4-FFF2-40B4-BE49-F238E27FC236}">
-                <a16:creationId xmlns:a16="http://schemas.microsoft.com/office/drawing/2014/main" id="{9FA6E402-FEC4-4340-80CF-E2538A9FF197}"/>
+                <a16:creationId xmlns:a16="http://schemas.microsoft.com/office/drawing/2014/main" id="{5359BEEC-2BFF-4AD4-A7F4-C6C48275F995}"/>
               </a:ext>
             </a:extLst>
           </p:cNvPr>
@@ -19790,7 +19707,7 @@
           <p:cNvPr id="14" name="">
             <a:extLst xmlns:a="http://schemas.openxmlformats.org/drawingml/2006/main">
               <a:ext uri="{FF2B5EF4-FFF2-40B4-BE49-F238E27FC236}">
-                <a16:creationId xmlns:a16="http://schemas.microsoft.com/office/drawing/2014/main" id="{7E782392-E253-4EAF-90CD-E3B77C48B787}"/>
+                <a16:creationId xmlns:a16="http://schemas.microsoft.com/office/drawing/2014/main" id="{BA54D1D4-D14F-47BB-92D6-4DCDA026F380}"/>
               </a:ext>
             </a:extLst>
           </p:cNvPr>
@@ -19848,7 +19765,7 @@
           <p:cNvPr id="15" name="">
             <a:extLst xmlns:a="http://schemas.openxmlformats.org/drawingml/2006/main">
               <a:ext uri="{FF2B5EF4-FFF2-40B4-BE49-F238E27FC236}">
-                <a16:creationId xmlns:a16="http://schemas.microsoft.com/office/drawing/2014/main" id="{FE89E85B-F60B-4DBC-AB0B-595420C1EE8C}"/>
+                <a16:creationId xmlns:a16="http://schemas.microsoft.com/office/drawing/2014/main" id="{F92464D1-0304-42D1-A5EA-E15CBB91E26B}"/>
               </a:ext>
             </a:extLst>
           </p:cNvPr>
@@ -19906,7 +19823,7 @@
           <p:cNvPr id="16" name="">
             <a:extLst xmlns:a="http://schemas.openxmlformats.org/drawingml/2006/main">
               <a:ext uri="{FF2B5EF4-FFF2-40B4-BE49-F238E27FC236}">
-                <a16:creationId xmlns:a16="http://schemas.microsoft.com/office/drawing/2014/main" id="{CAB71A94-CDDE-4BE2-8572-B7DA7936036A}"/>
+                <a16:creationId xmlns:a16="http://schemas.microsoft.com/office/drawing/2014/main" id="{D096921C-0E8D-4D27-B742-66094C95EF51}"/>
               </a:ext>
             </a:extLst>
           </p:cNvPr>
@@ -19964,7 +19881,7 @@
           <p:cNvPr id="17" name="">
             <a:extLst xmlns:a="http://schemas.openxmlformats.org/drawingml/2006/main">
               <a:ext uri="{FF2B5EF4-FFF2-40B4-BE49-F238E27FC236}">
-                <a16:creationId xmlns:a16="http://schemas.microsoft.com/office/drawing/2014/main" id="{548BE660-FEC7-41C1-8436-A750FA740F0A}"/>
+                <a16:creationId xmlns:a16="http://schemas.microsoft.com/office/drawing/2014/main" id="{48FA33D4-9C89-4B38-868D-E3F78D683907}"/>
               </a:ext>
             </a:extLst>
           </p:cNvPr>
@@ -19999,7 +19916,7 @@
           <p:cNvPr id="18" name="">
             <a:extLst xmlns:a="http://schemas.openxmlformats.org/drawingml/2006/main">
               <a:ext uri="{FF2B5EF4-FFF2-40B4-BE49-F238E27FC236}">
-                <a16:creationId xmlns:a16="http://schemas.microsoft.com/office/drawing/2014/main" id="{52852947-3982-4999-829E-22607EDD2315}"/>
+                <a16:creationId xmlns:a16="http://schemas.microsoft.com/office/drawing/2014/main" id="{25316540-E119-4AC2-86D9-8D60CFF4D23D}"/>
               </a:ext>
             </a:extLst>
           </p:cNvPr>
@@ -20034,7 +19951,7 @@
           <p:cNvPr id="19" name="">
             <a:extLst xmlns:a="http://schemas.openxmlformats.org/drawingml/2006/main">
               <a:ext uri="{FF2B5EF4-FFF2-40B4-BE49-F238E27FC236}">
-                <a16:creationId xmlns:a16="http://schemas.microsoft.com/office/drawing/2014/main" id="{2EFD183E-454A-49B7-AD60-DBBA0323F6EB}"/>
+                <a16:creationId xmlns:a16="http://schemas.microsoft.com/office/drawing/2014/main" id="{1A861B51-7805-4677-9C70-E8C3109EAB7F}"/>
               </a:ext>
             </a:extLst>
           </p:cNvPr>
@@ -20096,7 +20013,7 @@
           <p:nvPr/>
         </p:nvPicPr>
         <p:blipFill>
-          <a:blip xmlns:r="http://schemas.openxmlformats.org/officeDocument/2006/relationships" xmlns:a="http://schemas.openxmlformats.org/drawingml/2006/main" r:embed="Rccea9c58b3ed4b26"/>
+          <a:blip xmlns:r="http://schemas.openxmlformats.org/officeDocument/2006/relationships" xmlns:a="http://schemas.openxmlformats.org/drawingml/2006/main" r:embed="R5482b7631acf4bc8"/>
           <a:stretch xmlns:a="http://schemas.openxmlformats.org/drawingml/2006/main"/>
         </p:blipFill>
         <p:spPr>
@@ -20116,7 +20033,7 @@
           <p:cNvPr id="21" name="">
             <a:extLst xmlns:a="http://schemas.openxmlformats.org/drawingml/2006/main">
               <a:ext uri="{FF2B5EF4-FFF2-40B4-BE49-F238E27FC236}">
-                <a16:creationId xmlns:a16="http://schemas.microsoft.com/office/drawing/2014/main" id="{674130A7-A40C-4301-8E02-6D9833D2FD88}"/>
+                <a16:creationId xmlns:a16="http://schemas.microsoft.com/office/drawing/2014/main" id="{E92A41D2-C3C9-4E0E-A32A-C92A132FF513}"/>
               </a:ext>
             </a:extLst>
           </p:cNvPr>
@@ -20174,7 +20091,7 @@
           <p:cNvPr id="22" name="">
             <a:extLst xmlns:a="http://schemas.openxmlformats.org/drawingml/2006/main">
               <a:ext uri="{FF2B5EF4-FFF2-40B4-BE49-F238E27FC236}">
-                <a16:creationId xmlns:a16="http://schemas.microsoft.com/office/drawing/2014/main" id="{3EC57919-182C-4A66-8DC1-0B7A6E7528CB}"/>
+                <a16:creationId xmlns:a16="http://schemas.microsoft.com/office/drawing/2014/main" id="{D97DB9DE-C8FD-46E5-8E9C-F03059ECB3AB}"/>
               </a:ext>
             </a:extLst>
           </p:cNvPr>
@@ -20209,7 +20126,7 @@
           <p:cNvPr id="23" name="">
             <a:extLst xmlns:a="http://schemas.openxmlformats.org/drawingml/2006/main">
               <a:ext uri="{FF2B5EF4-FFF2-40B4-BE49-F238E27FC236}">
-                <a16:creationId xmlns:a16="http://schemas.microsoft.com/office/drawing/2014/main" id="{D34CBA44-9B7B-4556-9C78-E0412166921D}"/>
+                <a16:creationId xmlns:a16="http://schemas.microsoft.com/office/drawing/2014/main" id="{3433F99D-0F80-45F3-A635-F4CECE01278D}"/>
               </a:ext>
             </a:extLst>
           </p:cNvPr>
@@ -20267,7 +20184,7 @@
           <p:cNvPr id="24" name="">
             <a:extLst xmlns:a="http://schemas.openxmlformats.org/drawingml/2006/main">
               <a:ext uri="{FF2B5EF4-FFF2-40B4-BE49-F238E27FC236}">
-                <a16:creationId xmlns:a16="http://schemas.microsoft.com/office/drawing/2014/main" id="{170E82A8-9DAE-4B68-9B2B-7A904615CA18}"/>
+                <a16:creationId xmlns:a16="http://schemas.microsoft.com/office/drawing/2014/main" id="{B50C8851-0364-4C68-8DA0-3E51357ED986}"/>
               </a:ext>
             </a:extLst>
           </p:cNvPr>
@@ -20325,7 +20242,7 @@
           <p:cNvPr id="25" name="">
             <a:extLst xmlns:a="http://schemas.openxmlformats.org/drawingml/2006/main">
               <a:ext uri="{FF2B5EF4-FFF2-40B4-BE49-F238E27FC236}">
-                <a16:creationId xmlns:a16="http://schemas.microsoft.com/office/drawing/2014/main" id="{928FCE62-8438-45C0-A462-8D17FB6F5372}"/>
+                <a16:creationId xmlns:a16="http://schemas.microsoft.com/office/drawing/2014/main" id="{5248CBB6-A9B2-4E84-99B8-9C8A8BBF3D0F}"/>
               </a:ext>
             </a:extLst>
           </p:cNvPr>
@@ -20360,7 +20277,7 @@
           <p:cNvPr id="26" name="">
             <a:extLst xmlns:a="http://schemas.openxmlformats.org/drawingml/2006/main">
               <a:ext uri="{FF2B5EF4-FFF2-40B4-BE49-F238E27FC236}">
-                <a16:creationId xmlns:a16="http://schemas.microsoft.com/office/drawing/2014/main" id="{B23DFE7F-434B-49DD-9EDF-A2CE897A4140}"/>
+                <a16:creationId xmlns:a16="http://schemas.microsoft.com/office/drawing/2014/main" id="{097D9C77-B66D-47CA-923A-9C6E4333D9AD}"/>
               </a:ext>
             </a:extLst>
           </p:cNvPr>
@@ -20418,7 +20335,7 @@
           <p:cNvPr id="27" name="">
             <a:extLst xmlns:a="http://schemas.openxmlformats.org/drawingml/2006/main">
               <a:ext uri="{FF2B5EF4-FFF2-40B4-BE49-F238E27FC236}">
-                <a16:creationId xmlns:a16="http://schemas.microsoft.com/office/drawing/2014/main" id="{421ED225-6C38-4E2D-ADB8-C4B1CF6238DF}"/>
+                <a16:creationId xmlns:a16="http://schemas.microsoft.com/office/drawing/2014/main" id="{C1D86FBD-3828-4C31-8F5B-40C9CBC2C318}"/>
               </a:ext>
             </a:extLst>
           </p:cNvPr>
@@ -20476,7 +20393,7 @@
           <p:cNvPr id="28" name="">
             <a:extLst xmlns:a="http://schemas.openxmlformats.org/drawingml/2006/main">
               <a:ext uri="{FF2B5EF4-FFF2-40B4-BE49-F238E27FC236}">
-                <a16:creationId xmlns:a16="http://schemas.microsoft.com/office/drawing/2014/main" id="{BA80C798-364B-48FB-888C-16EC0BB296DD}"/>
+                <a16:creationId xmlns:a16="http://schemas.microsoft.com/office/drawing/2014/main" id="{0BF1E22E-4628-4CA2-9818-ED3BAC735A32}"/>
               </a:ext>
             </a:extLst>
           </p:cNvPr>
@@ -20511,7 +20428,7 @@
           <p:cNvPr id="29" name="">
             <a:extLst xmlns:a="http://schemas.openxmlformats.org/drawingml/2006/main">
               <a:ext uri="{FF2B5EF4-FFF2-40B4-BE49-F238E27FC236}">
-                <a16:creationId xmlns:a16="http://schemas.microsoft.com/office/drawing/2014/main" id="{736EBF81-FA75-4541-BABE-2EBC5558A2D8}"/>
+                <a16:creationId xmlns:a16="http://schemas.microsoft.com/office/drawing/2014/main" id="{379C9154-F3B2-4FF5-A87C-9BD8732FDD81}"/>
               </a:ext>
             </a:extLst>
           </p:cNvPr>
@@ -20569,7 +20486,7 @@
           <p:cNvPr id="30" name="">
             <a:extLst xmlns:a="http://schemas.openxmlformats.org/drawingml/2006/main">
               <a:ext uri="{FF2B5EF4-FFF2-40B4-BE49-F238E27FC236}">
-                <a16:creationId xmlns:a16="http://schemas.microsoft.com/office/drawing/2014/main" id="{AA679604-C058-4542-A357-DC876880D884}"/>
+                <a16:creationId xmlns:a16="http://schemas.microsoft.com/office/drawing/2014/main" id="{D3170D01-67F5-443F-99D9-BF297A708E89}"/>
               </a:ext>
             </a:extLst>
           </p:cNvPr>
@@ -20627,7 +20544,7 @@
           <p:cNvPr id="31" name="">
             <a:extLst xmlns:a="http://schemas.openxmlformats.org/drawingml/2006/main">
               <a:ext uri="{FF2B5EF4-FFF2-40B4-BE49-F238E27FC236}">
-                <a16:creationId xmlns:a16="http://schemas.microsoft.com/office/drawing/2014/main" id="{A7E88CCA-425B-45F6-8F5D-F8F3BAF5D5E2}"/>
+                <a16:creationId xmlns:a16="http://schemas.microsoft.com/office/drawing/2014/main" id="{299F78D8-DD57-4240-8146-A7BBBE9AADA9}"/>
               </a:ext>
             </a:extLst>
           </p:cNvPr>
@@ -20706,7 +20623,7 @@
     </p:spTree>
     <p:extLst>
       <p:ext uri="{BB962C8B-B14F-4D97-AF65-F5344CB8AC3E}">
-        <p14:creationId xmlns:p14="http://schemas.microsoft.com/office/powerpoint/2010/main" val="484994037"/>
+        <p14:creationId xmlns:p14="http://schemas.microsoft.com/office/powerpoint/2010/main" val="499452206"/>
       </p:ext>
     </p:extLst>
   </p:cSld>
@@ -20718,17 +20635,9 @@
   <p:cSld>
     <p:bg>
       <p:bgPr>
-        <a:gradFill xmlns:a="http://schemas.openxmlformats.org/drawingml/2006/main">
-          <a:gsLst>
-            <a:gs pos="0">
-              <a:srgbClr val="F8FAFB"/>
-            </a:gs>
-            <a:gs pos="100000">
-              <a:srgbClr val="E7EFF3"/>
-            </a:gs>
-          </a:gsLst>
-          <a:lin ang="8100000"/>
-        </a:gradFill>
+        <a:solidFill xmlns:a="http://schemas.openxmlformats.org/drawingml/2006/main">
+          <a:srgbClr val="F3F1EB"/>
+        </a:solidFill>
       </p:bgPr>
     </p:bg>
     <p:spTree>
@@ -20745,7 +20654,7 @@
           <p:cNvPr id="32" name="">
             <a:extLst xmlns:a="http://schemas.openxmlformats.org/drawingml/2006/main">
               <a:ext uri="{FF2B5EF4-FFF2-40B4-BE49-F238E27FC236}">
-                <a16:creationId xmlns:a16="http://schemas.microsoft.com/office/drawing/2014/main" id="{652FF93D-F4E5-4ECB-8226-9F1E3F9B366B}"/>
+                <a16:creationId xmlns:a16="http://schemas.microsoft.com/office/drawing/2014/main" id="{392BFF6E-985B-45A3-AEBF-2D49C2C30AA4}"/>
               </a:ext>
             </a:extLst>
           </p:cNvPr>
@@ -20802,7 +20711,7 @@
           <p:cNvPr id="2" name="">
             <a:extLst xmlns:a="http://schemas.openxmlformats.org/drawingml/2006/main">
               <a:ext uri="{FF2B5EF4-FFF2-40B4-BE49-F238E27FC236}">
-                <a16:creationId xmlns:a16="http://schemas.microsoft.com/office/drawing/2014/main" id="{84426FF6-E857-469C-B133-E1DFCCE194B3}"/>
+                <a16:creationId xmlns:a16="http://schemas.microsoft.com/office/drawing/2014/main" id="{607AABE1-79A7-4AEA-9229-B612B968EC9E}"/>
               </a:ext>
             </a:extLst>
           </p:cNvPr>
@@ -20859,7 +20768,7 @@
           <p:cNvPr id="3" name="">
             <a:extLst xmlns:a="http://schemas.openxmlformats.org/drawingml/2006/main">
               <a:ext uri="{FF2B5EF4-FFF2-40B4-BE49-F238E27FC236}">
-                <a16:creationId xmlns:a16="http://schemas.microsoft.com/office/drawing/2014/main" id="{EACAF6BA-0EA5-4172-989D-B31CD2C52D59}"/>
+                <a16:creationId xmlns:a16="http://schemas.microsoft.com/office/drawing/2014/main" id="{57581E4B-4839-4598-A4C9-E7FD0827250F}"/>
               </a:ext>
             </a:extLst>
           </p:cNvPr>
@@ -20916,7 +20825,7 @@
           <p:cNvPr id="4" name="">
             <a:extLst xmlns:a="http://schemas.openxmlformats.org/drawingml/2006/main">
               <a:ext uri="{FF2B5EF4-FFF2-40B4-BE49-F238E27FC236}">
-                <a16:creationId xmlns:a16="http://schemas.microsoft.com/office/drawing/2014/main" id="{12474B1C-D3D7-440F-974C-75FDE7319F9C}"/>
+                <a16:creationId xmlns:a16="http://schemas.microsoft.com/office/drawing/2014/main" id="{85624920-306D-4019-A79F-1855F534F6FB}"/>
               </a:ext>
             </a:extLst>
           </p:cNvPr>
@@ -20947,7 +20856,7 @@
           <p:cNvPr id="5" name="">
             <a:extLst xmlns:a="http://schemas.openxmlformats.org/drawingml/2006/main">
               <a:ext uri="{FF2B5EF4-FFF2-40B4-BE49-F238E27FC236}">
-                <a16:creationId xmlns:a16="http://schemas.microsoft.com/office/drawing/2014/main" id="{C180468F-63CE-4EFC-BB6A-6A0403A5AB93}"/>
+                <a16:creationId xmlns:a16="http://schemas.microsoft.com/office/drawing/2014/main" id="{F80EBAFA-B8BF-4066-BB94-160B467D8F52}"/>
               </a:ext>
             </a:extLst>
           </p:cNvPr>
@@ -20978,7 +20887,7 @@
           <p:cNvPr id="6" name="">
             <a:extLst xmlns:a="http://schemas.openxmlformats.org/drawingml/2006/main">
               <a:ext uri="{FF2B5EF4-FFF2-40B4-BE49-F238E27FC236}">
-                <a16:creationId xmlns:a16="http://schemas.microsoft.com/office/drawing/2014/main" id="{27FECF90-4885-4AA5-A31C-CAA1787BC431}"/>
+                <a16:creationId xmlns:a16="http://schemas.microsoft.com/office/drawing/2014/main" id="{3271CC82-96E8-43C9-A16B-2A76934A6E0A}"/>
               </a:ext>
             </a:extLst>
           </p:cNvPr>
@@ -21035,7 +20944,7 @@
           <p:cNvPr id="7" name="">
             <a:extLst xmlns:a="http://schemas.openxmlformats.org/drawingml/2006/main">
               <a:ext uri="{FF2B5EF4-FFF2-40B4-BE49-F238E27FC236}">
-                <a16:creationId xmlns:a16="http://schemas.microsoft.com/office/drawing/2014/main" id="{7F6FE383-D1C6-488B-8FBC-719E79C61A53}"/>
+                <a16:creationId xmlns:a16="http://schemas.microsoft.com/office/drawing/2014/main" id="{2C68B8F0-D0E5-420B-98E5-87A628BC54DD}"/>
               </a:ext>
             </a:extLst>
           </p:cNvPr>
@@ -21092,7 +21001,7 @@
           <p:cNvPr id="8" name="">
             <a:extLst xmlns:a="http://schemas.openxmlformats.org/drawingml/2006/main">
               <a:ext uri="{FF2B5EF4-FFF2-40B4-BE49-F238E27FC236}">
-                <a16:creationId xmlns:a16="http://schemas.microsoft.com/office/drawing/2014/main" id="{6075E0B9-9187-4E8A-BD1B-87F0E96ED462}"/>
+                <a16:creationId xmlns:a16="http://schemas.microsoft.com/office/drawing/2014/main" id="{02E0065D-FA51-40F8-BA86-B7C51ED57470}"/>
               </a:ext>
             </a:extLst>
           </p:cNvPr>
@@ -21149,7 +21058,7 @@
           <p:cNvPr id="9" name="">
             <a:extLst xmlns:a="http://schemas.openxmlformats.org/drawingml/2006/main">
               <a:ext uri="{FF2B5EF4-FFF2-40B4-BE49-F238E27FC236}">
-                <a16:creationId xmlns:a16="http://schemas.microsoft.com/office/drawing/2014/main" id="{4434C8F2-F018-49FC-AE7F-EEDFE214D459}"/>
+                <a16:creationId xmlns:a16="http://schemas.microsoft.com/office/drawing/2014/main" id="{032AA200-66DE-42C5-9505-65AD9CF16F84}"/>
               </a:ext>
             </a:extLst>
           </p:cNvPr>
@@ -21180,7 +21089,7 @@
           <p:cNvPr id="10" name="">
             <a:extLst xmlns:a="http://schemas.openxmlformats.org/drawingml/2006/main">
               <a:ext uri="{FF2B5EF4-FFF2-40B4-BE49-F238E27FC236}">
-                <a16:creationId xmlns:a16="http://schemas.microsoft.com/office/drawing/2014/main" id="{91D59BAF-C7CF-4A4F-8113-9F66984655F3}"/>
+                <a16:creationId xmlns:a16="http://schemas.microsoft.com/office/drawing/2014/main" id="{7E94685D-C874-4CC1-9237-9EB79F757752}"/>
               </a:ext>
             </a:extLst>
           </p:cNvPr>
@@ -21211,7 +21120,7 @@
           <p:cNvPr id="11" name="">
             <a:extLst xmlns:a="http://schemas.openxmlformats.org/drawingml/2006/main">
               <a:ext uri="{FF2B5EF4-FFF2-40B4-BE49-F238E27FC236}">
-                <a16:creationId xmlns:a16="http://schemas.microsoft.com/office/drawing/2014/main" id="{CF73DC15-EB65-449B-841D-1870B1BE16EC}"/>
+                <a16:creationId xmlns:a16="http://schemas.microsoft.com/office/drawing/2014/main" id="{5E4312FB-1478-42C4-95C5-06C62A5F96E7}"/>
               </a:ext>
             </a:extLst>
           </p:cNvPr>
@@ -21269,7 +21178,7 @@
           <p:cNvPr id="12" name="">
             <a:extLst xmlns:a="http://schemas.openxmlformats.org/drawingml/2006/main">
               <a:ext uri="{FF2B5EF4-FFF2-40B4-BE49-F238E27FC236}">
-                <a16:creationId xmlns:a16="http://schemas.microsoft.com/office/drawing/2014/main" id="{8FA53472-38DD-4D7C-8F59-AC85E5DD6B4A}"/>
+                <a16:creationId xmlns:a16="http://schemas.microsoft.com/office/drawing/2014/main" id="{022CFF9C-E001-40E0-9612-8B5F4270EC4D}"/>
               </a:ext>
             </a:extLst>
           </p:cNvPr>
@@ -21327,7 +21236,7 @@
           <p:cNvPr id="13" name="">
             <a:extLst xmlns:a="http://schemas.openxmlformats.org/drawingml/2006/main">
               <a:ext uri="{FF2B5EF4-FFF2-40B4-BE49-F238E27FC236}">
-                <a16:creationId xmlns:a16="http://schemas.microsoft.com/office/drawing/2014/main" id="{984EFC14-0C12-4C26-954F-C6805D34C23E}"/>
+                <a16:creationId xmlns:a16="http://schemas.microsoft.com/office/drawing/2014/main" id="{AB995FAA-6452-4FB7-BEF3-F8471D32FB2E}"/>
               </a:ext>
             </a:extLst>
           </p:cNvPr>
@@ -21385,7 +21294,7 @@
           <p:cNvPr id="14" name="">
             <a:extLst xmlns:a="http://schemas.openxmlformats.org/drawingml/2006/main">
               <a:ext uri="{FF2B5EF4-FFF2-40B4-BE49-F238E27FC236}">
-                <a16:creationId xmlns:a16="http://schemas.microsoft.com/office/drawing/2014/main" id="{C3591105-2575-4FF2-B67D-54839928D841}"/>
+                <a16:creationId xmlns:a16="http://schemas.microsoft.com/office/drawing/2014/main" id="{EF66A09F-176F-436A-9790-DCF4D96EE82A}"/>
               </a:ext>
             </a:extLst>
           </p:cNvPr>
@@ -21443,7 +21352,7 @@
           <p:cNvPr id="15" name="">
             <a:extLst xmlns:a="http://schemas.openxmlformats.org/drawingml/2006/main">
               <a:ext uri="{FF2B5EF4-FFF2-40B4-BE49-F238E27FC236}">
-                <a16:creationId xmlns:a16="http://schemas.microsoft.com/office/drawing/2014/main" id="{40914D6B-5B5C-449B-9136-FB4392DC90E8}"/>
+                <a16:creationId xmlns:a16="http://schemas.microsoft.com/office/drawing/2014/main" id="{22A39E42-B912-4ABB-B940-13B6AAD5CCF8}"/>
               </a:ext>
             </a:extLst>
           </p:cNvPr>
@@ -21501,7 +21410,7 @@
           <p:cNvPr id="16" name="">
             <a:extLst xmlns:a="http://schemas.openxmlformats.org/drawingml/2006/main">
               <a:ext uri="{FF2B5EF4-FFF2-40B4-BE49-F238E27FC236}">
-                <a16:creationId xmlns:a16="http://schemas.microsoft.com/office/drawing/2014/main" id="{1304F635-6DFE-4133-8687-5B4952DB640B}"/>
+                <a16:creationId xmlns:a16="http://schemas.microsoft.com/office/drawing/2014/main" id="{82185EE2-5355-4482-88AF-3BA779BDFE29}"/>
               </a:ext>
             </a:extLst>
           </p:cNvPr>
@@ -21559,7 +21468,7 @@
           <p:cNvPr id="17" name="">
             <a:extLst xmlns:a="http://schemas.openxmlformats.org/drawingml/2006/main">
               <a:ext uri="{FF2B5EF4-FFF2-40B4-BE49-F238E27FC236}">
-                <a16:creationId xmlns:a16="http://schemas.microsoft.com/office/drawing/2014/main" id="{BCE54CAD-CBFF-434D-A049-81B9F02DDB7F}"/>
+                <a16:creationId xmlns:a16="http://schemas.microsoft.com/office/drawing/2014/main" id="{4661C973-7056-4F48-A808-F8F30C3AB915}"/>
               </a:ext>
             </a:extLst>
           </p:cNvPr>
@@ -21594,7 +21503,7 @@
           <p:cNvPr id="18" name="">
             <a:extLst xmlns:a="http://schemas.openxmlformats.org/drawingml/2006/main">
               <a:ext uri="{FF2B5EF4-FFF2-40B4-BE49-F238E27FC236}">
-                <a16:creationId xmlns:a16="http://schemas.microsoft.com/office/drawing/2014/main" id="{0FC1A14B-DA74-4343-B888-F0D3249D3E83}"/>
+                <a16:creationId xmlns:a16="http://schemas.microsoft.com/office/drawing/2014/main" id="{E1476D3D-5626-49CC-9DD9-FB9B89048DAF}"/>
               </a:ext>
             </a:extLst>
           </p:cNvPr>
@@ -21629,7 +21538,7 @@
           <p:cNvPr id="19" name="">
             <a:extLst xmlns:a="http://schemas.openxmlformats.org/drawingml/2006/main">
               <a:ext uri="{FF2B5EF4-FFF2-40B4-BE49-F238E27FC236}">
-                <a16:creationId xmlns:a16="http://schemas.microsoft.com/office/drawing/2014/main" id="{7022F05F-5F5F-4EC1-A386-4DB42D080D93}"/>
+                <a16:creationId xmlns:a16="http://schemas.microsoft.com/office/drawing/2014/main" id="{9E257DE6-1E8E-4CC2-8CA6-854D75E764F9}"/>
               </a:ext>
             </a:extLst>
           </p:cNvPr>
@@ -21691,7 +21600,7 @@
           <p:nvPr/>
         </p:nvPicPr>
         <p:blipFill>
-          <a:blip xmlns:r="http://schemas.openxmlformats.org/officeDocument/2006/relationships" xmlns:a="http://schemas.openxmlformats.org/drawingml/2006/main" r:embed="R67a5482473334e67"/>
+          <a:blip xmlns:r="http://schemas.openxmlformats.org/officeDocument/2006/relationships" xmlns:a="http://schemas.openxmlformats.org/drawingml/2006/main" r:embed="R80caff7a98b842aa"/>
           <a:stretch xmlns:a="http://schemas.openxmlformats.org/drawingml/2006/main"/>
         </p:blipFill>
         <p:spPr>
@@ -21711,7 +21620,7 @@
           <p:cNvPr id="21" name="">
             <a:extLst xmlns:a="http://schemas.openxmlformats.org/drawingml/2006/main">
               <a:ext uri="{FF2B5EF4-FFF2-40B4-BE49-F238E27FC236}">
-                <a16:creationId xmlns:a16="http://schemas.microsoft.com/office/drawing/2014/main" id="{7CD83B7D-16D2-4C4B-AD48-5EA90C2941E8}"/>
+                <a16:creationId xmlns:a16="http://schemas.microsoft.com/office/drawing/2014/main" id="{351E4B88-36EF-4263-B53D-4CF7393FEFB4}"/>
               </a:ext>
             </a:extLst>
           </p:cNvPr>
@@ -21769,7 +21678,7 @@
           <p:cNvPr id="22" name="">
             <a:extLst xmlns:a="http://schemas.openxmlformats.org/drawingml/2006/main">
               <a:ext uri="{FF2B5EF4-FFF2-40B4-BE49-F238E27FC236}">
-                <a16:creationId xmlns:a16="http://schemas.microsoft.com/office/drawing/2014/main" id="{2A48CA88-3A12-4211-B613-60B84CC27301}"/>
+                <a16:creationId xmlns:a16="http://schemas.microsoft.com/office/drawing/2014/main" id="{65134B3C-75A3-40E2-9923-1EC468A33FCD}"/>
               </a:ext>
             </a:extLst>
           </p:cNvPr>
@@ -21804,7 +21713,7 @@
           <p:cNvPr id="23" name="">
             <a:extLst xmlns:a="http://schemas.openxmlformats.org/drawingml/2006/main">
               <a:ext uri="{FF2B5EF4-FFF2-40B4-BE49-F238E27FC236}">
-                <a16:creationId xmlns:a16="http://schemas.microsoft.com/office/drawing/2014/main" id="{2FB422B7-C741-44E0-B13B-919DFA0FC0FD}"/>
+                <a16:creationId xmlns:a16="http://schemas.microsoft.com/office/drawing/2014/main" id="{AEDBEF0B-A9C7-4A94-AD91-EC4E985895F2}"/>
               </a:ext>
             </a:extLst>
           </p:cNvPr>
@@ -21862,7 +21771,7 @@
           <p:cNvPr id="24" name="">
             <a:extLst xmlns:a="http://schemas.openxmlformats.org/drawingml/2006/main">
               <a:ext uri="{FF2B5EF4-FFF2-40B4-BE49-F238E27FC236}">
-                <a16:creationId xmlns:a16="http://schemas.microsoft.com/office/drawing/2014/main" id="{99CD3365-339E-40C9-8123-A7D1143D82FD}"/>
+                <a16:creationId xmlns:a16="http://schemas.microsoft.com/office/drawing/2014/main" id="{036588FC-6BB9-465F-AD73-F351F9F20EE2}"/>
               </a:ext>
             </a:extLst>
           </p:cNvPr>
@@ -21920,7 +21829,7 @@
           <p:cNvPr id="25" name="">
             <a:extLst xmlns:a="http://schemas.openxmlformats.org/drawingml/2006/main">
               <a:ext uri="{FF2B5EF4-FFF2-40B4-BE49-F238E27FC236}">
-                <a16:creationId xmlns:a16="http://schemas.microsoft.com/office/drawing/2014/main" id="{87DB351D-2AE2-4805-A0D1-DDD8FFD76334}"/>
+                <a16:creationId xmlns:a16="http://schemas.microsoft.com/office/drawing/2014/main" id="{D079EA51-2131-48A1-AC21-EA9921DE0246}"/>
               </a:ext>
             </a:extLst>
           </p:cNvPr>
@@ -21955,7 +21864,7 @@
           <p:cNvPr id="26" name="">
             <a:extLst xmlns:a="http://schemas.openxmlformats.org/drawingml/2006/main">
               <a:ext uri="{FF2B5EF4-FFF2-40B4-BE49-F238E27FC236}">
-                <a16:creationId xmlns:a16="http://schemas.microsoft.com/office/drawing/2014/main" id="{CF4EB3F9-1CD3-4551-9CD9-2E3DEBB5E0D0}"/>
+                <a16:creationId xmlns:a16="http://schemas.microsoft.com/office/drawing/2014/main" id="{0C8F255D-6EF1-4FF7-99CB-A466B3B8EED8}"/>
               </a:ext>
             </a:extLst>
           </p:cNvPr>
@@ -22013,7 +21922,7 @@
           <p:cNvPr id="27" name="">
             <a:extLst xmlns:a="http://schemas.openxmlformats.org/drawingml/2006/main">
               <a:ext uri="{FF2B5EF4-FFF2-40B4-BE49-F238E27FC236}">
-                <a16:creationId xmlns:a16="http://schemas.microsoft.com/office/drawing/2014/main" id="{41EF2446-539F-4F87-9CF4-8916D9EFFD9E}"/>
+                <a16:creationId xmlns:a16="http://schemas.microsoft.com/office/drawing/2014/main" id="{135435A6-F2D7-4903-A132-9434CB85B942}"/>
               </a:ext>
             </a:extLst>
           </p:cNvPr>
@@ -22071,7 +21980,7 @@
           <p:cNvPr id="28" name="">
             <a:extLst xmlns:a="http://schemas.openxmlformats.org/drawingml/2006/main">
               <a:ext uri="{FF2B5EF4-FFF2-40B4-BE49-F238E27FC236}">
-                <a16:creationId xmlns:a16="http://schemas.microsoft.com/office/drawing/2014/main" id="{03420ED4-1D69-4260-9150-E1E49CA3E8D7}"/>
+                <a16:creationId xmlns:a16="http://schemas.microsoft.com/office/drawing/2014/main" id="{963A30FD-2BB1-4AD8-96D5-A8D51B27A873}"/>
               </a:ext>
             </a:extLst>
           </p:cNvPr>
@@ -22106,7 +22015,7 @@
           <p:cNvPr id="29" name="">
             <a:extLst xmlns:a="http://schemas.openxmlformats.org/drawingml/2006/main">
               <a:ext uri="{FF2B5EF4-FFF2-40B4-BE49-F238E27FC236}">
-                <a16:creationId xmlns:a16="http://schemas.microsoft.com/office/drawing/2014/main" id="{44939EEB-744F-4D59-B6B8-A3632A990059}"/>
+                <a16:creationId xmlns:a16="http://schemas.microsoft.com/office/drawing/2014/main" id="{85DF8299-9EAF-4AFE-BA7B-4D9B820FC96B}"/>
               </a:ext>
             </a:extLst>
           </p:cNvPr>
@@ -22164,7 +22073,7 @@
           <p:cNvPr id="30" name="">
             <a:extLst xmlns:a="http://schemas.openxmlformats.org/drawingml/2006/main">
               <a:ext uri="{FF2B5EF4-FFF2-40B4-BE49-F238E27FC236}">
-                <a16:creationId xmlns:a16="http://schemas.microsoft.com/office/drawing/2014/main" id="{8653739E-2144-4C16-BEFE-0AF4E5AF8D52}"/>
+                <a16:creationId xmlns:a16="http://schemas.microsoft.com/office/drawing/2014/main" id="{B9A04211-49B3-41EE-8B82-2BE530466A4B}"/>
               </a:ext>
             </a:extLst>
           </p:cNvPr>
@@ -22222,7 +22131,7 @@
           <p:cNvPr id="31" name="">
             <a:extLst xmlns:a="http://schemas.openxmlformats.org/drawingml/2006/main">
               <a:ext uri="{FF2B5EF4-FFF2-40B4-BE49-F238E27FC236}">
-                <a16:creationId xmlns:a16="http://schemas.microsoft.com/office/drawing/2014/main" id="{EBDD588F-AC16-4B3E-BB8E-F8DD17CF3F3E}"/>
+                <a16:creationId xmlns:a16="http://schemas.microsoft.com/office/drawing/2014/main" id="{27D2CDA0-4E24-4278-BAD3-8CED10BBD970}"/>
               </a:ext>
             </a:extLst>
           </p:cNvPr>
@@ -22301,7 +22210,7 @@
     </p:spTree>
     <p:extLst>
       <p:ext uri="{BB962C8B-B14F-4D97-AF65-F5344CB8AC3E}">
-        <p14:creationId xmlns:p14="http://schemas.microsoft.com/office/powerpoint/2010/main" val="869927505"/>
+        <p14:creationId xmlns:p14="http://schemas.microsoft.com/office/powerpoint/2010/main" val="330279588"/>
       </p:ext>
     </p:extLst>
   </p:cSld>
@@ -22313,17 +22222,9 @@
   <p:cSld>
     <p:bg>
       <p:bgPr>
-        <a:gradFill xmlns:a="http://schemas.openxmlformats.org/drawingml/2006/main">
-          <a:gsLst>
-            <a:gs pos="0">
-              <a:srgbClr val="F8FAFB"/>
-            </a:gs>
-            <a:gs pos="100000">
-              <a:srgbClr val="E7EFF3"/>
-            </a:gs>
-          </a:gsLst>
-          <a:lin ang="8100000"/>
-        </a:gradFill>
+        <a:solidFill xmlns:a="http://schemas.openxmlformats.org/drawingml/2006/main">
+          <a:srgbClr val="F3F1EB"/>
+        </a:solidFill>
       </p:bgPr>
     </p:bg>
     <p:spTree>
@@ -22340,7 +22241,7 @@
           <p:cNvPr id="31" name="">
             <a:extLst xmlns:a="http://schemas.openxmlformats.org/drawingml/2006/main">
               <a:ext uri="{FF2B5EF4-FFF2-40B4-BE49-F238E27FC236}">
-                <a16:creationId xmlns:a16="http://schemas.microsoft.com/office/drawing/2014/main" id="{638C8133-B4EA-4A0D-A23F-7CDB19FA5BEB}"/>
+                <a16:creationId xmlns:a16="http://schemas.microsoft.com/office/drawing/2014/main" id="{A06749CD-ABFC-4056-9740-1A79F130AC25}"/>
               </a:ext>
             </a:extLst>
           </p:cNvPr>
@@ -22397,7 +22298,7 @@
           <p:cNvPr id="2" name="">
             <a:extLst xmlns:a="http://schemas.openxmlformats.org/drawingml/2006/main">
               <a:ext uri="{FF2B5EF4-FFF2-40B4-BE49-F238E27FC236}">
-                <a16:creationId xmlns:a16="http://schemas.microsoft.com/office/drawing/2014/main" id="{3955A939-13A6-43B0-96AC-BB60DCCE07A8}"/>
+                <a16:creationId xmlns:a16="http://schemas.microsoft.com/office/drawing/2014/main" id="{73E7008F-5F21-4A2A-87D7-5C3CDD517CBD}"/>
               </a:ext>
             </a:extLst>
           </p:cNvPr>
@@ -22454,7 +22355,7 @@
           <p:cNvPr id="3" name="">
             <a:extLst xmlns:a="http://schemas.openxmlformats.org/drawingml/2006/main">
               <a:ext uri="{FF2B5EF4-FFF2-40B4-BE49-F238E27FC236}">
-                <a16:creationId xmlns:a16="http://schemas.microsoft.com/office/drawing/2014/main" id="{DBCBDB63-63C2-4E60-9AB4-8120352679E4}"/>
+                <a16:creationId xmlns:a16="http://schemas.microsoft.com/office/drawing/2014/main" id="{45A37592-AE49-41AC-9536-148C3848B85B}"/>
               </a:ext>
             </a:extLst>
           </p:cNvPr>
@@ -22511,7 +22412,7 @@
           <p:cNvPr id="4" name="">
             <a:extLst xmlns:a="http://schemas.openxmlformats.org/drawingml/2006/main">
               <a:ext uri="{FF2B5EF4-FFF2-40B4-BE49-F238E27FC236}">
-                <a16:creationId xmlns:a16="http://schemas.microsoft.com/office/drawing/2014/main" id="{D10679B2-490C-4E3D-A02F-6B59D3052B98}"/>
+                <a16:creationId xmlns:a16="http://schemas.microsoft.com/office/drawing/2014/main" id="{1C0586EE-327E-47C8-8639-ED9D23667FA1}"/>
               </a:ext>
             </a:extLst>
           </p:cNvPr>
@@ -22542,7 +22443,7 @@
           <p:cNvPr id="5" name="">
             <a:extLst xmlns:a="http://schemas.openxmlformats.org/drawingml/2006/main">
               <a:ext uri="{FF2B5EF4-FFF2-40B4-BE49-F238E27FC236}">
-                <a16:creationId xmlns:a16="http://schemas.microsoft.com/office/drawing/2014/main" id="{BEAF824E-8904-4FB2-9129-9DB367BB02B3}"/>
+                <a16:creationId xmlns:a16="http://schemas.microsoft.com/office/drawing/2014/main" id="{640DA7D5-C0EB-4BCB-B000-FE71C262E93C}"/>
               </a:ext>
             </a:extLst>
           </p:cNvPr>
@@ -22573,7 +22474,7 @@
           <p:cNvPr id="6" name="">
             <a:extLst xmlns:a="http://schemas.openxmlformats.org/drawingml/2006/main">
               <a:ext uri="{FF2B5EF4-FFF2-40B4-BE49-F238E27FC236}">
-                <a16:creationId xmlns:a16="http://schemas.microsoft.com/office/drawing/2014/main" id="{03129569-65BB-4311-B826-C72F9F72F2CE}"/>
+                <a16:creationId xmlns:a16="http://schemas.microsoft.com/office/drawing/2014/main" id="{C1DA1E62-0465-478D-9B95-327AC1242E85}"/>
               </a:ext>
             </a:extLst>
           </p:cNvPr>
@@ -22630,7 +22531,7 @@
           <p:cNvPr id="7" name="">
             <a:extLst xmlns:a="http://schemas.openxmlformats.org/drawingml/2006/main">
               <a:ext uri="{FF2B5EF4-FFF2-40B4-BE49-F238E27FC236}">
-                <a16:creationId xmlns:a16="http://schemas.microsoft.com/office/drawing/2014/main" id="{E8D55A68-A99F-4E1C-B5C0-AE11B9C06E06}"/>
+                <a16:creationId xmlns:a16="http://schemas.microsoft.com/office/drawing/2014/main" id="{FD3D391A-046A-4079-B143-F41EC51F27D2}"/>
               </a:ext>
             </a:extLst>
           </p:cNvPr>
@@ -22687,7 +22588,7 @@
           <p:cNvPr id="8" name="">
             <a:extLst xmlns:a="http://schemas.openxmlformats.org/drawingml/2006/main">
               <a:ext uri="{FF2B5EF4-FFF2-40B4-BE49-F238E27FC236}">
-                <a16:creationId xmlns:a16="http://schemas.microsoft.com/office/drawing/2014/main" id="{01E6F79B-70BE-43B9-8D5E-3662746BB704}"/>
+                <a16:creationId xmlns:a16="http://schemas.microsoft.com/office/drawing/2014/main" id="{51C71156-1AD7-48A0-90B5-332817A3357E}"/>
               </a:ext>
             </a:extLst>
           </p:cNvPr>
@@ -22744,7 +22645,7 @@
           <p:cNvPr id="9" name="">
             <a:extLst xmlns:a="http://schemas.openxmlformats.org/drawingml/2006/main">
               <a:ext uri="{FF2B5EF4-FFF2-40B4-BE49-F238E27FC236}">
-                <a16:creationId xmlns:a16="http://schemas.microsoft.com/office/drawing/2014/main" id="{010579D2-5692-413A-AC86-78508CC7118A}"/>
+                <a16:creationId xmlns:a16="http://schemas.microsoft.com/office/drawing/2014/main" id="{5BEEFC83-57AC-4AC4-90E8-DE8E4758E695}"/>
               </a:ext>
             </a:extLst>
           </p:cNvPr>
@@ -22775,7 +22676,7 @@
           <p:cNvPr id="10" name="">
             <a:extLst xmlns:a="http://schemas.openxmlformats.org/drawingml/2006/main">
               <a:ext uri="{FF2B5EF4-FFF2-40B4-BE49-F238E27FC236}">
-                <a16:creationId xmlns:a16="http://schemas.microsoft.com/office/drawing/2014/main" id="{83042B18-43E2-4333-B8D1-CED00C05DDEB}"/>
+                <a16:creationId xmlns:a16="http://schemas.microsoft.com/office/drawing/2014/main" id="{654EB27E-BA9C-4283-8B52-AB8999587E16}"/>
               </a:ext>
             </a:extLst>
           </p:cNvPr>
@@ -22806,7 +22707,7 @@
           <p:cNvPr id="11" name="">
             <a:extLst xmlns:a="http://schemas.openxmlformats.org/drawingml/2006/main">
               <a:ext uri="{FF2B5EF4-FFF2-40B4-BE49-F238E27FC236}">
-                <a16:creationId xmlns:a16="http://schemas.microsoft.com/office/drawing/2014/main" id="{A1A3EC8E-3BE8-402E-8C0F-78CC87C15AB0}"/>
+                <a16:creationId xmlns:a16="http://schemas.microsoft.com/office/drawing/2014/main" id="{4B46962D-37B2-4826-879B-3FB953B3D9E1}"/>
               </a:ext>
             </a:extLst>
           </p:cNvPr>
@@ -22864,7 +22765,7 @@
           <p:cNvPr id="12" name="">
             <a:extLst xmlns:a="http://schemas.openxmlformats.org/drawingml/2006/main">
               <a:ext uri="{FF2B5EF4-FFF2-40B4-BE49-F238E27FC236}">
-                <a16:creationId xmlns:a16="http://schemas.microsoft.com/office/drawing/2014/main" id="{544DF217-96C3-4984-9496-C694BA37BDE9}"/>
+                <a16:creationId xmlns:a16="http://schemas.microsoft.com/office/drawing/2014/main" id="{3B042941-A9D6-4A02-89E1-1A1E18929D81}"/>
               </a:ext>
             </a:extLst>
           </p:cNvPr>
@@ -22922,7 +22823,7 @@
           <p:cNvPr id="13" name="">
             <a:extLst xmlns:a="http://schemas.openxmlformats.org/drawingml/2006/main">
               <a:ext uri="{FF2B5EF4-FFF2-40B4-BE49-F238E27FC236}">
-                <a16:creationId xmlns:a16="http://schemas.microsoft.com/office/drawing/2014/main" id="{B05ECE96-AD93-48D3-8144-0CB8660F50EC}"/>
+                <a16:creationId xmlns:a16="http://schemas.microsoft.com/office/drawing/2014/main" id="{AA0681E6-4121-4C05-A11D-D640B2FF97F1}"/>
               </a:ext>
             </a:extLst>
           </p:cNvPr>
@@ -22980,7 +22881,7 @@
           <p:cNvPr id="14" name="">
             <a:extLst xmlns:a="http://schemas.openxmlformats.org/drawingml/2006/main">
               <a:ext uri="{FF2B5EF4-FFF2-40B4-BE49-F238E27FC236}">
-                <a16:creationId xmlns:a16="http://schemas.microsoft.com/office/drawing/2014/main" id="{85E0B825-E39F-4AEA-9224-44393636877D}"/>
+                <a16:creationId xmlns:a16="http://schemas.microsoft.com/office/drawing/2014/main" id="{5216B7E7-7BA4-4884-99A5-2CCFEA8F9162}"/>
               </a:ext>
             </a:extLst>
           </p:cNvPr>
@@ -23038,7 +22939,7 @@
           <p:cNvPr id="15" name="">
             <a:extLst xmlns:a="http://schemas.openxmlformats.org/drawingml/2006/main">
               <a:ext uri="{FF2B5EF4-FFF2-40B4-BE49-F238E27FC236}">
-                <a16:creationId xmlns:a16="http://schemas.microsoft.com/office/drawing/2014/main" id="{9AE29DC4-4572-467B-8CE0-4F94B657A8EF}"/>
+                <a16:creationId xmlns:a16="http://schemas.microsoft.com/office/drawing/2014/main" id="{6CD89DE3-8AB6-4FF4-80C4-8FEB79C7842E}"/>
               </a:ext>
             </a:extLst>
           </p:cNvPr>
@@ -23096,7 +22997,7 @@
           <p:cNvPr id="16" name="">
             <a:extLst xmlns:a="http://schemas.openxmlformats.org/drawingml/2006/main">
               <a:ext uri="{FF2B5EF4-FFF2-40B4-BE49-F238E27FC236}">
-                <a16:creationId xmlns:a16="http://schemas.microsoft.com/office/drawing/2014/main" id="{4F0150E0-8144-4D8B-A27B-87A65C1A8412}"/>
+                <a16:creationId xmlns:a16="http://schemas.microsoft.com/office/drawing/2014/main" id="{637C34D7-039B-46DC-B0A6-2CE977B2FD3D}"/>
               </a:ext>
             </a:extLst>
           </p:cNvPr>
@@ -23154,7 +23055,7 @@
           <p:cNvPr id="17" name="">
             <a:extLst xmlns:a="http://schemas.openxmlformats.org/drawingml/2006/main">
               <a:ext uri="{FF2B5EF4-FFF2-40B4-BE49-F238E27FC236}">
-                <a16:creationId xmlns:a16="http://schemas.microsoft.com/office/drawing/2014/main" id="{EF13195E-A2E9-4830-A0AF-2030A9835003}"/>
+                <a16:creationId xmlns:a16="http://schemas.microsoft.com/office/drawing/2014/main" id="{BE803382-EC44-4B02-9FC8-74D66C2B2CBF}"/>
               </a:ext>
             </a:extLst>
           </p:cNvPr>
@@ -23189,7 +23090,7 @@
           <p:cNvPr id="18" name="">
             <a:extLst xmlns:a="http://schemas.openxmlformats.org/drawingml/2006/main">
               <a:ext uri="{FF2B5EF4-FFF2-40B4-BE49-F238E27FC236}">
-                <a16:creationId xmlns:a16="http://schemas.microsoft.com/office/drawing/2014/main" id="{BE4A2D07-12E2-487F-A15B-8E42637F9970}"/>
+                <a16:creationId xmlns:a16="http://schemas.microsoft.com/office/drawing/2014/main" id="{9EAD39A7-0A90-4787-9F74-FFA200D13F51}"/>
               </a:ext>
             </a:extLst>
           </p:cNvPr>
@@ -23224,7 +23125,7 @@
           <p:cNvPr id="19" name="">
             <a:extLst xmlns:a="http://schemas.openxmlformats.org/drawingml/2006/main">
               <a:ext uri="{FF2B5EF4-FFF2-40B4-BE49-F238E27FC236}">
-                <a16:creationId xmlns:a16="http://schemas.microsoft.com/office/drawing/2014/main" id="{9D8C49CB-AFAD-4906-A74D-F58C8F9E607F}"/>
+                <a16:creationId xmlns:a16="http://schemas.microsoft.com/office/drawing/2014/main" id="{26CE1FFC-3DEB-4735-83E4-768CB745801D}"/>
               </a:ext>
             </a:extLst>
           </p:cNvPr>
@@ -23286,7 +23187,7 @@
           <p:nvPr/>
         </p:nvPicPr>
         <p:blipFill>
-          <a:blip xmlns:r="http://schemas.openxmlformats.org/officeDocument/2006/relationships" xmlns:a="http://schemas.openxmlformats.org/drawingml/2006/main" r:embed="Rc17e1c914005448b"/>
+          <a:blip xmlns:r="http://schemas.openxmlformats.org/officeDocument/2006/relationships" xmlns:a="http://schemas.openxmlformats.org/drawingml/2006/main" r:embed="R05e9449ddaaa4b67"/>
           <a:stretch xmlns:a="http://schemas.openxmlformats.org/drawingml/2006/main"/>
         </p:blipFill>
         <p:spPr>
@@ -23306,7 +23207,7 @@
           <p:cNvPr id="21" name="">
             <a:extLst xmlns:a="http://schemas.openxmlformats.org/drawingml/2006/main">
               <a:ext uri="{FF2B5EF4-FFF2-40B4-BE49-F238E27FC236}">
-                <a16:creationId xmlns:a16="http://schemas.microsoft.com/office/drawing/2014/main" id="{6DCE4D85-6676-41AA-9654-64F9A544CBB1}"/>
+                <a16:creationId xmlns:a16="http://schemas.microsoft.com/office/drawing/2014/main" id="{DC3182EA-44E3-4C25-9364-DDA83295ABC4}"/>
               </a:ext>
             </a:extLst>
           </p:cNvPr>
@@ -23341,7 +23242,7 @@
           <p:cNvPr id="22" name="">
             <a:extLst xmlns:a="http://schemas.openxmlformats.org/drawingml/2006/main">
               <a:ext uri="{FF2B5EF4-FFF2-40B4-BE49-F238E27FC236}">
-                <a16:creationId xmlns:a16="http://schemas.microsoft.com/office/drawing/2014/main" id="{9C3AA463-0315-4E63-9D85-C895289DE196}"/>
+                <a16:creationId xmlns:a16="http://schemas.microsoft.com/office/drawing/2014/main" id="{9D8CEE68-D7F7-4B51-AEAC-290E895FDE33}"/>
               </a:ext>
             </a:extLst>
           </p:cNvPr>
@@ -23399,7 +23300,7 @@
           <p:cNvPr id="23" name="">
             <a:extLst xmlns:a="http://schemas.openxmlformats.org/drawingml/2006/main">
               <a:ext uri="{FF2B5EF4-FFF2-40B4-BE49-F238E27FC236}">
-                <a16:creationId xmlns:a16="http://schemas.microsoft.com/office/drawing/2014/main" id="{3E466303-1F8A-4087-8BC7-C465EBB4F603}"/>
+                <a16:creationId xmlns:a16="http://schemas.microsoft.com/office/drawing/2014/main" id="{3CE63108-B564-4865-AD80-4F94048F4D56}"/>
               </a:ext>
             </a:extLst>
           </p:cNvPr>
@@ -23457,7 +23358,7 @@
           <p:cNvPr id="24" name="">
             <a:extLst xmlns:a="http://schemas.openxmlformats.org/drawingml/2006/main">
               <a:ext uri="{FF2B5EF4-FFF2-40B4-BE49-F238E27FC236}">
-                <a16:creationId xmlns:a16="http://schemas.microsoft.com/office/drawing/2014/main" id="{B5CE0D2C-2B0A-4F51-9C30-37113418E03B}"/>
+                <a16:creationId xmlns:a16="http://schemas.microsoft.com/office/drawing/2014/main" id="{2BAB23ED-242F-4272-B76A-51857D2F3255}"/>
               </a:ext>
             </a:extLst>
           </p:cNvPr>
@@ -23515,7 +23416,7 @@
           <p:cNvPr id="25" name="">
             <a:extLst xmlns:a="http://schemas.openxmlformats.org/drawingml/2006/main">
               <a:ext uri="{FF2B5EF4-FFF2-40B4-BE49-F238E27FC236}">
-                <a16:creationId xmlns:a16="http://schemas.microsoft.com/office/drawing/2014/main" id="{AD080BB9-E500-4238-9B88-9732F94F89CD}"/>
+                <a16:creationId xmlns:a16="http://schemas.microsoft.com/office/drawing/2014/main" id="{D269FC34-FBFA-47CC-8CD1-BB65C55AB796}"/>
               </a:ext>
             </a:extLst>
           </p:cNvPr>
@@ -23573,7 +23474,7 @@
           <p:cNvPr id="26" name="">
             <a:extLst xmlns:a="http://schemas.openxmlformats.org/drawingml/2006/main">
               <a:ext uri="{FF2B5EF4-FFF2-40B4-BE49-F238E27FC236}">
-                <a16:creationId xmlns:a16="http://schemas.microsoft.com/office/drawing/2014/main" id="{554A2B0D-093C-48F5-94E9-205E2F21133C}"/>
+                <a16:creationId xmlns:a16="http://schemas.microsoft.com/office/drawing/2014/main" id="{2FD27583-1402-471D-97F4-74750596E3C3}"/>
               </a:ext>
             </a:extLst>
           </p:cNvPr>
@@ -23631,7 +23532,7 @@
           <p:cNvPr id="27" name="">
             <a:extLst xmlns:a="http://schemas.openxmlformats.org/drawingml/2006/main">
               <a:ext uri="{FF2B5EF4-FFF2-40B4-BE49-F238E27FC236}">
-                <a16:creationId xmlns:a16="http://schemas.microsoft.com/office/drawing/2014/main" id="{E4F45278-A393-49F1-8687-8F34C69DD960}"/>
+                <a16:creationId xmlns:a16="http://schemas.microsoft.com/office/drawing/2014/main" id="{4888598A-620F-4896-A2D8-5D4C88C07B51}"/>
               </a:ext>
             </a:extLst>
           </p:cNvPr>
@@ -23689,7 +23590,7 @@
           <p:cNvPr id="28" name="">
             <a:extLst xmlns:a="http://schemas.openxmlformats.org/drawingml/2006/main">
               <a:ext uri="{FF2B5EF4-FFF2-40B4-BE49-F238E27FC236}">
-                <a16:creationId xmlns:a16="http://schemas.microsoft.com/office/drawing/2014/main" id="{149341CD-4D5D-4B6B-BCF1-3F35E75C90DD}"/>
+                <a16:creationId xmlns:a16="http://schemas.microsoft.com/office/drawing/2014/main" id="{64336DED-5C5A-4C07-BF87-F14AC529BDE1}"/>
               </a:ext>
             </a:extLst>
           </p:cNvPr>
@@ -23747,7 +23648,7 @@
           <p:cNvPr id="29" name="">
             <a:extLst xmlns:a="http://schemas.openxmlformats.org/drawingml/2006/main">
               <a:ext uri="{FF2B5EF4-FFF2-40B4-BE49-F238E27FC236}">
-                <a16:creationId xmlns:a16="http://schemas.microsoft.com/office/drawing/2014/main" id="{51CC87C6-8F2B-4B48-AB60-8E6A067047E0}"/>
+                <a16:creationId xmlns:a16="http://schemas.microsoft.com/office/drawing/2014/main" id="{B41DB712-EDF3-432A-A12F-367EBA37C388}"/>
               </a:ext>
             </a:extLst>
           </p:cNvPr>
@@ -23784,7 +23685,7 @@
           <p:cNvPr id="30" name="">
             <a:extLst xmlns:a="http://schemas.openxmlformats.org/drawingml/2006/main">
               <a:ext uri="{FF2B5EF4-FFF2-40B4-BE49-F238E27FC236}">
-                <a16:creationId xmlns:a16="http://schemas.microsoft.com/office/drawing/2014/main" id="{8BC09A7B-83BC-419D-87AF-5323C66CA804}"/>
+                <a16:creationId xmlns:a16="http://schemas.microsoft.com/office/drawing/2014/main" id="{75BC61FE-87C9-49EB-9BB9-0E462E6A348E}"/>
               </a:ext>
             </a:extLst>
           </p:cNvPr>
@@ -23840,7 +23741,7 @@
     </p:spTree>
     <p:extLst>
       <p:ext uri="{BB962C8B-B14F-4D97-AF65-F5344CB8AC3E}">
-        <p14:creationId xmlns:p14="http://schemas.microsoft.com/office/powerpoint/2010/main" val="1189057695"/>
+        <p14:creationId xmlns:p14="http://schemas.microsoft.com/office/powerpoint/2010/main" val="1997774080"/>
       </p:ext>
     </p:extLst>
   </p:cSld>
@@ -23852,17 +23753,9 @@
   <p:cSld>
     <p:bg>
       <p:bgPr>
-        <a:gradFill xmlns:a="http://schemas.openxmlformats.org/drawingml/2006/main">
-          <a:gsLst>
-            <a:gs pos="0">
-              <a:srgbClr val="F6F9FA"/>
-            </a:gs>
-            <a:gs pos="100000">
-              <a:srgbClr val="E8F0F3"/>
-            </a:gs>
-          </a:gsLst>
-          <a:lin ang="8100000"/>
-        </a:gradFill>
+        <a:solidFill xmlns:a="http://schemas.openxmlformats.org/drawingml/2006/main">
+          <a:srgbClr val="F3F1EB"/>
+        </a:solidFill>
       </p:bgPr>
     </p:bg>
     <p:spTree>
@@ -23879,7 +23772,7 @@
           <p:cNvPr id="31" name="">
             <a:extLst xmlns:a="http://schemas.openxmlformats.org/drawingml/2006/main">
               <a:ext uri="{FF2B5EF4-FFF2-40B4-BE49-F238E27FC236}">
-                <a16:creationId xmlns:a16="http://schemas.microsoft.com/office/drawing/2014/main" id="{975F69D5-1951-4BCE-9F7C-325899FABC53}"/>
+                <a16:creationId xmlns:a16="http://schemas.microsoft.com/office/drawing/2014/main" id="{C81F250B-FC4E-4CA6-B04C-82E8D2F7B094}"/>
               </a:ext>
             </a:extLst>
           </p:cNvPr>
@@ -23936,7 +23829,7 @@
           <p:cNvPr id="2" name="">
             <a:extLst xmlns:a="http://schemas.openxmlformats.org/drawingml/2006/main">
               <a:ext uri="{FF2B5EF4-FFF2-40B4-BE49-F238E27FC236}">
-                <a16:creationId xmlns:a16="http://schemas.microsoft.com/office/drawing/2014/main" id="{F606BB2C-2063-4F4C-99A9-150517D50177}"/>
+                <a16:creationId xmlns:a16="http://schemas.microsoft.com/office/drawing/2014/main" id="{1982DB2D-5C41-4946-8E19-6DFB15B9DCE2}"/>
               </a:ext>
             </a:extLst>
           </p:cNvPr>
@@ -23993,7 +23886,7 @@
           <p:cNvPr id="3" name="">
             <a:extLst xmlns:a="http://schemas.openxmlformats.org/drawingml/2006/main">
               <a:ext uri="{FF2B5EF4-FFF2-40B4-BE49-F238E27FC236}">
-                <a16:creationId xmlns:a16="http://schemas.microsoft.com/office/drawing/2014/main" id="{F9410081-4F31-445E-B77B-F59A8D5328E1}"/>
+                <a16:creationId xmlns:a16="http://schemas.microsoft.com/office/drawing/2014/main" id="{64B82D1F-1117-4F58-A614-654E61C2BF55}"/>
               </a:ext>
             </a:extLst>
           </p:cNvPr>
@@ -24050,7 +23943,7 @@
           <p:cNvPr id="4" name="">
             <a:extLst xmlns:a="http://schemas.openxmlformats.org/drawingml/2006/main">
               <a:ext uri="{FF2B5EF4-FFF2-40B4-BE49-F238E27FC236}">
-                <a16:creationId xmlns:a16="http://schemas.microsoft.com/office/drawing/2014/main" id="{926BE5EF-3552-4C10-A830-D5517AE0A3F7}"/>
+                <a16:creationId xmlns:a16="http://schemas.microsoft.com/office/drawing/2014/main" id="{63A623E8-E095-453B-808B-80A65A2D2CCD}"/>
               </a:ext>
             </a:extLst>
           </p:cNvPr>
@@ -24081,7 +23974,7 @@
           <p:cNvPr id="5" name="">
             <a:extLst xmlns:a="http://schemas.openxmlformats.org/drawingml/2006/main">
               <a:ext uri="{FF2B5EF4-FFF2-40B4-BE49-F238E27FC236}">
-                <a16:creationId xmlns:a16="http://schemas.microsoft.com/office/drawing/2014/main" id="{634FDB64-0FA9-484C-ABF3-116C0B0C212F}"/>
+                <a16:creationId xmlns:a16="http://schemas.microsoft.com/office/drawing/2014/main" id="{BC9F0753-E0E6-483F-91E6-A73B8C13D995}"/>
               </a:ext>
             </a:extLst>
           </p:cNvPr>
@@ -24112,7 +24005,7 @@
           <p:cNvPr id="6" name="">
             <a:extLst xmlns:a="http://schemas.openxmlformats.org/drawingml/2006/main">
               <a:ext uri="{FF2B5EF4-FFF2-40B4-BE49-F238E27FC236}">
-                <a16:creationId xmlns:a16="http://schemas.microsoft.com/office/drawing/2014/main" id="{82CE3945-6143-4E34-A3E9-A439F7EA63F8}"/>
+                <a16:creationId xmlns:a16="http://schemas.microsoft.com/office/drawing/2014/main" id="{01EC4055-07F2-45EE-96E4-6F569DB07175}"/>
               </a:ext>
             </a:extLst>
           </p:cNvPr>
@@ -24169,7 +24062,7 @@
           <p:cNvPr id="7" name="">
             <a:extLst xmlns:a="http://schemas.openxmlformats.org/drawingml/2006/main">
               <a:ext uri="{FF2B5EF4-FFF2-40B4-BE49-F238E27FC236}">
-                <a16:creationId xmlns:a16="http://schemas.microsoft.com/office/drawing/2014/main" id="{7B86F43E-3DAC-41DE-8D60-56D9445BDC29}"/>
+                <a16:creationId xmlns:a16="http://schemas.microsoft.com/office/drawing/2014/main" id="{C7A048B2-D00C-4B42-BFDE-4F88AB0E0F5B}"/>
               </a:ext>
             </a:extLst>
           </p:cNvPr>
@@ -24226,7 +24119,7 @@
           <p:cNvPr id="8" name="">
             <a:extLst xmlns:a="http://schemas.openxmlformats.org/drawingml/2006/main">
               <a:ext uri="{FF2B5EF4-FFF2-40B4-BE49-F238E27FC236}">
-                <a16:creationId xmlns:a16="http://schemas.microsoft.com/office/drawing/2014/main" id="{80C8CE52-1158-4E23-B0E9-D6BF7381136D}"/>
+                <a16:creationId xmlns:a16="http://schemas.microsoft.com/office/drawing/2014/main" id="{61BB6A67-7835-46C0-B8EE-78332946587F}"/>
               </a:ext>
             </a:extLst>
           </p:cNvPr>
@@ -24283,7 +24176,7 @@
           <p:cNvPr id="9" name="">
             <a:extLst xmlns:a="http://schemas.openxmlformats.org/drawingml/2006/main">
               <a:ext uri="{FF2B5EF4-FFF2-40B4-BE49-F238E27FC236}">
-                <a16:creationId xmlns:a16="http://schemas.microsoft.com/office/drawing/2014/main" id="{08795981-B935-4867-A29E-A475F36CC4A5}"/>
+                <a16:creationId xmlns:a16="http://schemas.microsoft.com/office/drawing/2014/main" id="{C76634AF-117A-4844-8A8D-C9DBEB9E14AE}"/>
               </a:ext>
             </a:extLst>
           </p:cNvPr>
@@ -24314,7 +24207,7 @@
           <p:cNvPr id="10" name="">
             <a:extLst xmlns:a="http://schemas.openxmlformats.org/drawingml/2006/main">
               <a:ext uri="{FF2B5EF4-FFF2-40B4-BE49-F238E27FC236}">
-                <a16:creationId xmlns:a16="http://schemas.microsoft.com/office/drawing/2014/main" id="{ED661706-9DBE-4F2F-A81B-8A5A0FD4C6A8}"/>
+                <a16:creationId xmlns:a16="http://schemas.microsoft.com/office/drawing/2014/main" id="{2547D24A-3727-4573-AECA-2E3ACCC858B4}"/>
               </a:ext>
             </a:extLst>
           </p:cNvPr>
@@ -24345,7 +24238,7 @@
           <p:cNvPr id="11" name="">
             <a:extLst xmlns:a="http://schemas.openxmlformats.org/drawingml/2006/main">
               <a:ext uri="{FF2B5EF4-FFF2-40B4-BE49-F238E27FC236}">
-                <a16:creationId xmlns:a16="http://schemas.microsoft.com/office/drawing/2014/main" id="{A2E44FA6-9465-4EB7-89C3-FE0B52447AC9}"/>
+                <a16:creationId xmlns:a16="http://schemas.microsoft.com/office/drawing/2014/main" id="{71D10D89-8EC3-4FD9-B1E6-F1D4F0BC5FA7}"/>
               </a:ext>
             </a:extLst>
           </p:cNvPr>
@@ -24403,7 +24296,7 @@
           <p:cNvPr id="12" name="">
             <a:extLst xmlns:a="http://schemas.openxmlformats.org/drawingml/2006/main">
               <a:ext uri="{FF2B5EF4-FFF2-40B4-BE49-F238E27FC236}">
-                <a16:creationId xmlns:a16="http://schemas.microsoft.com/office/drawing/2014/main" id="{89979A0D-D5AE-4393-A27A-57B6FDA9BBBF}"/>
+                <a16:creationId xmlns:a16="http://schemas.microsoft.com/office/drawing/2014/main" id="{DE313819-7DD5-4121-80CC-A70443DEF199}"/>
               </a:ext>
             </a:extLst>
           </p:cNvPr>
@@ -24461,7 +24354,7 @@
           <p:cNvPr id="13" name="">
             <a:extLst xmlns:a="http://schemas.openxmlformats.org/drawingml/2006/main">
               <a:ext uri="{FF2B5EF4-FFF2-40B4-BE49-F238E27FC236}">
-                <a16:creationId xmlns:a16="http://schemas.microsoft.com/office/drawing/2014/main" id="{19D21375-7868-4FF9-A300-714C42979E3B}"/>
+                <a16:creationId xmlns:a16="http://schemas.microsoft.com/office/drawing/2014/main" id="{4CFED221-F7EB-4B3D-9A73-3AA1D3218335}"/>
               </a:ext>
             </a:extLst>
           </p:cNvPr>
@@ -24519,7 +24412,7 @@
           <p:cNvPr id="14" name="">
             <a:extLst xmlns:a="http://schemas.openxmlformats.org/drawingml/2006/main">
               <a:ext uri="{FF2B5EF4-FFF2-40B4-BE49-F238E27FC236}">
-                <a16:creationId xmlns:a16="http://schemas.microsoft.com/office/drawing/2014/main" id="{3180D560-AFE4-42F8-BD3E-24527C570260}"/>
+                <a16:creationId xmlns:a16="http://schemas.microsoft.com/office/drawing/2014/main" id="{CC300B7B-6CD3-4D28-BCFC-C9BC7EBA6EC6}"/>
               </a:ext>
             </a:extLst>
           </p:cNvPr>
@@ -24577,7 +24470,7 @@
           <p:cNvPr id="15" name="">
             <a:extLst xmlns:a="http://schemas.openxmlformats.org/drawingml/2006/main">
               <a:ext uri="{FF2B5EF4-FFF2-40B4-BE49-F238E27FC236}">
-                <a16:creationId xmlns:a16="http://schemas.microsoft.com/office/drawing/2014/main" id="{B03B568A-8BC7-4009-B620-8E08EE29BFBB}"/>
+                <a16:creationId xmlns:a16="http://schemas.microsoft.com/office/drawing/2014/main" id="{A24994C1-ED92-46A4-9A1B-843098580D98}"/>
               </a:ext>
             </a:extLst>
           </p:cNvPr>
@@ -24635,7 +24528,7 @@
           <p:cNvPr id="16" name="">
             <a:extLst xmlns:a="http://schemas.openxmlformats.org/drawingml/2006/main">
               <a:ext uri="{FF2B5EF4-FFF2-40B4-BE49-F238E27FC236}">
-                <a16:creationId xmlns:a16="http://schemas.microsoft.com/office/drawing/2014/main" id="{21123496-43E8-4D7D-B63E-1229B4CBB02C}"/>
+                <a16:creationId xmlns:a16="http://schemas.microsoft.com/office/drawing/2014/main" id="{F11DC89C-9F6B-47FC-8903-E5B04E07C9C0}"/>
               </a:ext>
             </a:extLst>
           </p:cNvPr>
@@ -24693,7 +24586,7 @@
           <p:cNvPr id="17" name="">
             <a:extLst xmlns:a="http://schemas.openxmlformats.org/drawingml/2006/main">
               <a:ext uri="{FF2B5EF4-FFF2-40B4-BE49-F238E27FC236}">
-                <a16:creationId xmlns:a16="http://schemas.microsoft.com/office/drawing/2014/main" id="{D3F7FFF3-9F81-4436-931F-23F331A8D55A}"/>
+                <a16:creationId xmlns:a16="http://schemas.microsoft.com/office/drawing/2014/main" id="{604AF2A3-8A9F-4200-B239-6187DFC419ED}"/>
               </a:ext>
             </a:extLst>
           </p:cNvPr>
@@ -24728,7 +24621,7 @@
           <p:cNvPr id="18" name="">
             <a:extLst xmlns:a="http://schemas.openxmlformats.org/drawingml/2006/main">
               <a:ext uri="{FF2B5EF4-FFF2-40B4-BE49-F238E27FC236}">
-                <a16:creationId xmlns:a16="http://schemas.microsoft.com/office/drawing/2014/main" id="{D6AF1BB8-0886-4425-A713-925B7FAD214C}"/>
+                <a16:creationId xmlns:a16="http://schemas.microsoft.com/office/drawing/2014/main" id="{7AF22149-1783-4449-AEF1-368B2784E517}"/>
               </a:ext>
             </a:extLst>
           </p:cNvPr>
@@ -24763,7 +24656,7 @@
           <p:cNvPr id="19" name="">
             <a:extLst xmlns:a="http://schemas.openxmlformats.org/drawingml/2006/main">
               <a:ext uri="{FF2B5EF4-FFF2-40B4-BE49-F238E27FC236}">
-                <a16:creationId xmlns:a16="http://schemas.microsoft.com/office/drawing/2014/main" id="{AE00FCC9-1448-44A8-92BE-8FC7C9686794}"/>
+                <a16:creationId xmlns:a16="http://schemas.microsoft.com/office/drawing/2014/main" id="{14681F45-403D-48FC-A8E9-3E7CC9B25728}"/>
               </a:ext>
             </a:extLst>
           </p:cNvPr>
@@ -24825,7 +24718,7 @@
           <p:nvPr/>
         </p:nvPicPr>
         <p:blipFill>
-          <a:blip xmlns:r="http://schemas.openxmlformats.org/officeDocument/2006/relationships" xmlns:a="http://schemas.openxmlformats.org/drawingml/2006/main" r:embed="R768641a3b58b40c1"/>
+          <a:blip xmlns:r="http://schemas.openxmlformats.org/officeDocument/2006/relationships" xmlns:a="http://schemas.openxmlformats.org/drawingml/2006/main" r:embed="R26180de230d1462a"/>
           <a:stretch xmlns:a="http://schemas.openxmlformats.org/drawingml/2006/main"/>
         </p:blipFill>
         <p:spPr>
@@ -24845,7 +24738,7 @@
           <p:cNvPr id="21" name="">
             <a:extLst xmlns:a="http://schemas.openxmlformats.org/drawingml/2006/main">
               <a:ext uri="{FF2B5EF4-FFF2-40B4-BE49-F238E27FC236}">
-                <a16:creationId xmlns:a16="http://schemas.microsoft.com/office/drawing/2014/main" id="{9C3C492A-3FEE-4FE1-A409-4A02B43C8D7C}"/>
+                <a16:creationId xmlns:a16="http://schemas.microsoft.com/office/drawing/2014/main" id="{0D072457-F0AB-43C1-B50E-E80CE7919351}"/>
               </a:ext>
             </a:extLst>
           </p:cNvPr>
@@ -24880,7 +24773,7 @@
           <p:cNvPr id="22" name="">
             <a:extLst xmlns:a="http://schemas.openxmlformats.org/drawingml/2006/main">
               <a:ext uri="{FF2B5EF4-FFF2-40B4-BE49-F238E27FC236}">
-                <a16:creationId xmlns:a16="http://schemas.microsoft.com/office/drawing/2014/main" id="{DBF70ED1-237F-4CF5-AA31-9218C2183E41}"/>
+                <a16:creationId xmlns:a16="http://schemas.microsoft.com/office/drawing/2014/main" id="{FB615CF8-C62C-4742-AAB6-BC0CB1F576F1}"/>
               </a:ext>
             </a:extLst>
           </p:cNvPr>
@@ -24938,7 +24831,7 @@
           <p:cNvPr id="23" name="">
             <a:extLst xmlns:a="http://schemas.openxmlformats.org/drawingml/2006/main">
               <a:ext uri="{FF2B5EF4-FFF2-40B4-BE49-F238E27FC236}">
-                <a16:creationId xmlns:a16="http://schemas.microsoft.com/office/drawing/2014/main" id="{0FEB2853-A0D9-49D5-9032-8545EBA56AA8}"/>
+                <a16:creationId xmlns:a16="http://schemas.microsoft.com/office/drawing/2014/main" id="{54D4CB56-04B7-45F3-B104-198E8158BBB2}"/>
               </a:ext>
             </a:extLst>
           </p:cNvPr>
@@ -24969,7 +24862,7 @@
           <p:cNvPr id="24" name="">
             <a:extLst xmlns:a="http://schemas.openxmlformats.org/drawingml/2006/main">
               <a:ext uri="{FF2B5EF4-FFF2-40B4-BE49-F238E27FC236}">
-                <a16:creationId xmlns:a16="http://schemas.microsoft.com/office/drawing/2014/main" id="{B1C10AED-E5BD-4165-BFFC-B9442B52A6DC}"/>
+                <a16:creationId xmlns:a16="http://schemas.microsoft.com/office/drawing/2014/main" id="{D2B8ABCD-38D8-4274-86B3-592FC1201773}"/>
               </a:ext>
             </a:extLst>
           </p:cNvPr>
@@ -25027,7 +24920,7 @@
           <p:cNvPr id="25" name="">
             <a:extLst xmlns:a="http://schemas.openxmlformats.org/drawingml/2006/main">
               <a:ext uri="{FF2B5EF4-FFF2-40B4-BE49-F238E27FC236}">
-                <a16:creationId xmlns:a16="http://schemas.microsoft.com/office/drawing/2014/main" id="{EEF7B462-F9EE-468E-AB9E-6F6555C6CCDC}"/>
+                <a16:creationId xmlns:a16="http://schemas.microsoft.com/office/drawing/2014/main" id="{9E6DCFEC-FE0B-486B-A43A-54881B606063}"/>
               </a:ext>
             </a:extLst>
           </p:cNvPr>
@@ -25058,7 +24951,7 @@
           <p:cNvPr id="26" name="">
             <a:extLst xmlns:a="http://schemas.openxmlformats.org/drawingml/2006/main">
               <a:ext uri="{FF2B5EF4-FFF2-40B4-BE49-F238E27FC236}">
-                <a16:creationId xmlns:a16="http://schemas.microsoft.com/office/drawing/2014/main" id="{17B53E01-6BCD-464D-9C5F-ED4291F98B16}"/>
+                <a16:creationId xmlns:a16="http://schemas.microsoft.com/office/drawing/2014/main" id="{40563D25-C56B-4BF7-8A9B-F296B7FE47AF}"/>
               </a:ext>
             </a:extLst>
           </p:cNvPr>
@@ -25116,7 +25009,7 @@
           <p:cNvPr id="27" name="">
             <a:extLst xmlns:a="http://schemas.openxmlformats.org/drawingml/2006/main">
               <a:ext uri="{FF2B5EF4-FFF2-40B4-BE49-F238E27FC236}">
-                <a16:creationId xmlns:a16="http://schemas.microsoft.com/office/drawing/2014/main" id="{00DFD515-924C-4536-A286-A7D2C3D4E2E0}"/>
+                <a16:creationId xmlns:a16="http://schemas.microsoft.com/office/drawing/2014/main" id="{889B03B9-E164-4A43-BC12-4D73BD5B0761}"/>
               </a:ext>
             </a:extLst>
           </p:cNvPr>
@@ -25147,7 +25040,7 @@
           <p:cNvPr id="28" name="">
             <a:extLst xmlns:a="http://schemas.openxmlformats.org/drawingml/2006/main">
               <a:ext uri="{FF2B5EF4-FFF2-40B4-BE49-F238E27FC236}">
-                <a16:creationId xmlns:a16="http://schemas.microsoft.com/office/drawing/2014/main" id="{D803335F-5164-4380-98AF-783BAA4CA40C}"/>
+                <a16:creationId xmlns:a16="http://schemas.microsoft.com/office/drawing/2014/main" id="{E2F9F224-F972-4C5C-B298-913949E4014E}"/>
               </a:ext>
             </a:extLst>
           </p:cNvPr>
@@ -25205,7 +25098,7 @@
           <p:cNvPr id="29" name="">
             <a:extLst xmlns:a="http://schemas.openxmlformats.org/drawingml/2006/main">
               <a:ext uri="{FF2B5EF4-FFF2-40B4-BE49-F238E27FC236}">
-                <a16:creationId xmlns:a16="http://schemas.microsoft.com/office/drawing/2014/main" id="{CD0FA4E7-6BBA-46CD-9365-1FD23CEBE642}"/>
+                <a16:creationId xmlns:a16="http://schemas.microsoft.com/office/drawing/2014/main" id="{0D4143BF-DA20-4558-AA82-B1DF989D338C}"/>
               </a:ext>
             </a:extLst>
           </p:cNvPr>
@@ -25263,7 +25156,7 @@
           <p:cNvPr id="30" name="">
             <a:extLst xmlns:a="http://schemas.openxmlformats.org/drawingml/2006/main">
               <a:ext uri="{FF2B5EF4-FFF2-40B4-BE49-F238E27FC236}">
-                <a16:creationId xmlns:a16="http://schemas.microsoft.com/office/drawing/2014/main" id="{B176053C-2720-4D25-A9AA-CDD3C91E29A9}"/>
+                <a16:creationId xmlns:a16="http://schemas.microsoft.com/office/drawing/2014/main" id="{DF797CE7-3A95-40A9-84F1-602C027E4844}"/>
               </a:ext>
             </a:extLst>
           </p:cNvPr>
@@ -25388,7 +25281,7 @@
     </p:spTree>
     <p:extLst>
       <p:ext uri="{BB962C8B-B14F-4D97-AF65-F5344CB8AC3E}">
-        <p14:creationId xmlns:p14="http://schemas.microsoft.com/office/powerpoint/2010/main" val="1794713775"/>
+        <p14:creationId xmlns:p14="http://schemas.microsoft.com/office/powerpoint/2010/main" val="519823252"/>
       </p:ext>
     </p:extLst>
   </p:cSld>
